--- a/docs/capstone/submission/AURA_Forge_Final_Presentation.pptx
+++ b/docs/capstone/submission/AURA_Forge_Final_Presentation.pptx
@@ -2,22 +2,22 @@
 <file path=ppt/presentation.xml><?xml version="1.0" encoding="utf-8"?>
 <p:presentation xmlns:p="http://schemas.openxmlformats.org/presentationml/2006/main">
   <p:sldMasterIdLst>
-    <p:sldMasterId xmlns:r="http://schemas.openxmlformats.org/officeDocument/2006/relationships" id="2147483648" r:id="R116d0120c4194889"/>
+    <p:sldMasterId xmlns:r="http://schemas.openxmlformats.org/officeDocument/2006/relationships" id="2147483648" r:id="R0506d1f43ffc4fe8"/>
   </p:sldMasterIdLst>
   <p:notesMasterIdLst>
-    <p:notesMasterId xmlns:r="http://schemas.openxmlformats.org/officeDocument/2006/relationships" r:id="Rcc7ed2fc6dad4b0b"/>
+    <p:notesMasterId xmlns:r="http://schemas.openxmlformats.org/officeDocument/2006/relationships" r:id="Re068199de6d742ce"/>
   </p:notesMasterIdLst>
   <p:sldIdLst>
-    <p:sldId xmlns:r="http://schemas.openxmlformats.org/officeDocument/2006/relationships" id="256" r:id="Rf523da631bb74574"/>
-    <p:sldId xmlns:r="http://schemas.openxmlformats.org/officeDocument/2006/relationships" id="257" r:id="R809add4b249e4e37"/>
-    <p:sldId xmlns:r="http://schemas.openxmlformats.org/officeDocument/2006/relationships" id="258" r:id="R939aa57c4a2540a0"/>
-    <p:sldId xmlns:r="http://schemas.openxmlformats.org/officeDocument/2006/relationships" id="259" r:id="R14a19e0267d34097"/>
-    <p:sldId xmlns:r="http://schemas.openxmlformats.org/officeDocument/2006/relationships" id="260" r:id="Rc773a6d43d644f02"/>
-    <p:sldId xmlns:r="http://schemas.openxmlformats.org/officeDocument/2006/relationships" id="261" r:id="R2256448118fc4a7e"/>
-    <p:sldId xmlns:r="http://schemas.openxmlformats.org/officeDocument/2006/relationships" id="262" r:id="R1d18a97675f94f8c"/>
-    <p:sldId xmlns:r="http://schemas.openxmlformats.org/officeDocument/2006/relationships" id="263" r:id="R27e0802d6c054992"/>
-    <p:sldId xmlns:r="http://schemas.openxmlformats.org/officeDocument/2006/relationships" id="264" r:id="Rd6184a0f833341fc"/>
-    <p:sldId xmlns:r="http://schemas.openxmlformats.org/officeDocument/2006/relationships" id="265" r:id="R7c0e226a01484c3b"/>
+    <p:sldId xmlns:r="http://schemas.openxmlformats.org/officeDocument/2006/relationships" id="256" r:id="R00a0c0223af74153"/>
+    <p:sldId xmlns:r="http://schemas.openxmlformats.org/officeDocument/2006/relationships" id="257" r:id="R240fad9e81e24382"/>
+    <p:sldId xmlns:r="http://schemas.openxmlformats.org/officeDocument/2006/relationships" id="258" r:id="R3179cec634aa4baa"/>
+    <p:sldId xmlns:r="http://schemas.openxmlformats.org/officeDocument/2006/relationships" id="259" r:id="Rc524ee6683004847"/>
+    <p:sldId xmlns:r="http://schemas.openxmlformats.org/officeDocument/2006/relationships" id="260" r:id="R0e117e19a42143fc"/>
+    <p:sldId xmlns:r="http://schemas.openxmlformats.org/officeDocument/2006/relationships" id="261" r:id="Rb689151d07824dd7"/>
+    <p:sldId xmlns:r="http://schemas.openxmlformats.org/officeDocument/2006/relationships" id="262" r:id="R3a64eaf000f54e27"/>
+    <p:sldId xmlns:r="http://schemas.openxmlformats.org/officeDocument/2006/relationships" id="263" r:id="Rf52392b3e44448e5"/>
+    <p:sldId xmlns:r="http://schemas.openxmlformats.org/officeDocument/2006/relationships" id="264" r:id="R4902b5ad0af44467"/>
+    <p:sldId xmlns:r="http://schemas.openxmlformats.org/officeDocument/2006/relationships" id="265" r:id="R4b752a8e5fd54386"/>
   </p:sldIdLst>
   <p:sldSz cx="12192000" cy="6858000"/>
   <p:notesSz cx="6858000" cy="9144000"/>
@@ -946,7 +946,7 @@
           </a:p>
           <a:p xmlns:a="http://schemas.openxmlformats.org/drawingml/2006/main">
             <a:r>
-              <a:t>What to say: LOW kept an implementer, an independent reviewer, and deterministic gates. MEDIUM kept implementer, reviewer, tester, and one final approval. HIGH kept the full governed route.</a:t>
+              <a:t>What to say: LOW kept an implementer, an independent reviewer, and deterministic gates. MEDIUM kept implementer, reviewer, tester, and one final approval. HIGH kept the full governed route including final approval and Project Manager.</a:t>
             </a:r>
           </a:p>
           <a:p xmlns:a="http://schemas.openxmlformats.org/drawingml/2006/main">
@@ -956,7 +956,7 @@
           </a:p>
           <a:p xmlns:a="http://schemas.openxmlformats.org/drawingml/2006/main">
             <a:r>
-              <a:t>What to point at: Point to each route row, especially the HIGH row.</a:t>
+              <a:t>What to point at: Point to each route row, especially the complete HIGH row.</a:t>
             </a:r>
           </a:p>
           <a:p xmlns:a="http://schemas.openxmlformats.org/drawingml/2006/main">
@@ -1076,7 +1076,7 @@
           </a:p>
           <a:p xmlns:a="http://schemas.openxmlformats.org/drawingml/2006/main">
             <a:r>
-              <a:t>What to point at: Point to the three scenario boxes and the matched-rules line.</a:t>
+              <a:t>What to point at: Point to the three scenario cards and the matched-rules line.</a:t>
             </a:r>
           </a:p>
           <a:p xmlns:a="http://schemas.openxmlformats.org/drawingml/2006/main">
@@ -1431,7 +1431,7 @@
           </a:p>
           <a:p xmlns:a="http://schemas.openxmlformats.org/drawingml/2006/main">
             <a:r>
-              <a:t>What to say: The repository did not stop at local files. The final branch passed GitHub Actions. The advisory review also behaved safely: when the AI secret was unavailable, it skipped gracefully instead of failing open.</a:t>
+              <a:t>What to say: The repository did not stop at local files. The submission package passed GitHub Actions in verified green run 31520499134. The advisory review also behaved safely: when the AI secret was unavailable, it skipped gracefully instead of failing open.</a:t>
             </a:r>
           </a:p>
           <a:p xmlns:a="http://schemas.openxmlformats.org/drawingml/2006/main">
@@ -1441,7 +1441,7 @@
           </a:p>
           <a:p xmlns:a="http://schemas.openxmlformats.org/drawingml/2006/main">
             <a:r>
-              <a:t>What to point at: Point to final run 31517900793 and the green job list.</a:t>
+              <a:t>What to point at: Point to run 31520499134 and the green job list.</a:t>
             </a:r>
           </a:p>
           <a:p xmlns:a="http://schemas.openxmlformats.org/drawingml/2006/main">
@@ -1664,7 +1664,7 @@
   </p:cSld>
   <p:clrMap bg1="lt1" tx1="dk1" bg2="lt2" tx2="dk2" accent1="accent1" accent2="accent2" accent3="accent3" accent4="accent4" accent5="accent5" accent6="accent6" hlink="hlink" folHlink="folHlink"/>
   <p:sldLayoutIdLst>
-    <p:sldLayoutId xmlns:r="http://schemas.openxmlformats.org/officeDocument/2006/relationships" id="2147483649" r:id="Rdb7af6c91573467b"/>
+    <p:sldLayoutId xmlns:r="http://schemas.openxmlformats.org/officeDocument/2006/relationships" id="2147483649" r:id="R3e009b6ee9d44dd8"/>
   </p:sldLayoutIdLst>
   <p:txStyles>
     <p:titleStyle>
@@ -2215,7 +2215,7 @@
           <p:cNvPr id="6" name="">
             <a:extLst xmlns:a="http://schemas.openxmlformats.org/drawingml/2006/main">
               <a:ext uri="{FF2B5EF4-FFF2-40B4-BE49-F238E27FC236}">
-                <a16:creationId xmlns:a16="http://schemas.microsoft.com/office/drawing/2014/main" id="{95320A89-93F3-41D7-B318-43E8A2E516FF}"/>
+                <a16:creationId xmlns:a16="http://schemas.microsoft.com/office/drawing/2014/main" id="{71E8B9BE-3B6D-409E-86E5-464DF056D4B9}"/>
               </a:ext>
             </a:extLst>
           </p:cNvPr>
@@ -2265,7 +2265,7 @@
           <p:cNvPr id="2" name="">
             <a:extLst xmlns:a="http://schemas.openxmlformats.org/drawingml/2006/main">
               <a:ext uri="{FF2B5EF4-FFF2-40B4-BE49-F238E27FC236}">
-                <a16:creationId xmlns:a16="http://schemas.microsoft.com/office/drawing/2014/main" id="{491BCB77-A209-428B-8209-4D009F408CDE}"/>
+                <a16:creationId xmlns:a16="http://schemas.microsoft.com/office/drawing/2014/main" id="{B661673C-EC2A-4F4F-8CED-E40FD51B13B7}"/>
               </a:ext>
             </a:extLst>
           </p:cNvPr>
@@ -2315,7 +2315,7 @@
           <p:cNvPr id="3" name="">
             <a:extLst xmlns:a="http://schemas.openxmlformats.org/drawingml/2006/main">
               <a:ext uri="{FF2B5EF4-FFF2-40B4-BE49-F238E27FC236}">
-                <a16:creationId xmlns:a16="http://schemas.microsoft.com/office/drawing/2014/main" id="{B4D16D1A-74D6-4DF3-B4A4-01C7806CFF9D}"/>
+                <a16:creationId xmlns:a16="http://schemas.microsoft.com/office/drawing/2014/main" id="{808EEB88-2967-4F8F-9504-5595798A9A15}"/>
               </a:ext>
             </a:extLst>
           </p:cNvPr>
@@ -2382,7 +2382,7 @@
           <p:cNvPr id="4" name="">
             <a:extLst xmlns:a="http://schemas.openxmlformats.org/drawingml/2006/main">
               <a:ext uri="{FF2B5EF4-FFF2-40B4-BE49-F238E27FC236}">
-                <a16:creationId xmlns:a16="http://schemas.microsoft.com/office/drawing/2014/main" id="{3BCFA988-A857-4F58-804E-17704ECAFAFC}"/>
+                <a16:creationId xmlns:a16="http://schemas.microsoft.com/office/drawing/2014/main" id="{CD2FC89E-A301-4EDA-A55A-49D6974F8BC2}"/>
               </a:ext>
             </a:extLst>
           </p:cNvPr>
@@ -2417,7 +2417,7 @@
           <p:cNvPr id="5" name="">
             <a:extLst xmlns:a="http://schemas.openxmlformats.org/drawingml/2006/main">
               <a:ext uri="{FF2B5EF4-FFF2-40B4-BE49-F238E27FC236}">
-                <a16:creationId xmlns:a16="http://schemas.microsoft.com/office/drawing/2014/main" id="{917BF462-EDCC-4C96-83D5-5E785281D9C6}"/>
+                <a16:creationId xmlns:a16="http://schemas.microsoft.com/office/drawing/2014/main" id="{97BE578F-BBF4-4B8A-83BA-0F090950EAA0}"/>
               </a:ext>
             </a:extLst>
           </p:cNvPr>
@@ -2465,7 +2465,7 @@
     </p:spTree>
     <p:extLst>
       <p:ext uri="{BB962C8B-B14F-4D97-AF65-F5344CB8AC3E}">
-        <p14:creationId xmlns:p14="http://schemas.microsoft.com/office/powerpoint/2010/main" val="1272741740"/>
+        <p14:creationId xmlns:p14="http://schemas.microsoft.com/office/powerpoint/2010/main" val="468072439"/>
       </p:ext>
     </p:extLst>
   </p:cSld>
@@ -2493,10 +2493,10 @@
       </p:grpSpPr>
       <p:sp>
         <p:nvSpPr>
-          <p:cNvPr id="10" name="slide-title">
-            <a:extLst xmlns:a="http://schemas.openxmlformats.org/drawingml/2006/main">
-              <a:ext uri="{FF2B5EF4-FFF2-40B4-BE49-F238E27FC236}">
-                <a16:creationId xmlns:a16="http://schemas.microsoft.com/office/drawing/2014/main" id="{C3279E94-4D9F-4C68-864A-3971A7C67E94}"/>
+          <p:cNvPr id="10" name="">
+            <a:extLst xmlns:a="http://schemas.openxmlformats.org/drawingml/2006/main">
+              <a:ext uri="{FF2B5EF4-FFF2-40B4-BE49-F238E27FC236}">
+                <a16:creationId xmlns:a16="http://schemas.microsoft.com/office/drawing/2014/main" id="{15F125A6-249A-4CB9-8C85-D915B3C151EB}"/>
               </a:ext>
             </a:extLst>
           </p:cNvPr>
@@ -2508,7 +2508,7 @@
         <p:spPr>
           <a:xfrm xmlns:a="http://schemas.openxmlformats.org/drawingml/2006/main">
             <a:off x="666750" y="323850"/>
-            <a:ext cx="8763000" cy="552450"/>
+            <a:ext cx="9715500" cy="495300"/>
           </a:xfrm>
           <a:prstGeom xmlns:a="http://schemas.openxmlformats.org/drawingml/2006/main" prst="rect">
             <a:avLst/>
@@ -2543,22 +2543,22 @@
       </p:sp>
       <p:sp>
         <p:nvSpPr>
-          <p:cNvPr id="2" name="slide-subtitle">
-            <a:extLst xmlns:a="http://schemas.openxmlformats.org/drawingml/2006/main">
-              <a:ext uri="{FF2B5EF4-FFF2-40B4-BE49-F238E27FC236}">
-                <a16:creationId xmlns:a16="http://schemas.microsoft.com/office/drawing/2014/main" id="{C2F0DF24-3D29-4765-8545-1D74B8086A12}"/>
-              </a:ext>
-            </a:extLst>
-          </p:cNvPr>
-          <p:cNvSpPr>
-            <a:spLocks xmlns:a="http://schemas.openxmlformats.org/drawingml/2006/main" noGrp="1"/>
-          </p:cNvSpPr>
-          <p:nvPr/>
-        </p:nvSpPr>
-        <p:spPr>
-          <a:xfrm xmlns:a="http://schemas.openxmlformats.org/drawingml/2006/main">
-            <a:off x="666750" y="838200"/>
-            <a:ext cx="9144000" cy="323850"/>
+          <p:cNvPr id="2" name="">
+            <a:extLst xmlns:a="http://schemas.openxmlformats.org/drawingml/2006/main">
+              <a:ext uri="{FF2B5EF4-FFF2-40B4-BE49-F238E27FC236}">
+                <a16:creationId xmlns:a16="http://schemas.microsoft.com/office/drawing/2014/main" id="{6A1C5A00-72FB-4684-919C-711CC3765533}"/>
+              </a:ext>
+            </a:extLst>
+          </p:cNvPr>
+          <p:cNvSpPr>
+            <a:spLocks xmlns:a="http://schemas.openxmlformats.org/drawingml/2006/main" noGrp="1"/>
+          </p:cNvSpPr>
+          <p:nvPr/>
+        </p:nvSpPr>
+        <p:spPr>
+          <a:xfrm xmlns:a="http://schemas.openxmlformats.org/drawingml/2006/main">
+            <a:off x="666750" y="876300"/>
+            <a:ext cx="9810750" cy="285750"/>
           </a:xfrm>
           <a:prstGeom xmlns:a="http://schemas.openxmlformats.org/drawingml/2006/main" prst="rect">
             <a:avLst/>
@@ -2593,10 +2593,10 @@
       </p:sp>
       <p:sp>
         <p:nvSpPr>
-          <p:cNvPr id="3" name="slide-number">
-            <a:extLst xmlns:a="http://schemas.openxmlformats.org/drawingml/2006/main">
-              <a:ext uri="{FF2B5EF4-FFF2-40B4-BE49-F238E27FC236}">
-                <a16:creationId xmlns:a16="http://schemas.microsoft.com/office/drawing/2014/main" id="{0A77538A-6E37-4D11-89F5-566F0AF48BB1}"/>
+          <p:cNvPr id="3" name="">
+            <a:extLst xmlns:a="http://schemas.openxmlformats.org/drawingml/2006/main">
+              <a:ext uri="{FF2B5EF4-FFF2-40B4-BE49-F238E27FC236}">
+                <a16:creationId xmlns:a16="http://schemas.microsoft.com/office/drawing/2014/main" id="{B7A243D9-70CF-4DF5-B3A6-7D36B47896E1}"/>
               </a:ext>
             </a:extLst>
           </p:cNvPr>
@@ -2646,7 +2646,7 @@
           <p:cNvPr id="4" name="">
             <a:extLst xmlns:a="http://schemas.openxmlformats.org/drawingml/2006/main">
               <a:ext uri="{FF2B5EF4-FFF2-40B4-BE49-F238E27FC236}">
-                <a16:creationId xmlns:a16="http://schemas.microsoft.com/office/drawing/2014/main" id="{C667FB15-9113-43BD-80F0-81260E3913AE}"/>
+                <a16:creationId xmlns:a16="http://schemas.microsoft.com/office/drawing/2014/main" id="{91AC9DEE-774B-466C-9882-87689D756776}"/>
               </a:ext>
             </a:extLst>
           </p:cNvPr>
@@ -2696,47 +2696,81 @@
           <p:cNvPr id="5" name="">
             <a:extLst xmlns:a="http://schemas.openxmlformats.org/drawingml/2006/main">
               <a:ext uri="{FF2B5EF4-FFF2-40B4-BE49-F238E27FC236}">
-                <a16:creationId xmlns:a16="http://schemas.microsoft.com/office/drawing/2014/main" id="{495848EC-E590-47D6-9334-91CD47F8F84C}"/>
-              </a:ext>
-            </a:extLst>
-          </p:cNvPr>
-          <p:cNvSpPr>
-            <a:spLocks xmlns:a="http://schemas.openxmlformats.org/drawingml/2006/main" noGrp="1"/>
-          </p:cNvSpPr>
-          <p:nvPr/>
-        </p:nvSpPr>
-        <p:spPr>
-          <a:xfrm xmlns:a="http://schemas.openxmlformats.org/drawingml/2006/main">
-            <a:off x="1000125" y="2143125"/>
-            <a:ext cx="4000500" cy="1143000"/>
-          </a:xfrm>
-          <a:prstGeom xmlns:a="http://schemas.openxmlformats.org/drawingml/2006/main" prst="rect">
-            <a:avLst/>
-          </a:prstGeom>
-          <a:noFill xmlns:a="http://schemas.openxmlformats.org/drawingml/2006/main"/>
-          <a:ln xmlns:a="http://schemas.openxmlformats.org/drawingml/2006/main" w="0">
-            <a:noFill/>
-            <a:prstDash val="solid"/>
-          </a:ln>
-        </p:spPr>
-        <p:txBody>
-          <a:bodyPr xmlns:a="http://schemas.openxmlformats.org/drawingml/2006/main"/>
-          <a:lstStyle xmlns:a="http://schemas.openxmlformats.org/drawingml/2006/main"/>
-          <a:p xmlns:a="http://schemas.openxmlformats.org/drawingml/2006/main">
-            <a:pPr>
-              <a:defRPr sz="2250" b="1">
-                <a:solidFill>
-                  <a:srgbClr val="F4F8FB"/>
-                </a:solidFill>
-              </a:defRPr>
-            </a:pPr>
-            <a:r>
-              <a:rPr sz="2250" b="1">
-                <a:solidFill>
-                  <a:srgbClr val="F4F8FB"/>
-                </a:solidFill>
-              </a:rPr>
-              <a:t>Quality improved. LOW and MEDIUM overhead dropped. HIGH governance stayed in place.</a:t>
+                <a16:creationId xmlns:a16="http://schemas.microsoft.com/office/drawing/2014/main" id="{7DC1CBD1-7D3E-420B-9E46-0C83816EFB38}"/>
+              </a:ext>
+            </a:extLst>
+          </p:cNvPr>
+          <p:cNvSpPr>
+            <a:spLocks xmlns:a="http://schemas.openxmlformats.org/drawingml/2006/main" noGrp="1"/>
+          </p:cNvSpPr>
+          <p:nvPr/>
+        </p:nvSpPr>
+        <p:spPr>
+          <a:xfrm xmlns:a="http://schemas.openxmlformats.org/drawingml/2006/main">
+            <a:off x="1000125" y="2238375"/>
+            <a:ext cx="4191000" cy="1143000"/>
+          </a:xfrm>
+          <a:prstGeom xmlns:a="http://schemas.openxmlformats.org/drawingml/2006/main" prst="rect">
+            <a:avLst/>
+          </a:prstGeom>
+          <a:noFill xmlns:a="http://schemas.openxmlformats.org/drawingml/2006/main"/>
+          <a:ln xmlns:a="http://schemas.openxmlformats.org/drawingml/2006/main" w="0">
+            <a:noFill/>
+            <a:prstDash val="solid"/>
+          </a:ln>
+        </p:spPr>
+        <p:txBody>
+          <a:bodyPr xmlns:a="http://schemas.openxmlformats.org/drawingml/2006/main"/>
+          <a:lstStyle xmlns:a="http://schemas.openxmlformats.org/drawingml/2006/main"/>
+          <a:p xmlns:a="http://schemas.openxmlformats.org/drawingml/2006/main">
+            <a:pPr>
+              <a:defRPr sz="2100" b="1">
+                <a:solidFill>
+                  <a:srgbClr val="F4F8FB"/>
+                </a:solidFill>
+              </a:defRPr>
+            </a:pPr>
+            <a:r>
+              <a:rPr sz="2100" b="1">
+                <a:solidFill>
+                  <a:srgbClr val="F4F8FB"/>
+                </a:solidFill>
+              </a:rPr>
+              <a:t>Quality improved. LOW and</a:t>
+            </a:r>
+          </a:p>
+          <a:p xmlns:a="http://schemas.openxmlformats.org/drawingml/2006/main">
+            <a:pPr>
+              <a:defRPr sz="2100" b="1">
+                <a:solidFill>
+                  <a:srgbClr val="F4F8FB"/>
+                </a:solidFill>
+              </a:defRPr>
+            </a:pPr>
+            <a:r>
+              <a:rPr sz="2100" b="1">
+                <a:solidFill>
+                  <a:srgbClr val="F4F8FB"/>
+                </a:solidFill>
+              </a:rPr>
+              <a:t>MEDIUM overhead dropped.</a:t>
+            </a:r>
+          </a:p>
+          <a:p xmlns:a="http://schemas.openxmlformats.org/drawingml/2006/main">
+            <a:pPr>
+              <a:defRPr sz="2100" b="1">
+                <a:solidFill>
+                  <a:srgbClr val="F4F8FB"/>
+                </a:solidFill>
+              </a:defRPr>
+            </a:pPr>
+            <a:r>
+              <a:rPr sz="2100" b="1">
+                <a:solidFill>
+                  <a:srgbClr val="F4F8FB"/>
+                </a:solidFill>
+              </a:rPr>
+              <a:t>HIGH governance stayed in place.</a:t>
             </a:r>
           </a:p>
         </p:txBody>
@@ -2746,7 +2780,7 @@
           <p:cNvPr id="6" name="">
             <a:extLst xmlns:a="http://schemas.openxmlformats.org/drawingml/2006/main">
               <a:ext uri="{FF2B5EF4-FFF2-40B4-BE49-F238E27FC236}">
-                <a16:creationId xmlns:a16="http://schemas.microsoft.com/office/drawing/2014/main" id="{4327C8C2-E543-4E11-A1C2-FDD05AA4F3A8}"/>
+                <a16:creationId xmlns:a16="http://schemas.microsoft.com/office/drawing/2014/main" id="{97E73727-5188-4A7A-8160-487405F336EC}"/>
               </a:ext>
             </a:extLst>
           </p:cNvPr>
@@ -2796,47 +2830,98 @@
           <p:cNvPr id="7" name="">
             <a:extLst xmlns:a="http://schemas.openxmlformats.org/drawingml/2006/main">
               <a:ext uri="{FF2B5EF4-FFF2-40B4-BE49-F238E27FC236}">
-                <a16:creationId xmlns:a16="http://schemas.microsoft.com/office/drawing/2014/main" id="{161559E7-ECA4-4184-8892-4FE13349C556}"/>
-              </a:ext>
-            </a:extLst>
-          </p:cNvPr>
-          <p:cNvSpPr>
-            <a:spLocks xmlns:a="http://schemas.openxmlformats.org/drawingml/2006/main" noGrp="1"/>
-          </p:cNvSpPr>
-          <p:nvPr/>
-        </p:nvSpPr>
-        <p:spPr>
-          <a:xfrm xmlns:a="http://schemas.openxmlformats.org/drawingml/2006/main">
-            <a:off x="6572250" y="2143125"/>
-            <a:ext cx="4095750" cy="1333500"/>
-          </a:xfrm>
-          <a:prstGeom xmlns:a="http://schemas.openxmlformats.org/drawingml/2006/main" prst="rect">
-            <a:avLst/>
-          </a:prstGeom>
-          <a:noFill xmlns:a="http://schemas.openxmlformats.org/drawingml/2006/main"/>
-          <a:ln xmlns:a="http://schemas.openxmlformats.org/drawingml/2006/main" w="0">
-            <a:noFill/>
-            <a:prstDash val="solid"/>
-          </a:ln>
-        </p:spPr>
-        <p:txBody>
-          <a:bodyPr xmlns:a="http://schemas.openxmlformats.org/drawingml/2006/main"/>
-          <a:lstStyle xmlns:a="http://schemas.openxmlformats.org/drawingml/2006/main"/>
-          <a:p xmlns:a="http://schemas.openxmlformats.org/drawingml/2006/main">
-            <a:pPr>
-              <a:defRPr sz="2100" b="1">
-                <a:solidFill>
-                  <a:srgbClr val="F4F8FB"/>
-                </a:solidFill>
-              </a:defRPr>
-            </a:pPr>
-            <a:r>
-              <a:rPr sz="2100" b="1">
-                <a:solidFill>
-                  <a:srgbClr val="F4F8FB"/>
-                </a:solidFill>
-              </a:rPr>
-              <a:t>Three representative scenarios only. No production deployment. Advisory AI was unavailable in CI and intentionally degraded safely.</a:t>
+                <a16:creationId xmlns:a16="http://schemas.microsoft.com/office/drawing/2014/main" id="{E381F43B-FDC6-4685-AC7A-DFC8C871FF2D}"/>
+              </a:ext>
+            </a:extLst>
+          </p:cNvPr>
+          <p:cNvSpPr>
+            <a:spLocks xmlns:a="http://schemas.openxmlformats.org/drawingml/2006/main" noGrp="1"/>
+          </p:cNvSpPr>
+          <p:nvPr/>
+        </p:nvSpPr>
+        <p:spPr>
+          <a:xfrm xmlns:a="http://schemas.openxmlformats.org/drawingml/2006/main">
+            <a:off x="6572250" y="2238375"/>
+            <a:ext cx="4095750" cy="1428750"/>
+          </a:xfrm>
+          <a:prstGeom xmlns:a="http://schemas.openxmlformats.org/drawingml/2006/main" prst="rect">
+            <a:avLst/>
+          </a:prstGeom>
+          <a:noFill xmlns:a="http://schemas.openxmlformats.org/drawingml/2006/main"/>
+          <a:ln xmlns:a="http://schemas.openxmlformats.org/drawingml/2006/main" w="0">
+            <a:noFill/>
+            <a:prstDash val="solid"/>
+          </a:ln>
+        </p:spPr>
+        <p:txBody>
+          <a:bodyPr xmlns:a="http://schemas.openxmlformats.org/drawingml/2006/main"/>
+          <a:lstStyle xmlns:a="http://schemas.openxmlformats.org/drawingml/2006/main"/>
+          <a:p xmlns:a="http://schemas.openxmlformats.org/drawingml/2006/main">
+            <a:pPr>
+              <a:defRPr sz="2025" b="1">
+                <a:solidFill>
+                  <a:srgbClr val="F4F8FB"/>
+                </a:solidFill>
+              </a:defRPr>
+            </a:pPr>
+            <a:r>
+              <a:rPr sz="2025" b="1">
+                <a:solidFill>
+                  <a:srgbClr val="F4F8FB"/>
+                </a:solidFill>
+              </a:rPr>
+              <a:t>Three representative</a:t>
+            </a:r>
+          </a:p>
+          <a:p xmlns:a="http://schemas.openxmlformats.org/drawingml/2006/main">
+            <a:pPr>
+              <a:defRPr sz="2025" b="1">
+                <a:solidFill>
+                  <a:srgbClr val="F4F8FB"/>
+                </a:solidFill>
+              </a:defRPr>
+            </a:pPr>
+            <a:r>
+              <a:rPr sz="2025" b="1">
+                <a:solidFill>
+                  <a:srgbClr val="F4F8FB"/>
+                </a:solidFill>
+              </a:rPr>
+              <a:t>scenarios only. No production</a:t>
+            </a:r>
+          </a:p>
+          <a:p xmlns:a="http://schemas.openxmlformats.org/drawingml/2006/main">
+            <a:pPr>
+              <a:defRPr sz="2025" b="1">
+                <a:solidFill>
+                  <a:srgbClr val="F4F8FB"/>
+                </a:solidFill>
+              </a:defRPr>
+            </a:pPr>
+            <a:r>
+              <a:rPr sz="2025" b="1">
+                <a:solidFill>
+                  <a:srgbClr val="F4F8FB"/>
+                </a:solidFill>
+              </a:rPr>
+              <a:t>deployment. Advisory AI was</a:t>
+            </a:r>
+          </a:p>
+          <a:p xmlns:a="http://schemas.openxmlformats.org/drawingml/2006/main">
+            <a:pPr>
+              <a:defRPr sz="2025" b="1">
+                <a:solidFill>
+                  <a:srgbClr val="F4F8FB"/>
+                </a:solidFill>
+              </a:defRPr>
+            </a:pPr>
+            <a:r>
+              <a:rPr sz="2025" b="1">
+                <a:solidFill>
+                  <a:srgbClr val="F4F8FB"/>
+                </a:solidFill>
+              </a:rPr>
+              <a:t>unavailable in CI and safely skipped.</a:t>
             </a:r>
           </a:p>
         </p:txBody>
@@ -2846,23 +2931,23 @@
           <p:cNvPr id="8" name="">
             <a:extLst xmlns:a="http://schemas.openxmlformats.org/drawingml/2006/main">
               <a:ext uri="{FF2B5EF4-FFF2-40B4-BE49-F238E27FC236}">
-                <a16:creationId xmlns:a16="http://schemas.microsoft.com/office/drawing/2014/main" id="{35B8FBF4-E67B-4592-843E-E5D955A4FE43}"/>
-              </a:ext>
-            </a:extLst>
-          </p:cNvPr>
-          <p:cNvSpPr>
-            <a:spLocks xmlns:a="http://schemas.openxmlformats.org/drawingml/2006/main" noGrp="1"/>
-          </p:cNvSpPr>
-          <p:nvPr/>
-        </p:nvSpPr>
-        <p:spPr>
-          <a:xfrm xmlns:a="http://schemas.openxmlformats.org/drawingml/2006/main">
-            <a:off x="1571625" y="4333875"/>
-            <a:ext cx="8382000" cy="876300"/>
+                <a16:creationId xmlns:a16="http://schemas.microsoft.com/office/drawing/2014/main" id="{8E6C4C04-DBB2-4533-87C6-1BA9F4FD4EA7}"/>
+              </a:ext>
+            </a:extLst>
+          </p:cNvPr>
+          <p:cNvSpPr>
+            <a:spLocks xmlns:a="http://schemas.openxmlformats.org/drawingml/2006/main" noGrp="1"/>
+          </p:cNvSpPr>
+          <p:nvPr/>
+        </p:nvSpPr>
+        <p:spPr>
+          <a:xfrm xmlns:a="http://schemas.openxmlformats.org/drawingml/2006/main">
+            <a:off x="1571625" y="4476750"/>
+            <a:ext cx="8382000" cy="1181100"/>
           </a:xfrm>
           <a:prstGeom xmlns:a="http://schemas.openxmlformats.org/drawingml/2006/main" prst="roundRect">
             <a:avLst>
-              <a:gd name="adj" fmla="val 8696"/>
+              <a:gd name="adj" fmla="val 6452"/>
             </a:avLst>
           </a:prstGeom>
           <a:solidFill xmlns:a="http://schemas.openxmlformats.org/drawingml/2006/main">
@@ -2881,42 +2966,42 @@
           <p:cNvPr id="9" name="">
             <a:extLst xmlns:a="http://schemas.openxmlformats.org/drawingml/2006/main">
               <a:ext uri="{FF2B5EF4-FFF2-40B4-BE49-F238E27FC236}">
-                <a16:creationId xmlns:a16="http://schemas.microsoft.com/office/drawing/2014/main" id="{BF8CF9A6-EB6C-4570-9D18-A0137E600F47}"/>
-              </a:ext>
-            </a:extLst>
-          </p:cNvPr>
-          <p:cNvSpPr>
-            <a:spLocks xmlns:a="http://schemas.openxmlformats.org/drawingml/2006/main" noGrp="1"/>
-          </p:cNvSpPr>
-          <p:nvPr/>
-        </p:nvSpPr>
-        <p:spPr>
-          <a:xfrm xmlns:a="http://schemas.openxmlformats.org/drawingml/2006/main">
-            <a:off x="1952625" y="4619625"/>
-            <a:ext cx="7620000" cy="400050"/>
-          </a:xfrm>
-          <a:prstGeom xmlns:a="http://schemas.openxmlformats.org/drawingml/2006/main" prst="rect">
-            <a:avLst/>
-          </a:prstGeom>
-          <a:noFill xmlns:a="http://schemas.openxmlformats.org/drawingml/2006/main"/>
-          <a:ln xmlns:a="http://schemas.openxmlformats.org/drawingml/2006/main" w="0">
-            <a:noFill/>
-            <a:prstDash val="solid"/>
-          </a:ln>
-        </p:spPr>
-        <p:txBody>
-          <a:bodyPr xmlns:a="http://schemas.openxmlformats.org/drawingml/2006/main"/>
-          <a:lstStyle xmlns:a="http://schemas.openxmlformats.org/drawingml/2006/main"/>
-          <a:p xmlns:a="http://schemas.openxmlformats.org/drawingml/2006/main">
-            <a:pPr>
-              <a:defRPr sz="2025" b="1">
-                <a:solidFill>
-                  <a:srgbClr val="F4F8FB"/>
-                </a:solidFill>
-              </a:defRPr>
-            </a:pPr>
-            <a:r>
-              <a:rPr sz="2025" b="1">
+                <a16:creationId xmlns:a16="http://schemas.microsoft.com/office/drawing/2014/main" id="{28B8561C-DF8A-4D11-A3B8-90964D11D6F0}"/>
+              </a:ext>
+            </a:extLst>
+          </p:cNvPr>
+          <p:cNvSpPr>
+            <a:spLocks xmlns:a="http://schemas.openxmlformats.org/drawingml/2006/main" noGrp="1"/>
+          </p:cNvSpPr>
+          <p:nvPr/>
+        </p:nvSpPr>
+        <p:spPr>
+          <a:xfrm xmlns:a="http://schemas.openxmlformats.org/drawingml/2006/main">
+            <a:off x="1952625" y="4810125"/>
+            <a:ext cx="7620000" cy="552450"/>
+          </a:xfrm>
+          <a:prstGeom xmlns:a="http://schemas.openxmlformats.org/drawingml/2006/main" prst="rect">
+            <a:avLst/>
+          </a:prstGeom>
+          <a:noFill xmlns:a="http://schemas.openxmlformats.org/drawingml/2006/main"/>
+          <a:ln xmlns:a="http://schemas.openxmlformats.org/drawingml/2006/main" w="0">
+            <a:noFill/>
+            <a:prstDash val="solid"/>
+          </a:ln>
+        </p:spPr>
+        <p:txBody>
+          <a:bodyPr xmlns:a="http://schemas.openxmlformats.org/drawingml/2006/main"/>
+          <a:lstStyle xmlns:a="http://schemas.openxmlformats.org/drawingml/2006/main"/>
+          <a:p xmlns:a="http://schemas.openxmlformats.org/drawingml/2006/main">
+            <a:pPr>
+              <a:defRPr sz="1800" b="1">
+                <a:solidFill>
+                  <a:srgbClr val="F4F8FB"/>
+                </a:solidFill>
+              </a:defRPr>
+            </a:pPr>
+            <a:r>
+              <a:rPr sz="1800" b="1">
                 <a:solidFill>
                   <a:srgbClr val="F4F8FB"/>
                 </a:solidFill>
@@ -2929,7 +3014,7 @@
     </p:spTree>
     <p:extLst>
       <p:ext uri="{BB962C8B-B14F-4D97-AF65-F5344CB8AC3E}">
-        <p14:creationId xmlns:p14="http://schemas.microsoft.com/office/powerpoint/2010/main" val="1869949076"/>
+        <p14:creationId xmlns:p14="http://schemas.microsoft.com/office/powerpoint/2010/main" val="665362902"/>
       </p:ext>
     </p:extLst>
   </p:cSld>
@@ -2957,10 +3042,10 @@
       </p:grpSpPr>
       <p:sp>
         <p:nvSpPr>
-          <p:cNvPr id="28" name="slide-title">
-            <a:extLst xmlns:a="http://schemas.openxmlformats.org/drawingml/2006/main">
-              <a:ext uri="{FF2B5EF4-FFF2-40B4-BE49-F238E27FC236}">
-                <a16:creationId xmlns:a16="http://schemas.microsoft.com/office/drawing/2014/main" id="{FF8A8D51-4B46-44AF-983A-D0E0B19E0577}"/>
+          <p:cNvPr id="28" name="">
+            <a:extLst xmlns:a="http://schemas.openxmlformats.org/drawingml/2006/main">
+              <a:ext uri="{FF2B5EF4-FFF2-40B4-BE49-F238E27FC236}">
+                <a16:creationId xmlns:a16="http://schemas.microsoft.com/office/drawing/2014/main" id="{63B94C6F-6B46-40EB-9EB6-179A2C11117C}"/>
               </a:ext>
             </a:extLst>
           </p:cNvPr>
@@ -2972,30 +3057,30 @@
         <p:spPr>
           <a:xfrm xmlns:a="http://schemas.openxmlformats.org/drawingml/2006/main">
             <a:off x="666750" y="323850"/>
-            <a:ext cx="8763000" cy="552450"/>
-          </a:xfrm>
-          <a:prstGeom xmlns:a="http://schemas.openxmlformats.org/drawingml/2006/main" prst="rect">
-            <a:avLst/>
-          </a:prstGeom>
-          <a:noFill xmlns:a="http://schemas.openxmlformats.org/drawingml/2006/main"/>
-          <a:ln xmlns:a="http://schemas.openxmlformats.org/drawingml/2006/main" w="0">
-            <a:noFill/>
-            <a:prstDash val="solid"/>
-          </a:ln>
-        </p:spPr>
-        <p:txBody>
-          <a:bodyPr xmlns:a="http://schemas.openxmlformats.org/drawingml/2006/main"/>
-          <a:lstStyle xmlns:a="http://schemas.openxmlformats.org/drawingml/2006/main"/>
-          <a:p xmlns:a="http://schemas.openxmlformats.org/drawingml/2006/main">
-            <a:pPr>
-              <a:defRPr sz="2850" b="1">
-                <a:solidFill>
-                  <a:srgbClr val="F4F8FB"/>
-                </a:solidFill>
-              </a:defRPr>
-            </a:pPr>
-            <a:r>
-              <a:rPr sz="2850" b="1">
+            <a:ext cx="9715500" cy="495300"/>
+          </a:xfrm>
+          <a:prstGeom xmlns:a="http://schemas.openxmlformats.org/drawingml/2006/main" prst="rect">
+            <a:avLst/>
+          </a:prstGeom>
+          <a:noFill xmlns:a="http://schemas.openxmlformats.org/drawingml/2006/main"/>
+          <a:ln xmlns:a="http://schemas.openxmlformats.org/drawingml/2006/main" w="0">
+            <a:noFill/>
+            <a:prstDash val="solid"/>
+          </a:ln>
+        </p:spPr>
+        <p:txBody>
+          <a:bodyPr xmlns:a="http://schemas.openxmlformats.org/drawingml/2006/main"/>
+          <a:lstStyle xmlns:a="http://schemas.openxmlformats.org/drawingml/2006/main"/>
+          <a:p xmlns:a="http://schemas.openxmlformats.org/drawingml/2006/main">
+            <a:pPr>
+              <a:defRPr sz="2625" b="1">
+                <a:solidFill>
+                  <a:srgbClr val="F4F8FB"/>
+                </a:solidFill>
+              </a:defRPr>
+            </a:pPr>
+            <a:r>
+              <a:rPr sz="2625" b="1">
                 <a:solidFill>
                   <a:srgbClr val="F4F8FB"/>
                 </a:solidFill>
@@ -3007,22 +3092,22 @@
       </p:sp>
       <p:sp>
         <p:nvSpPr>
-          <p:cNvPr id="2" name="slide-subtitle">
-            <a:extLst xmlns:a="http://schemas.openxmlformats.org/drawingml/2006/main">
-              <a:ext uri="{FF2B5EF4-FFF2-40B4-BE49-F238E27FC236}">
-                <a16:creationId xmlns:a16="http://schemas.microsoft.com/office/drawing/2014/main" id="{E41433C2-5816-4152-9B3D-9F45EF762161}"/>
-              </a:ext>
-            </a:extLst>
-          </p:cNvPr>
-          <p:cNvSpPr>
-            <a:spLocks xmlns:a="http://schemas.openxmlformats.org/drawingml/2006/main" noGrp="1"/>
-          </p:cNvSpPr>
-          <p:nvPr/>
-        </p:nvSpPr>
-        <p:spPr>
-          <a:xfrm xmlns:a="http://schemas.openxmlformats.org/drawingml/2006/main">
-            <a:off x="666750" y="838200"/>
-            <a:ext cx="9144000" cy="323850"/>
+          <p:cNvPr id="2" name="">
+            <a:extLst xmlns:a="http://schemas.openxmlformats.org/drawingml/2006/main">
+              <a:ext uri="{FF2B5EF4-FFF2-40B4-BE49-F238E27FC236}">
+                <a16:creationId xmlns:a16="http://schemas.microsoft.com/office/drawing/2014/main" id="{B2F3A696-9DDF-442E-B398-F75CBFECCCC0}"/>
+              </a:ext>
+            </a:extLst>
+          </p:cNvPr>
+          <p:cNvSpPr>
+            <a:spLocks xmlns:a="http://schemas.openxmlformats.org/drawingml/2006/main" noGrp="1"/>
+          </p:cNvSpPr>
+          <p:nvPr/>
+        </p:nvSpPr>
+        <p:spPr>
+          <a:xfrm xmlns:a="http://schemas.openxmlformats.org/drawingml/2006/main">
+            <a:off x="666750" y="876300"/>
+            <a:ext cx="9810750" cy="285750"/>
           </a:xfrm>
           <a:prstGeom xmlns:a="http://schemas.openxmlformats.org/drawingml/2006/main" prst="rect">
             <a:avLst/>
@@ -3057,10 +3142,10 @@
       </p:sp>
       <p:sp>
         <p:nvSpPr>
-          <p:cNvPr id="3" name="slide-number">
-            <a:extLst xmlns:a="http://schemas.openxmlformats.org/drawingml/2006/main">
-              <a:ext uri="{FF2B5EF4-FFF2-40B4-BE49-F238E27FC236}">
-                <a16:creationId xmlns:a16="http://schemas.microsoft.com/office/drawing/2014/main" id="{61612258-0F96-4112-AED3-F66E0FDFE6A7}"/>
+          <p:cNvPr id="3" name="">
+            <a:extLst xmlns:a="http://schemas.openxmlformats.org/drawingml/2006/main">
+              <a:ext uri="{FF2B5EF4-FFF2-40B4-BE49-F238E27FC236}">
+                <a16:creationId xmlns:a16="http://schemas.microsoft.com/office/drawing/2014/main" id="{188C332E-A17F-40DB-A695-C63A86229F38}"/>
               </a:ext>
             </a:extLst>
           </p:cNvPr>
@@ -3110,23 +3195,23 @@
           <p:cNvPr id="4" name="">
             <a:extLst xmlns:a="http://schemas.openxmlformats.org/drawingml/2006/main">
               <a:ext uri="{FF2B5EF4-FFF2-40B4-BE49-F238E27FC236}">
-                <a16:creationId xmlns:a16="http://schemas.microsoft.com/office/drawing/2014/main" id="{F0442728-7DB7-44F3-A534-6115EF021002}"/>
-              </a:ext>
-            </a:extLst>
-          </p:cNvPr>
-          <p:cNvSpPr>
-            <a:spLocks xmlns:a="http://schemas.openxmlformats.org/drawingml/2006/main" noGrp="1"/>
-          </p:cNvSpPr>
-          <p:nvPr/>
-        </p:nvSpPr>
-        <p:spPr>
-          <a:xfrm xmlns:a="http://schemas.openxmlformats.org/drawingml/2006/main">
-            <a:off x="838200" y="2047875"/>
-            <a:ext cx="1162050" cy="742950"/>
+                <a16:creationId xmlns:a16="http://schemas.microsoft.com/office/drawing/2014/main" id="{B388B086-4DA3-45FE-977B-59DA2B88F5BF}"/>
+              </a:ext>
+            </a:extLst>
+          </p:cNvPr>
+          <p:cNvSpPr>
+            <a:spLocks xmlns:a="http://schemas.openxmlformats.org/drawingml/2006/main" noGrp="1"/>
+          </p:cNvSpPr>
+          <p:nvPr/>
+        </p:nvSpPr>
+        <p:spPr>
+          <a:xfrm xmlns:a="http://schemas.openxmlformats.org/drawingml/2006/main">
+            <a:off x="666750" y="2076450"/>
+            <a:ext cx="1428750" cy="723900"/>
           </a:xfrm>
           <a:prstGeom xmlns:a="http://schemas.openxmlformats.org/drawingml/2006/main" prst="roundRect">
             <a:avLst>
-              <a:gd name="adj" fmla="val 10256"/>
+              <a:gd name="adj" fmla="val 10526"/>
             </a:avLst>
           </a:prstGeom>
           <a:solidFill xmlns:a="http://schemas.openxmlformats.org/drawingml/2006/main">
@@ -3145,42 +3230,42 @@
           <p:cNvPr id="5" name="">
             <a:extLst xmlns:a="http://schemas.openxmlformats.org/drawingml/2006/main">
               <a:ext uri="{FF2B5EF4-FFF2-40B4-BE49-F238E27FC236}">
-                <a16:creationId xmlns:a16="http://schemas.microsoft.com/office/drawing/2014/main" id="{68D0F40F-E365-45D7-AC10-88C8B92AF26A}"/>
-              </a:ext>
-            </a:extLst>
-          </p:cNvPr>
-          <p:cNvSpPr>
-            <a:spLocks xmlns:a="http://schemas.openxmlformats.org/drawingml/2006/main" noGrp="1"/>
-          </p:cNvSpPr>
-          <p:nvPr/>
-        </p:nvSpPr>
-        <p:spPr>
-          <a:xfrm xmlns:a="http://schemas.openxmlformats.org/drawingml/2006/main">
-            <a:off x="962025" y="2276475"/>
-            <a:ext cx="914400" cy="228600"/>
-          </a:xfrm>
-          <a:prstGeom xmlns:a="http://schemas.openxmlformats.org/drawingml/2006/main" prst="rect">
-            <a:avLst/>
-          </a:prstGeom>
-          <a:noFill xmlns:a="http://schemas.openxmlformats.org/drawingml/2006/main"/>
-          <a:ln xmlns:a="http://schemas.openxmlformats.org/drawingml/2006/main" w="0">
-            <a:noFill/>
-            <a:prstDash val="solid"/>
-          </a:ln>
-        </p:spPr>
-        <p:txBody>
-          <a:bodyPr xmlns:a="http://schemas.openxmlformats.org/drawingml/2006/main"/>
-          <a:lstStyle xmlns:a="http://schemas.openxmlformats.org/drawingml/2006/main"/>
-          <a:p xmlns:a="http://schemas.openxmlformats.org/drawingml/2006/main">
-            <a:pPr>
-              <a:defRPr sz="1500" b="1">
-                <a:solidFill>
-                  <a:srgbClr val="F4F8FB"/>
-                </a:solidFill>
-              </a:defRPr>
-            </a:pPr>
-            <a:r>
-              <a:rPr sz="1500" b="1">
+                <a16:creationId xmlns:a16="http://schemas.microsoft.com/office/drawing/2014/main" id="{53774284-287B-4E1E-8A03-972F5156C4D4}"/>
+              </a:ext>
+            </a:extLst>
+          </p:cNvPr>
+          <p:cNvSpPr>
+            <a:spLocks xmlns:a="http://schemas.openxmlformats.org/drawingml/2006/main" noGrp="1"/>
+          </p:cNvSpPr>
+          <p:nvPr/>
+        </p:nvSpPr>
+        <p:spPr>
+          <a:xfrm xmlns:a="http://schemas.openxmlformats.org/drawingml/2006/main">
+            <a:off x="762000" y="2305050"/>
+            <a:ext cx="1238250" cy="228600"/>
+          </a:xfrm>
+          <a:prstGeom xmlns:a="http://schemas.openxmlformats.org/drawingml/2006/main" prst="rect">
+            <a:avLst/>
+          </a:prstGeom>
+          <a:noFill xmlns:a="http://schemas.openxmlformats.org/drawingml/2006/main"/>
+          <a:ln xmlns:a="http://schemas.openxmlformats.org/drawingml/2006/main" w="0">
+            <a:noFill/>
+            <a:prstDash val="solid"/>
+          </a:ln>
+        </p:spPr>
+        <p:txBody>
+          <a:bodyPr xmlns:a="http://schemas.openxmlformats.org/drawingml/2006/main"/>
+          <a:lstStyle xmlns:a="http://schemas.openxmlformats.org/drawingml/2006/main"/>
+          <a:p xmlns:a="http://schemas.openxmlformats.org/drawingml/2006/main">
+            <a:pPr>
+              <a:defRPr sz="1350" b="1">
+                <a:solidFill>
+                  <a:srgbClr val="F4F8FB"/>
+                </a:solidFill>
+              </a:defRPr>
+            </a:pPr>
+            <a:r>
+              <a:rPr sz="1350" b="1">
                 <a:solidFill>
                   <a:srgbClr val="F4F8FB"/>
                 </a:solidFill>
@@ -3195,73 +3280,23 @@
           <p:cNvPr id="6" name="">
             <a:extLst xmlns:a="http://schemas.openxmlformats.org/drawingml/2006/main">
               <a:ext uri="{FF2B5EF4-FFF2-40B4-BE49-F238E27FC236}">
-                <a16:creationId xmlns:a16="http://schemas.microsoft.com/office/drawing/2014/main" id="{2CC0EF4E-2BDD-4984-9B11-A731C94903C3}"/>
-              </a:ext>
-            </a:extLst>
-          </p:cNvPr>
-          <p:cNvSpPr>
-            <a:spLocks xmlns:a="http://schemas.openxmlformats.org/drawingml/2006/main" noGrp="1"/>
-          </p:cNvSpPr>
-          <p:nvPr/>
-        </p:nvSpPr>
-        <p:spPr>
-          <a:xfrm xmlns:a="http://schemas.openxmlformats.org/drawingml/2006/main">
-            <a:off x="2076450" y="2276475"/>
-            <a:ext cx="323850" cy="228600"/>
-          </a:xfrm>
-          <a:prstGeom xmlns:a="http://schemas.openxmlformats.org/drawingml/2006/main" prst="rect">
-            <a:avLst/>
-          </a:prstGeom>
-          <a:noFill xmlns:a="http://schemas.openxmlformats.org/drawingml/2006/main"/>
-          <a:ln xmlns:a="http://schemas.openxmlformats.org/drawingml/2006/main" w="0">
-            <a:noFill/>
-            <a:prstDash val="solid"/>
-          </a:ln>
-        </p:spPr>
-        <p:txBody>
-          <a:bodyPr xmlns:a="http://schemas.openxmlformats.org/drawingml/2006/main"/>
-          <a:lstStyle xmlns:a="http://schemas.openxmlformats.org/drawingml/2006/main"/>
-          <a:p xmlns:a="http://schemas.openxmlformats.org/drawingml/2006/main">
-            <a:pPr>
-              <a:defRPr sz="1800" b="1">
-                <a:solidFill>
-                  <a:srgbClr val="4CC9F0"/>
-                </a:solidFill>
-              </a:defRPr>
-            </a:pPr>
-            <a:r>
-              <a:rPr sz="1800" b="1">
-                <a:solidFill>
-                  <a:srgbClr val="4CC9F0"/>
-                </a:solidFill>
-              </a:rPr>
-              <a:t>-&gt;</a:t>
-            </a:r>
-          </a:p>
-        </p:txBody>
-      </p:sp>
-      <p:sp>
-        <p:nvSpPr>
-          <p:cNvPr id="7" name="">
-            <a:extLst xmlns:a="http://schemas.openxmlformats.org/drawingml/2006/main">
-              <a:ext uri="{FF2B5EF4-FFF2-40B4-BE49-F238E27FC236}">
-                <a16:creationId xmlns:a16="http://schemas.microsoft.com/office/drawing/2014/main" id="{66B7E6BF-5B7B-4C06-B6CF-FC1BD2195503}"/>
-              </a:ext>
-            </a:extLst>
-          </p:cNvPr>
-          <p:cNvSpPr>
-            <a:spLocks xmlns:a="http://schemas.openxmlformats.org/drawingml/2006/main" noGrp="1"/>
-          </p:cNvSpPr>
-          <p:nvPr/>
-        </p:nvSpPr>
-        <p:spPr>
-          <a:xfrm xmlns:a="http://schemas.openxmlformats.org/drawingml/2006/main">
-            <a:off x="2343150" y="2047875"/>
-            <a:ext cx="1162050" cy="742950"/>
+                <a16:creationId xmlns:a16="http://schemas.microsoft.com/office/drawing/2014/main" id="{FFD6E096-C7C1-48DD-B6CF-BD9296125717}"/>
+              </a:ext>
+            </a:extLst>
+          </p:cNvPr>
+          <p:cNvSpPr>
+            <a:spLocks xmlns:a="http://schemas.openxmlformats.org/drawingml/2006/main" noGrp="1"/>
+          </p:cNvSpPr>
+          <p:nvPr/>
+        </p:nvSpPr>
+        <p:spPr>
+          <a:xfrm xmlns:a="http://schemas.openxmlformats.org/drawingml/2006/main">
+            <a:off x="2247900" y="2076450"/>
+            <a:ext cx="1333500" cy="723900"/>
           </a:xfrm>
           <a:prstGeom xmlns:a="http://schemas.openxmlformats.org/drawingml/2006/main" prst="roundRect">
             <a:avLst>
-              <a:gd name="adj" fmla="val 10256"/>
+              <a:gd name="adj" fmla="val 10526"/>
             </a:avLst>
           </a:prstGeom>
           <a:solidFill xmlns:a="http://schemas.openxmlformats.org/drawingml/2006/main">
@@ -3277,126 +3312,76 @@
       </p:sp>
       <p:sp>
         <p:nvSpPr>
+          <p:cNvPr id="7" name="">
+            <a:extLst xmlns:a="http://schemas.openxmlformats.org/drawingml/2006/main">
+              <a:ext uri="{FF2B5EF4-FFF2-40B4-BE49-F238E27FC236}">
+                <a16:creationId xmlns:a16="http://schemas.microsoft.com/office/drawing/2014/main" id="{2B4E6063-3191-4426-91EA-442B03FB22D1}"/>
+              </a:ext>
+            </a:extLst>
+          </p:cNvPr>
+          <p:cNvSpPr>
+            <a:spLocks xmlns:a="http://schemas.openxmlformats.org/drawingml/2006/main" noGrp="1"/>
+          </p:cNvSpPr>
+          <p:nvPr/>
+        </p:nvSpPr>
+        <p:spPr>
+          <a:xfrm xmlns:a="http://schemas.openxmlformats.org/drawingml/2006/main">
+            <a:off x="2343150" y="2305050"/>
+            <a:ext cx="1143000" cy="228600"/>
+          </a:xfrm>
+          <a:prstGeom xmlns:a="http://schemas.openxmlformats.org/drawingml/2006/main" prst="rect">
+            <a:avLst/>
+          </a:prstGeom>
+          <a:noFill xmlns:a="http://schemas.openxmlformats.org/drawingml/2006/main"/>
+          <a:ln xmlns:a="http://schemas.openxmlformats.org/drawingml/2006/main" w="0">
+            <a:noFill/>
+            <a:prstDash val="solid"/>
+          </a:ln>
+        </p:spPr>
+        <p:txBody>
+          <a:bodyPr xmlns:a="http://schemas.openxmlformats.org/drawingml/2006/main"/>
+          <a:lstStyle xmlns:a="http://schemas.openxmlformats.org/drawingml/2006/main"/>
+          <a:p xmlns:a="http://schemas.openxmlformats.org/drawingml/2006/main">
+            <a:pPr>
+              <a:defRPr sz="1350" b="1">
+                <a:solidFill>
+                  <a:srgbClr val="F4F8FB"/>
+                </a:solidFill>
+              </a:defRPr>
+            </a:pPr>
+            <a:r>
+              <a:rPr sz="1350" b="1">
+                <a:solidFill>
+                  <a:srgbClr val="F4F8FB"/>
+                </a:solidFill>
+              </a:rPr>
+              <a:t>Human</a:t>
+            </a:r>
+          </a:p>
+        </p:txBody>
+      </p:sp>
+      <p:sp>
+        <p:nvSpPr>
           <p:cNvPr id="8" name="">
             <a:extLst xmlns:a="http://schemas.openxmlformats.org/drawingml/2006/main">
               <a:ext uri="{FF2B5EF4-FFF2-40B4-BE49-F238E27FC236}">
-                <a16:creationId xmlns:a16="http://schemas.microsoft.com/office/drawing/2014/main" id="{9796E641-BCF3-4EAD-B365-4B5DA9EA291F}"/>
-              </a:ext>
-            </a:extLst>
-          </p:cNvPr>
-          <p:cNvSpPr>
-            <a:spLocks xmlns:a="http://schemas.openxmlformats.org/drawingml/2006/main" noGrp="1"/>
-          </p:cNvSpPr>
-          <p:nvPr/>
-        </p:nvSpPr>
-        <p:spPr>
-          <a:xfrm xmlns:a="http://schemas.openxmlformats.org/drawingml/2006/main">
-            <a:off x="2466975" y="2276475"/>
-            <a:ext cx="914400" cy="228600"/>
-          </a:xfrm>
-          <a:prstGeom xmlns:a="http://schemas.openxmlformats.org/drawingml/2006/main" prst="rect">
-            <a:avLst/>
-          </a:prstGeom>
-          <a:noFill xmlns:a="http://schemas.openxmlformats.org/drawingml/2006/main"/>
-          <a:ln xmlns:a="http://schemas.openxmlformats.org/drawingml/2006/main" w="0">
-            <a:noFill/>
-            <a:prstDash val="solid"/>
-          </a:ln>
-        </p:spPr>
-        <p:txBody>
-          <a:bodyPr xmlns:a="http://schemas.openxmlformats.org/drawingml/2006/main"/>
-          <a:lstStyle xmlns:a="http://schemas.openxmlformats.org/drawingml/2006/main"/>
-          <a:p xmlns:a="http://schemas.openxmlformats.org/drawingml/2006/main">
-            <a:pPr>
-              <a:defRPr sz="1500" b="1">
-                <a:solidFill>
-                  <a:srgbClr val="F4F8FB"/>
-                </a:solidFill>
-              </a:defRPr>
-            </a:pPr>
-            <a:r>
-              <a:rPr sz="1500" b="1">
-                <a:solidFill>
-                  <a:srgbClr val="F4F8FB"/>
-                </a:solidFill>
-              </a:rPr>
-              <a:t>Human</a:t>
-            </a:r>
-          </a:p>
-        </p:txBody>
-      </p:sp>
-      <p:sp>
-        <p:nvSpPr>
-          <p:cNvPr id="9" name="">
-            <a:extLst xmlns:a="http://schemas.openxmlformats.org/drawingml/2006/main">
-              <a:ext uri="{FF2B5EF4-FFF2-40B4-BE49-F238E27FC236}">
-                <a16:creationId xmlns:a16="http://schemas.microsoft.com/office/drawing/2014/main" id="{16B1EE65-7002-4600-8F59-2824BA78E006}"/>
-              </a:ext>
-            </a:extLst>
-          </p:cNvPr>
-          <p:cNvSpPr>
-            <a:spLocks xmlns:a="http://schemas.openxmlformats.org/drawingml/2006/main" noGrp="1"/>
-          </p:cNvSpPr>
-          <p:nvPr/>
-        </p:nvSpPr>
-        <p:spPr>
-          <a:xfrm xmlns:a="http://schemas.openxmlformats.org/drawingml/2006/main">
-            <a:off x="3581400" y="2276475"/>
-            <a:ext cx="323850" cy="228600"/>
-          </a:xfrm>
-          <a:prstGeom xmlns:a="http://schemas.openxmlformats.org/drawingml/2006/main" prst="rect">
-            <a:avLst/>
-          </a:prstGeom>
-          <a:noFill xmlns:a="http://schemas.openxmlformats.org/drawingml/2006/main"/>
-          <a:ln xmlns:a="http://schemas.openxmlformats.org/drawingml/2006/main" w="0">
-            <a:noFill/>
-            <a:prstDash val="solid"/>
-          </a:ln>
-        </p:spPr>
-        <p:txBody>
-          <a:bodyPr xmlns:a="http://schemas.openxmlformats.org/drawingml/2006/main"/>
-          <a:lstStyle xmlns:a="http://schemas.openxmlformats.org/drawingml/2006/main"/>
-          <a:p xmlns:a="http://schemas.openxmlformats.org/drawingml/2006/main">
-            <a:pPr>
-              <a:defRPr sz="1800" b="1">
-                <a:solidFill>
-                  <a:srgbClr val="4CC9F0"/>
-                </a:solidFill>
-              </a:defRPr>
-            </a:pPr>
-            <a:r>
-              <a:rPr sz="1800" b="1">
-                <a:solidFill>
-                  <a:srgbClr val="4CC9F0"/>
-                </a:solidFill>
-              </a:rPr>
-              <a:t>-&gt;</a:t>
-            </a:r>
-          </a:p>
-        </p:txBody>
-      </p:sp>
-      <p:sp>
-        <p:nvSpPr>
-          <p:cNvPr id="10" name="">
-            <a:extLst xmlns:a="http://schemas.openxmlformats.org/drawingml/2006/main">
-              <a:ext uri="{FF2B5EF4-FFF2-40B4-BE49-F238E27FC236}">
-                <a16:creationId xmlns:a16="http://schemas.microsoft.com/office/drawing/2014/main" id="{3B95733C-5F3C-4D1F-BF9A-E1217913548E}"/>
-              </a:ext>
-            </a:extLst>
-          </p:cNvPr>
-          <p:cNvSpPr>
-            <a:spLocks xmlns:a="http://schemas.openxmlformats.org/drawingml/2006/main" noGrp="1"/>
-          </p:cNvSpPr>
-          <p:nvPr/>
-        </p:nvSpPr>
-        <p:spPr>
-          <a:xfrm xmlns:a="http://schemas.openxmlformats.org/drawingml/2006/main">
-            <a:off x="3848100" y="2047875"/>
-            <a:ext cx="1162050" cy="742950"/>
+                <a16:creationId xmlns:a16="http://schemas.microsoft.com/office/drawing/2014/main" id="{76B55E14-A475-4990-AE13-12F4ABE4CDBA}"/>
+              </a:ext>
+            </a:extLst>
+          </p:cNvPr>
+          <p:cNvSpPr>
+            <a:spLocks xmlns:a="http://schemas.openxmlformats.org/drawingml/2006/main" noGrp="1"/>
+          </p:cNvSpPr>
+          <p:nvPr/>
+        </p:nvSpPr>
+        <p:spPr>
+          <a:xfrm xmlns:a="http://schemas.openxmlformats.org/drawingml/2006/main">
+            <a:off x="3733800" y="2076450"/>
+            <a:ext cx="1809750" cy="723900"/>
           </a:xfrm>
           <a:prstGeom xmlns:a="http://schemas.openxmlformats.org/drawingml/2006/main" prst="roundRect">
             <a:avLst>
-              <a:gd name="adj" fmla="val 10256"/>
+              <a:gd name="adj" fmla="val 10526"/>
             </a:avLst>
           </a:prstGeom>
           <a:solidFill xmlns:a="http://schemas.openxmlformats.org/drawingml/2006/main">
@@ -3412,45 +3397,45 @@
       </p:sp>
       <p:sp>
         <p:nvSpPr>
-          <p:cNvPr id="11" name="">
-            <a:extLst xmlns:a="http://schemas.openxmlformats.org/drawingml/2006/main">
-              <a:ext uri="{FF2B5EF4-FFF2-40B4-BE49-F238E27FC236}">
-                <a16:creationId xmlns:a16="http://schemas.microsoft.com/office/drawing/2014/main" id="{9BEC10AA-6614-441E-BDA8-1F3CE96B22E9}"/>
-              </a:ext>
-            </a:extLst>
-          </p:cNvPr>
-          <p:cNvSpPr>
-            <a:spLocks xmlns:a="http://schemas.openxmlformats.org/drawingml/2006/main" noGrp="1"/>
-          </p:cNvSpPr>
-          <p:nvPr/>
-        </p:nvSpPr>
-        <p:spPr>
-          <a:xfrm xmlns:a="http://schemas.openxmlformats.org/drawingml/2006/main">
-            <a:off x="3971925" y="2276475"/>
-            <a:ext cx="914400" cy="228600"/>
-          </a:xfrm>
-          <a:prstGeom xmlns:a="http://schemas.openxmlformats.org/drawingml/2006/main" prst="rect">
-            <a:avLst/>
-          </a:prstGeom>
-          <a:noFill xmlns:a="http://schemas.openxmlformats.org/drawingml/2006/main"/>
-          <a:ln xmlns:a="http://schemas.openxmlformats.org/drawingml/2006/main" w="0">
-            <a:noFill/>
-            <a:prstDash val="solid"/>
-          </a:ln>
-        </p:spPr>
-        <p:txBody>
-          <a:bodyPr xmlns:a="http://schemas.openxmlformats.org/drawingml/2006/main"/>
-          <a:lstStyle xmlns:a="http://schemas.openxmlformats.org/drawingml/2006/main"/>
-          <a:p xmlns:a="http://schemas.openxmlformats.org/drawingml/2006/main">
-            <a:pPr>
-              <a:defRPr sz="1500" b="1">
-                <a:solidFill>
-                  <a:srgbClr val="F4F8FB"/>
-                </a:solidFill>
-              </a:defRPr>
-            </a:pPr>
-            <a:r>
-              <a:rPr sz="1500" b="1">
+          <p:cNvPr id="9" name="">
+            <a:extLst xmlns:a="http://schemas.openxmlformats.org/drawingml/2006/main">
+              <a:ext uri="{FF2B5EF4-FFF2-40B4-BE49-F238E27FC236}">
+                <a16:creationId xmlns:a16="http://schemas.microsoft.com/office/drawing/2014/main" id="{0CDC7DF7-A99C-4135-9065-94587779987D}"/>
+              </a:ext>
+            </a:extLst>
+          </p:cNvPr>
+          <p:cNvSpPr>
+            <a:spLocks xmlns:a="http://schemas.openxmlformats.org/drawingml/2006/main" noGrp="1"/>
+          </p:cNvSpPr>
+          <p:nvPr/>
+        </p:nvSpPr>
+        <p:spPr>
+          <a:xfrm xmlns:a="http://schemas.openxmlformats.org/drawingml/2006/main">
+            <a:off x="3829050" y="2305050"/>
+            <a:ext cx="1619250" cy="228600"/>
+          </a:xfrm>
+          <a:prstGeom xmlns:a="http://schemas.openxmlformats.org/drawingml/2006/main" prst="rect">
+            <a:avLst/>
+          </a:prstGeom>
+          <a:noFill xmlns:a="http://schemas.openxmlformats.org/drawingml/2006/main"/>
+          <a:ln xmlns:a="http://schemas.openxmlformats.org/drawingml/2006/main" w="0">
+            <a:noFill/>
+            <a:prstDash val="solid"/>
+          </a:ln>
+        </p:spPr>
+        <p:txBody>
+          <a:bodyPr xmlns:a="http://schemas.openxmlformats.org/drawingml/2006/main"/>
+          <a:lstStyle xmlns:a="http://schemas.openxmlformats.org/drawingml/2006/main"/>
+          <a:p xmlns:a="http://schemas.openxmlformats.org/drawingml/2006/main">
+            <a:pPr>
+              <a:defRPr sz="1350" b="1">
+                <a:solidFill>
+                  <a:srgbClr val="F4F8FB"/>
+                </a:solidFill>
+              </a:defRPr>
+            </a:pPr>
+            <a:r>
+              <a:rPr sz="1350" b="1">
                 <a:solidFill>
                   <a:srgbClr val="F4F8FB"/>
                 </a:solidFill>
@@ -3462,76 +3447,26 @@
       </p:sp>
       <p:sp>
         <p:nvSpPr>
-          <p:cNvPr id="12" name="">
-            <a:extLst xmlns:a="http://schemas.openxmlformats.org/drawingml/2006/main">
-              <a:ext uri="{FF2B5EF4-FFF2-40B4-BE49-F238E27FC236}">
-                <a16:creationId xmlns:a16="http://schemas.microsoft.com/office/drawing/2014/main" id="{63D5C590-FC06-4D7F-99AE-86286804C0C4}"/>
-              </a:ext>
-            </a:extLst>
-          </p:cNvPr>
-          <p:cNvSpPr>
-            <a:spLocks xmlns:a="http://schemas.openxmlformats.org/drawingml/2006/main" noGrp="1"/>
-          </p:cNvSpPr>
-          <p:nvPr/>
-        </p:nvSpPr>
-        <p:spPr>
-          <a:xfrm xmlns:a="http://schemas.openxmlformats.org/drawingml/2006/main">
-            <a:off x="5086350" y="2276475"/>
-            <a:ext cx="323850" cy="228600"/>
-          </a:xfrm>
-          <a:prstGeom xmlns:a="http://schemas.openxmlformats.org/drawingml/2006/main" prst="rect">
-            <a:avLst/>
-          </a:prstGeom>
-          <a:noFill xmlns:a="http://schemas.openxmlformats.org/drawingml/2006/main"/>
-          <a:ln xmlns:a="http://schemas.openxmlformats.org/drawingml/2006/main" w="0">
-            <a:noFill/>
-            <a:prstDash val="solid"/>
-          </a:ln>
-        </p:spPr>
-        <p:txBody>
-          <a:bodyPr xmlns:a="http://schemas.openxmlformats.org/drawingml/2006/main"/>
-          <a:lstStyle xmlns:a="http://schemas.openxmlformats.org/drawingml/2006/main"/>
-          <a:p xmlns:a="http://schemas.openxmlformats.org/drawingml/2006/main">
-            <a:pPr>
-              <a:defRPr sz="1800" b="1">
-                <a:solidFill>
-                  <a:srgbClr val="4CC9F0"/>
-                </a:solidFill>
-              </a:defRPr>
-            </a:pPr>
-            <a:r>
-              <a:rPr sz="1800" b="1">
-                <a:solidFill>
-                  <a:srgbClr val="4CC9F0"/>
-                </a:solidFill>
-              </a:rPr>
-              <a:t>-&gt;</a:t>
-            </a:r>
-          </a:p>
-        </p:txBody>
-      </p:sp>
-      <p:sp>
-        <p:nvSpPr>
-          <p:cNvPr id="13" name="">
-            <a:extLst xmlns:a="http://schemas.openxmlformats.org/drawingml/2006/main">
-              <a:ext uri="{FF2B5EF4-FFF2-40B4-BE49-F238E27FC236}">
-                <a16:creationId xmlns:a16="http://schemas.microsoft.com/office/drawing/2014/main" id="{3FB61B4E-030B-4FD0-870C-3597E445DCFB}"/>
-              </a:ext>
-            </a:extLst>
-          </p:cNvPr>
-          <p:cNvSpPr>
-            <a:spLocks xmlns:a="http://schemas.openxmlformats.org/drawingml/2006/main" noGrp="1"/>
-          </p:cNvSpPr>
-          <p:nvPr/>
-        </p:nvSpPr>
-        <p:spPr>
-          <a:xfrm xmlns:a="http://schemas.openxmlformats.org/drawingml/2006/main">
-            <a:off x="5353050" y="2047875"/>
-            <a:ext cx="1162050" cy="742950"/>
+          <p:cNvPr id="10" name="">
+            <a:extLst xmlns:a="http://schemas.openxmlformats.org/drawingml/2006/main">
+              <a:ext uri="{FF2B5EF4-FFF2-40B4-BE49-F238E27FC236}">
+                <a16:creationId xmlns:a16="http://schemas.microsoft.com/office/drawing/2014/main" id="{0712F148-391D-4560-B578-DDC9973FB469}"/>
+              </a:ext>
+            </a:extLst>
+          </p:cNvPr>
+          <p:cNvSpPr>
+            <a:spLocks xmlns:a="http://schemas.openxmlformats.org/drawingml/2006/main" noGrp="1"/>
+          </p:cNvSpPr>
+          <p:nvPr/>
+        </p:nvSpPr>
+        <p:spPr>
+          <a:xfrm xmlns:a="http://schemas.openxmlformats.org/drawingml/2006/main">
+            <a:off x="5695950" y="2076450"/>
+            <a:ext cx="1524000" cy="723900"/>
           </a:xfrm>
           <a:prstGeom xmlns:a="http://schemas.openxmlformats.org/drawingml/2006/main" prst="roundRect">
             <a:avLst>
-              <a:gd name="adj" fmla="val 10256"/>
+              <a:gd name="adj" fmla="val 10526"/>
             </a:avLst>
           </a:prstGeom>
           <a:solidFill xmlns:a="http://schemas.openxmlformats.org/drawingml/2006/main">
@@ -3547,45 +3482,45 @@
       </p:sp>
       <p:sp>
         <p:nvSpPr>
-          <p:cNvPr id="14" name="">
-            <a:extLst xmlns:a="http://schemas.openxmlformats.org/drawingml/2006/main">
-              <a:ext uri="{FF2B5EF4-FFF2-40B4-BE49-F238E27FC236}">
-                <a16:creationId xmlns:a16="http://schemas.microsoft.com/office/drawing/2014/main" id="{F8755D83-7972-4DB5-83A7-710E26264CB6}"/>
-              </a:ext>
-            </a:extLst>
-          </p:cNvPr>
-          <p:cNvSpPr>
-            <a:spLocks xmlns:a="http://schemas.openxmlformats.org/drawingml/2006/main" noGrp="1"/>
-          </p:cNvSpPr>
-          <p:nvPr/>
-        </p:nvSpPr>
-        <p:spPr>
-          <a:xfrm xmlns:a="http://schemas.openxmlformats.org/drawingml/2006/main">
-            <a:off x="5476875" y="2276475"/>
-            <a:ext cx="914400" cy="228600"/>
-          </a:xfrm>
-          <a:prstGeom xmlns:a="http://schemas.openxmlformats.org/drawingml/2006/main" prst="rect">
-            <a:avLst/>
-          </a:prstGeom>
-          <a:noFill xmlns:a="http://schemas.openxmlformats.org/drawingml/2006/main"/>
-          <a:ln xmlns:a="http://schemas.openxmlformats.org/drawingml/2006/main" w="0">
-            <a:noFill/>
-            <a:prstDash val="solid"/>
-          </a:ln>
-        </p:spPr>
-        <p:txBody>
-          <a:bodyPr xmlns:a="http://schemas.openxmlformats.org/drawingml/2006/main"/>
-          <a:lstStyle xmlns:a="http://schemas.openxmlformats.org/drawingml/2006/main"/>
-          <a:p xmlns:a="http://schemas.openxmlformats.org/drawingml/2006/main">
-            <a:pPr>
-              <a:defRPr sz="1500" b="1">
-                <a:solidFill>
-                  <a:srgbClr val="F4F8FB"/>
-                </a:solidFill>
-              </a:defRPr>
-            </a:pPr>
-            <a:r>
-              <a:rPr sz="1500" b="1">
+          <p:cNvPr id="11" name="">
+            <a:extLst xmlns:a="http://schemas.openxmlformats.org/drawingml/2006/main">
+              <a:ext uri="{FF2B5EF4-FFF2-40B4-BE49-F238E27FC236}">
+                <a16:creationId xmlns:a16="http://schemas.microsoft.com/office/drawing/2014/main" id="{F2CD329C-ADAD-4C7D-968F-F8B24F13BC27}"/>
+              </a:ext>
+            </a:extLst>
+          </p:cNvPr>
+          <p:cNvSpPr>
+            <a:spLocks xmlns:a="http://schemas.openxmlformats.org/drawingml/2006/main" noGrp="1"/>
+          </p:cNvSpPr>
+          <p:nvPr/>
+        </p:nvSpPr>
+        <p:spPr>
+          <a:xfrm xmlns:a="http://schemas.openxmlformats.org/drawingml/2006/main">
+            <a:off x="5791200" y="2305050"/>
+            <a:ext cx="1333500" cy="228600"/>
+          </a:xfrm>
+          <a:prstGeom xmlns:a="http://schemas.openxmlformats.org/drawingml/2006/main" prst="rect">
+            <a:avLst/>
+          </a:prstGeom>
+          <a:noFill xmlns:a="http://schemas.openxmlformats.org/drawingml/2006/main"/>
+          <a:ln xmlns:a="http://schemas.openxmlformats.org/drawingml/2006/main" w="0">
+            <a:noFill/>
+            <a:prstDash val="solid"/>
+          </a:ln>
+        </p:spPr>
+        <p:txBody>
+          <a:bodyPr xmlns:a="http://schemas.openxmlformats.org/drawingml/2006/main"/>
+          <a:lstStyle xmlns:a="http://schemas.openxmlformats.org/drawingml/2006/main"/>
+          <a:p xmlns:a="http://schemas.openxmlformats.org/drawingml/2006/main">
+            <a:pPr>
+              <a:defRPr sz="1350" b="1">
+                <a:solidFill>
+                  <a:srgbClr val="F4F8FB"/>
+                </a:solidFill>
+              </a:defRPr>
+            </a:pPr>
+            <a:r>
+              <a:rPr sz="1350" b="1">
                 <a:solidFill>
                   <a:srgbClr val="F4F8FB"/>
                 </a:solidFill>
@@ -3597,76 +3532,26 @@
       </p:sp>
       <p:sp>
         <p:nvSpPr>
-          <p:cNvPr id="15" name="">
-            <a:extLst xmlns:a="http://schemas.openxmlformats.org/drawingml/2006/main">
-              <a:ext uri="{FF2B5EF4-FFF2-40B4-BE49-F238E27FC236}">
-                <a16:creationId xmlns:a16="http://schemas.microsoft.com/office/drawing/2014/main" id="{F4846D22-831D-47B0-9168-F7DA0B4467D0}"/>
-              </a:ext>
-            </a:extLst>
-          </p:cNvPr>
-          <p:cNvSpPr>
-            <a:spLocks xmlns:a="http://schemas.openxmlformats.org/drawingml/2006/main" noGrp="1"/>
-          </p:cNvSpPr>
-          <p:nvPr/>
-        </p:nvSpPr>
-        <p:spPr>
-          <a:xfrm xmlns:a="http://schemas.openxmlformats.org/drawingml/2006/main">
-            <a:off x="6591300" y="2276475"/>
-            <a:ext cx="323850" cy="228600"/>
-          </a:xfrm>
-          <a:prstGeom xmlns:a="http://schemas.openxmlformats.org/drawingml/2006/main" prst="rect">
-            <a:avLst/>
-          </a:prstGeom>
-          <a:noFill xmlns:a="http://schemas.openxmlformats.org/drawingml/2006/main"/>
-          <a:ln xmlns:a="http://schemas.openxmlformats.org/drawingml/2006/main" w="0">
-            <a:noFill/>
-            <a:prstDash val="solid"/>
-          </a:ln>
-        </p:spPr>
-        <p:txBody>
-          <a:bodyPr xmlns:a="http://schemas.openxmlformats.org/drawingml/2006/main"/>
-          <a:lstStyle xmlns:a="http://schemas.openxmlformats.org/drawingml/2006/main"/>
-          <a:p xmlns:a="http://schemas.openxmlformats.org/drawingml/2006/main">
-            <a:pPr>
-              <a:defRPr sz="1800" b="1">
-                <a:solidFill>
-                  <a:srgbClr val="4CC9F0"/>
-                </a:solidFill>
-              </a:defRPr>
-            </a:pPr>
-            <a:r>
-              <a:rPr sz="1800" b="1">
-                <a:solidFill>
-                  <a:srgbClr val="4CC9F0"/>
-                </a:solidFill>
-              </a:rPr>
-              <a:t>-&gt;</a:t>
-            </a:r>
-          </a:p>
-        </p:txBody>
-      </p:sp>
-      <p:sp>
-        <p:nvSpPr>
-          <p:cNvPr id="16" name="">
-            <a:extLst xmlns:a="http://schemas.openxmlformats.org/drawingml/2006/main">
-              <a:ext uri="{FF2B5EF4-FFF2-40B4-BE49-F238E27FC236}">
-                <a16:creationId xmlns:a16="http://schemas.microsoft.com/office/drawing/2014/main" id="{B5DBFE4C-E84C-4D4A-9DB6-AC878854DA95}"/>
-              </a:ext>
-            </a:extLst>
-          </p:cNvPr>
-          <p:cNvSpPr>
-            <a:spLocks xmlns:a="http://schemas.openxmlformats.org/drawingml/2006/main" noGrp="1"/>
-          </p:cNvSpPr>
-          <p:nvPr/>
-        </p:nvSpPr>
-        <p:spPr>
-          <a:xfrm xmlns:a="http://schemas.openxmlformats.org/drawingml/2006/main">
-            <a:off x="6858000" y="2047875"/>
-            <a:ext cx="1162050" cy="742950"/>
+          <p:cNvPr id="12" name="">
+            <a:extLst xmlns:a="http://schemas.openxmlformats.org/drawingml/2006/main">
+              <a:ext uri="{FF2B5EF4-FFF2-40B4-BE49-F238E27FC236}">
+                <a16:creationId xmlns:a16="http://schemas.microsoft.com/office/drawing/2014/main" id="{EAF24EC7-B5CF-4900-9ACB-26ACC9FADC38}"/>
+              </a:ext>
+            </a:extLst>
+          </p:cNvPr>
+          <p:cNvSpPr>
+            <a:spLocks xmlns:a="http://schemas.openxmlformats.org/drawingml/2006/main" noGrp="1"/>
+          </p:cNvSpPr>
+          <p:nvPr/>
+        </p:nvSpPr>
+        <p:spPr>
+          <a:xfrm xmlns:a="http://schemas.openxmlformats.org/drawingml/2006/main">
+            <a:off x="7372350" y="2076450"/>
+            <a:ext cx="1238250" cy="723900"/>
           </a:xfrm>
           <a:prstGeom xmlns:a="http://schemas.openxmlformats.org/drawingml/2006/main" prst="roundRect">
             <a:avLst>
-              <a:gd name="adj" fmla="val 10256"/>
+              <a:gd name="adj" fmla="val 10526"/>
             </a:avLst>
           </a:prstGeom>
           <a:solidFill xmlns:a="http://schemas.openxmlformats.org/drawingml/2006/main">
@@ -3682,45 +3567,45 @@
       </p:sp>
       <p:sp>
         <p:nvSpPr>
-          <p:cNvPr id="17" name="">
-            <a:extLst xmlns:a="http://schemas.openxmlformats.org/drawingml/2006/main">
-              <a:ext uri="{FF2B5EF4-FFF2-40B4-BE49-F238E27FC236}">
-                <a16:creationId xmlns:a16="http://schemas.microsoft.com/office/drawing/2014/main" id="{F5F22E91-F17D-400A-84F3-91A6618D492B}"/>
-              </a:ext>
-            </a:extLst>
-          </p:cNvPr>
-          <p:cNvSpPr>
-            <a:spLocks xmlns:a="http://schemas.openxmlformats.org/drawingml/2006/main" noGrp="1"/>
-          </p:cNvSpPr>
-          <p:nvPr/>
-        </p:nvSpPr>
-        <p:spPr>
-          <a:xfrm xmlns:a="http://schemas.openxmlformats.org/drawingml/2006/main">
-            <a:off x="6981825" y="2276475"/>
-            <a:ext cx="914400" cy="228600"/>
-          </a:xfrm>
-          <a:prstGeom xmlns:a="http://schemas.openxmlformats.org/drawingml/2006/main" prst="rect">
-            <a:avLst/>
-          </a:prstGeom>
-          <a:noFill xmlns:a="http://schemas.openxmlformats.org/drawingml/2006/main"/>
-          <a:ln xmlns:a="http://schemas.openxmlformats.org/drawingml/2006/main" w="0">
-            <a:noFill/>
-            <a:prstDash val="solid"/>
-          </a:ln>
-        </p:spPr>
-        <p:txBody>
-          <a:bodyPr xmlns:a="http://schemas.openxmlformats.org/drawingml/2006/main"/>
-          <a:lstStyle xmlns:a="http://schemas.openxmlformats.org/drawingml/2006/main"/>
-          <a:p xmlns:a="http://schemas.openxmlformats.org/drawingml/2006/main">
-            <a:pPr>
-              <a:defRPr sz="1500" b="1">
-                <a:solidFill>
-                  <a:srgbClr val="F4F8FB"/>
-                </a:solidFill>
-              </a:defRPr>
-            </a:pPr>
-            <a:r>
-              <a:rPr sz="1500" b="1">
+          <p:cNvPr id="13" name="">
+            <a:extLst xmlns:a="http://schemas.openxmlformats.org/drawingml/2006/main">
+              <a:ext uri="{FF2B5EF4-FFF2-40B4-BE49-F238E27FC236}">
+                <a16:creationId xmlns:a16="http://schemas.microsoft.com/office/drawing/2014/main" id="{7C301309-5294-41A2-A9D4-370720C53BE1}"/>
+              </a:ext>
+            </a:extLst>
+          </p:cNvPr>
+          <p:cNvSpPr>
+            <a:spLocks xmlns:a="http://schemas.openxmlformats.org/drawingml/2006/main" noGrp="1"/>
+          </p:cNvSpPr>
+          <p:nvPr/>
+        </p:nvSpPr>
+        <p:spPr>
+          <a:xfrm xmlns:a="http://schemas.openxmlformats.org/drawingml/2006/main">
+            <a:off x="7467600" y="2305050"/>
+            <a:ext cx="1047750" cy="228600"/>
+          </a:xfrm>
+          <a:prstGeom xmlns:a="http://schemas.openxmlformats.org/drawingml/2006/main" prst="rect">
+            <a:avLst/>
+          </a:prstGeom>
+          <a:noFill xmlns:a="http://schemas.openxmlformats.org/drawingml/2006/main"/>
+          <a:ln xmlns:a="http://schemas.openxmlformats.org/drawingml/2006/main" w="0">
+            <a:noFill/>
+            <a:prstDash val="solid"/>
+          </a:ln>
+        </p:spPr>
+        <p:txBody>
+          <a:bodyPr xmlns:a="http://schemas.openxmlformats.org/drawingml/2006/main"/>
+          <a:lstStyle xmlns:a="http://schemas.openxmlformats.org/drawingml/2006/main"/>
+          <a:p xmlns:a="http://schemas.openxmlformats.org/drawingml/2006/main">
+            <a:pPr>
+              <a:defRPr sz="1350" b="1">
+                <a:solidFill>
+                  <a:srgbClr val="F4F8FB"/>
+                </a:solidFill>
+              </a:defRPr>
+            </a:pPr>
+            <a:r>
+              <a:rPr sz="1350" b="1">
                 <a:solidFill>
                   <a:srgbClr val="F4F8FB"/>
                 </a:solidFill>
@@ -3732,76 +3617,26 @@
       </p:sp>
       <p:sp>
         <p:nvSpPr>
-          <p:cNvPr id="18" name="">
-            <a:extLst xmlns:a="http://schemas.openxmlformats.org/drawingml/2006/main">
-              <a:ext uri="{FF2B5EF4-FFF2-40B4-BE49-F238E27FC236}">
-                <a16:creationId xmlns:a16="http://schemas.microsoft.com/office/drawing/2014/main" id="{0DB81FEF-D7EB-4150-AF3F-486A51F7E338}"/>
-              </a:ext>
-            </a:extLst>
-          </p:cNvPr>
-          <p:cNvSpPr>
-            <a:spLocks xmlns:a="http://schemas.openxmlformats.org/drawingml/2006/main" noGrp="1"/>
-          </p:cNvSpPr>
-          <p:nvPr/>
-        </p:nvSpPr>
-        <p:spPr>
-          <a:xfrm xmlns:a="http://schemas.openxmlformats.org/drawingml/2006/main">
-            <a:off x="8096250" y="2276475"/>
-            <a:ext cx="323850" cy="228600"/>
-          </a:xfrm>
-          <a:prstGeom xmlns:a="http://schemas.openxmlformats.org/drawingml/2006/main" prst="rect">
-            <a:avLst/>
-          </a:prstGeom>
-          <a:noFill xmlns:a="http://schemas.openxmlformats.org/drawingml/2006/main"/>
-          <a:ln xmlns:a="http://schemas.openxmlformats.org/drawingml/2006/main" w="0">
-            <a:noFill/>
-            <a:prstDash val="solid"/>
-          </a:ln>
-        </p:spPr>
-        <p:txBody>
-          <a:bodyPr xmlns:a="http://schemas.openxmlformats.org/drawingml/2006/main"/>
-          <a:lstStyle xmlns:a="http://schemas.openxmlformats.org/drawingml/2006/main"/>
-          <a:p xmlns:a="http://schemas.openxmlformats.org/drawingml/2006/main">
-            <a:pPr>
-              <a:defRPr sz="1800" b="1">
-                <a:solidFill>
-                  <a:srgbClr val="4CC9F0"/>
-                </a:solidFill>
-              </a:defRPr>
-            </a:pPr>
-            <a:r>
-              <a:rPr sz="1800" b="1">
-                <a:solidFill>
-                  <a:srgbClr val="4CC9F0"/>
-                </a:solidFill>
-              </a:rPr>
-              <a:t>-&gt;</a:t>
-            </a:r>
-          </a:p>
-        </p:txBody>
-      </p:sp>
-      <p:sp>
-        <p:nvSpPr>
-          <p:cNvPr id="19" name="">
-            <a:extLst xmlns:a="http://schemas.openxmlformats.org/drawingml/2006/main">
-              <a:ext uri="{FF2B5EF4-FFF2-40B4-BE49-F238E27FC236}">
-                <a16:creationId xmlns:a16="http://schemas.microsoft.com/office/drawing/2014/main" id="{B492CFB2-407C-4872-92BE-05DE586D5944}"/>
-              </a:ext>
-            </a:extLst>
-          </p:cNvPr>
-          <p:cNvSpPr>
-            <a:spLocks xmlns:a="http://schemas.openxmlformats.org/drawingml/2006/main" noGrp="1"/>
-          </p:cNvSpPr>
-          <p:nvPr/>
-        </p:nvSpPr>
-        <p:spPr>
-          <a:xfrm xmlns:a="http://schemas.openxmlformats.org/drawingml/2006/main">
-            <a:off x="8362950" y="2047875"/>
-            <a:ext cx="1162050" cy="742950"/>
+          <p:cNvPr id="14" name="">
+            <a:extLst xmlns:a="http://schemas.openxmlformats.org/drawingml/2006/main">
+              <a:ext uri="{FF2B5EF4-FFF2-40B4-BE49-F238E27FC236}">
+                <a16:creationId xmlns:a16="http://schemas.microsoft.com/office/drawing/2014/main" id="{6B5F3A2D-9FEB-42EA-B40E-2A5623A7C370}"/>
+              </a:ext>
+            </a:extLst>
+          </p:cNvPr>
+          <p:cNvSpPr>
+            <a:spLocks xmlns:a="http://schemas.openxmlformats.org/drawingml/2006/main" noGrp="1"/>
+          </p:cNvSpPr>
+          <p:nvPr/>
+        </p:nvSpPr>
+        <p:spPr>
+          <a:xfrm xmlns:a="http://schemas.openxmlformats.org/drawingml/2006/main">
+            <a:off x="8763000" y="2076450"/>
+            <a:ext cx="1333500" cy="723900"/>
           </a:xfrm>
           <a:prstGeom xmlns:a="http://schemas.openxmlformats.org/drawingml/2006/main" prst="roundRect">
             <a:avLst>
-              <a:gd name="adj" fmla="val 10256"/>
+              <a:gd name="adj" fmla="val 10526"/>
             </a:avLst>
           </a:prstGeom>
           <a:solidFill xmlns:a="http://schemas.openxmlformats.org/drawingml/2006/main">
@@ -3817,45 +3652,45 @@
       </p:sp>
       <p:sp>
         <p:nvSpPr>
-          <p:cNvPr id="20" name="">
-            <a:extLst xmlns:a="http://schemas.openxmlformats.org/drawingml/2006/main">
-              <a:ext uri="{FF2B5EF4-FFF2-40B4-BE49-F238E27FC236}">
-                <a16:creationId xmlns:a16="http://schemas.microsoft.com/office/drawing/2014/main" id="{3A0E87C4-473C-4D95-A827-36569A4AC8D8}"/>
-              </a:ext>
-            </a:extLst>
-          </p:cNvPr>
-          <p:cNvSpPr>
-            <a:spLocks xmlns:a="http://schemas.openxmlformats.org/drawingml/2006/main" noGrp="1"/>
-          </p:cNvSpPr>
-          <p:nvPr/>
-        </p:nvSpPr>
-        <p:spPr>
-          <a:xfrm xmlns:a="http://schemas.openxmlformats.org/drawingml/2006/main">
-            <a:off x="8486775" y="2276475"/>
-            <a:ext cx="914400" cy="228600"/>
-          </a:xfrm>
-          <a:prstGeom xmlns:a="http://schemas.openxmlformats.org/drawingml/2006/main" prst="rect">
-            <a:avLst/>
-          </a:prstGeom>
-          <a:noFill xmlns:a="http://schemas.openxmlformats.org/drawingml/2006/main"/>
-          <a:ln xmlns:a="http://schemas.openxmlformats.org/drawingml/2006/main" w="0">
-            <a:noFill/>
-            <a:prstDash val="solid"/>
-          </a:ln>
-        </p:spPr>
-        <p:txBody>
-          <a:bodyPr xmlns:a="http://schemas.openxmlformats.org/drawingml/2006/main"/>
-          <a:lstStyle xmlns:a="http://schemas.openxmlformats.org/drawingml/2006/main"/>
-          <a:p xmlns:a="http://schemas.openxmlformats.org/drawingml/2006/main">
-            <a:pPr>
-              <a:defRPr sz="1500" b="1">
-                <a:solidFill>
-                  <a:srgbClr val="F4F8FB"/>
-                </a:solidFill>
-              </a:defRPr>
-            </a:pPr>
-            <a:r>
-              <a:rPr sz="1500" b="1">
+          <p:cNvPr id="15" name="">
+            <a:extLst xmlns:a="http://schemas.openxmlformats.org/drawingml/2006/main">
+              <a:ext uri="{FF2B5EF4-FFF2-40B4-BE49-F238E27FC236}">
+                <a16:creationId xmlns:a16="http://schemas.microsoft.com/office/drawing/2014/main" id="{C01D1F74-EE85-4EA7-9C92-AAB88A65B2F2}"/>
+              </a:ext>
+            </a:extLst>
+          </p:cNvPr>
+          <p:cNvSpPr>
+            <a:spLocks xmlns:a="http://schemas.openxmlformats.org/drawingml/2006/main" noGrp="1"/>
+          </p:cNvSpPr>
+          <p:nvPr/>
+        </p:nvSpPr>
+        <p:spPr>
+          <a:xfrm xmlns:a="http://schemas.openxmlformats.org/drawingml/2006/main">
+            <a:off x="8858250" y="2305050"/>
+            <a:ext cx="1143000" cy="228600"/>
+          </a:xfrm>
+          <a:prstGeom xmlns:a="http://schemas.openxmlformats.org/drawingml/2006/main" prst="rect">
+            <a:avLst/>
+          </a:prstGeom>
+          <a:noFill xmlns:a="http://schemas.openxmlformats.org/drawingml/2006/main"/>
+          <a:ln xmlns:a="http://schemas.openxmlformats.org/drawingml/2006/main" w="0">
+            <a:noFill/>
+            <a:prstDash val="solid"/>
+          </a:ln>
+        </p:spPr>
+        <p:txBody>
+          <a:bodyPr xmlns:a="http://schemas.openxmlformats.org/drawingml/2006/main"/>
+          <a:lstStyle xmlns:a="http://schemas.openxmlformats.org/drawingml/2006/main"/>
+          <a:p xmlns:a="http://schemas.openxmlformats.org/drawingml/2006/main">
+            <a:pPr>
+              <a:defRPr sz="1350" b="1">
+                <a:solidFill>
+                  <a:srgbClr val="F4F8FB"/>
+                </a:solidFill>
+              </a:defRPr>
+            </a:pPr>
+            <a:r>
+              <a:rPr sz="1350" b="1">
                 <a:solidFill>
                   <a:srgbClr val="F4F8FB"/>
                 </a:solidFill>
@@ -3867,76 +3702,26 @@
       </p:sp>
       <p:sp>
         <p:nvSpPr>
-          <p:cNvPr id="21" name="">
-            <a:extLst xmlns:a="http://schemas.openxmlformats.org/drawingml/2006/main">
-              <a:ext uri="{FF2B5EF4-FFF2-40B4-BE49-F238E27FC236}">
-                <a16:creationId xmlns:a16="http://schemas.microsoft.com/office/drawing/2014/main" id="{1D61EBBB-2E0A-4A92-B7BB-0C824AC9990D}"/>
-              </a:ext>
-            </a:extLst>
-          </p:cNvPr>
-          <p:cNvSpPr>
-            <a:spLocks xmlns:a="http://schemas.openxmlformats.org/drawingml/2006/main" noGrp="1"/>
-          </p:cNvSpPr>
-          <p:nvPr/>
-        </p:nvSpPr>
-        <p:spPr>
-          <a:xfrm xmlns:a="http://schemas.openxmlformats.org/drawingml/2006/main">
-            <a:off x="9601200" y="2276475"/>
-            <a:ext cx="323850" cy="228600"/>
-          </a:xfrm>
-          <a:prstGeom xmlns:a="http://schemas.openxmlformats.org/drawingml/2006/main" prst="rect">
-            <a:avLst/>
-          </a:prstGeom>
-          <a:noFill xmlns:a="http://schemas.openxmlformats.org/drawingml/2006/main"/>
-          <a:ln xmlns:a="http://schemas.openxmlformats.org/drawingml/2006/main" w="0">
-            <a:noFill/>
-            <a:prstDash val="solid"/>
-          </a:ln>
-        </p:spPr>
-        <p:txBody>
-          <a:bodyPr xmlns:a="http://schemas.openxmlformats.org/drawingml/2006/main"/>
-          <a:lstStyle xmlns:a="http://schemas.openxmlformats.org/drawingml/2006/main"/>
-          <a:p xmlns:a="http://schemas.openxmlformats.org/drawingml/2006/main">
-            <a:pPr>
-              <a:defRPr sz="1800" b="1">
-                <a:solidFill>
-                  <a:srgbClr val="4CC9F0"/>
-                </a:solidFill>
-              </a:defRPr>
-            </a:pPr>
-            <a:r>
-              <a:rPr sz="1800" b="1">
-                <a:solidFill>
-                  <a:srgbClr val="4CC9F0"/>
-                </a:solidFill>
-              </a:rPr>
-              <a:t>-&gt;</a:t>
-            </a:r>
-          </a:p>
-        </p:txBody>
-      </p:sp>
-      <p:sp>
-        <p:nvSpPr>
-          <p:cNvPr id="22" name="">
-            <a:extLst xmlns:a="http://schemas.openxmlformats.org/drawingml/2006/main">
-              <a:ext uri="{FF2B5EF4-FFF2-40B4-BE49-F238E27FC236}">
-                <a16:creationId xmlns:a16="http://schemas.microsoft.com/office/drawing/2014/main" id="{CA11117B-CC68-4CAA-BC96-EBD939CD5AC8}"/>
-              </a:ext>
-            </a:extLst>
-          </p:cNvPr>
-          <p:cNvSpPr>
-            <a:spLocks xmlns:a="http://schemas.openxmlformats.org/drawingml/2006/main" noGrp="1"/>
-          </p:cNvSpPr>
-          <p:nvPr/>
-        </p:nvSpPr>
-        <p:spPr>
-          <a:xfrm xmlns:a="http://schemas.openxmlformats.org/drawingml/2006/main">
-            <a:off x="9867900" y="2047875"/>
-            <a:ext cx="1162050" cy="742950"/>
+          <p:cNvPr id="16" name="">
+            <a:extLst xmlns:a="http://schemas.openxmlformats.org/drawingml/2006/main">
+              <a:ext uri="{FF2B5EF4-FFF2-40B4-BE49-F238E27FC236}">
+                <a16:creationId xmlns:a16="http://schemas.microsoft.com/office/drawing/2014/main" id="{58A280BC-8E4C-4BA0-8191-549916E6B438}"/>
+              </a:ext>
+            </a:extLst>
+          </p:cNvPr>
+          <p:cNvSpPr>
+            <a:spLocks xmlns:a="http://schemas.openxmlformats.org/drawingml/2006/main" noGrp="1"/>
+          </p:cNvSpPr>
+          <p:nvPr/>
+        </p:nvSpPr>
+        <p:spPr>
+          <a:xfrm xmlns:a="http://schemas.openxmlformats.org/drawingml/2006/main">
+            <a:off x="10248900" y="2076450"/>
+            <a:ext cx="952500" cy="723900"/>
           </a:xfrm>
           <a:prstGeom xmlns:a="http://schemas.openxmlformats.org/drawingml/2006/main" prst="roundRect">
             <a:avLst>
-              <a:gd name="adj" fmla="val 10256"/>
+              <a:gd name="adj" fmla="val 10526"/>
             </a:avLst>
           </a:prstGeom>
           <a:solidFill xmlns:a="http://schemas.openxmlformats.org/drawingml/2006/main">
@@ -3952,45 +3737,45 @@
       </p:sp>
       <p:sp>
         <p:nvSpPr>
-          <p:cNvPr id="23" name="">
-            <a:extLst xmlns:a="http://schemas.openxmlformats.org/drawingml/2006/main">
-              <a:ext uri="{FF2B5EF4-FFF2-40B4-BE49-F238E27FC236}">
-                <a16:creationId xmlns:a16="http://schemas.microsoft.com/office/drawing/2014/main" id="{6F144C0B-8948-479E-9988-DEE6EB5AA5EB}"/>
-              </a:ext>
-            </a:extLst>
-          </p:cNvPr>
-          <p:cNvSpPr>
-            <a:spLocks xmlns:a="http://schemas.openxmlformats.org/drawingml/2006/main" noGrp="1"/>
-          </p:cNvSpPr>
-          <p:nvPr/>
-        </p:nvSpPr>
-        <p:spPr>
-          <a:xfrm xmlns:a="http://schemas.openxmlformats.org/drawingml/2006/main">
-            <a:off x="9991725" y="2276475"/>
-            <a:ext cx="914400" cy="228600"/>
-          </a:xfrm>
-          <a:prstGeom xmlns:a="http://schemas.openxmlformats.org/drawingml/2006/main" prst="rect">
-            <a:avLst/>
-          </a:prstGeom>
-          <a:noFill xmlns:a="http://schemas.openxmlformats.org/drawingml/2006/main"/>
-          <a:ln xmlns:a="http://schemas.openxmlformats.org/drawingml/2006/main" w="0">
-            <a:noFill/>
-            <a:prstDash val="solid"/>
-          </a:ln>
-        </p:spPr>
-        <p:txBody>
-          <a:bodyPr xmlns:a="http://schemas.openxmlformats.org/drawingml/2006/main"/>
-          <a:lstStyle xmlns:a="http://schemas.openxmlformats.org/drawingml/2006/main"/>
-          <a:p xmlns:a="http://schemas.openxmlformats.org/drawingml/2006/main">
-            <a:pPr>
-              <a:defRPr sz="1500" b="1">
-                <a:solidFill>
-                  <a:srgbClr val="F4F8FB"/>
-                </a:solidFill>
-              </a:defRPr>
-            </a:pPr>
-            <a:r>
-              <a:rPr sz="1500" b="1">
+          <p:cNvPr id="17" name="">
+            <a:extLst xmlns:a="http://schemas.openxmlformats.org/drawingml/2006/main">
+              <a:ext uri="{FF2B5EF4-FFF2-40B4-BE49-F238E27FC236}">
+                <a16:creationId xmlns:a16="http://schemas.microsoft.com/office/drawing/2014/main" id="{414D83B4-6DB7-4403-ABBF-EFFDBCF867B9}"/>
+              </a:ext>
+            </a:extLst>
+          </p:cNvPr>
+          <p:cNvSpPr>
+            <a:spLocks xmlns:a="http://schemas.openxmlformats.org/drawingml/2006/main" noGrp="1"/>
+          </p:cNvSpPr>
+          <p:nvPr/>
+        </p:nvSpPr>
+        <p:spPr>
+          <a:xfrm xmlns:a="http://schemas.openxmlformats.org/drawingml/2006/main">
+            <a:off x="10344150" y="2305050"/>
+            <a:ext cx="762000" cy="228600"/>
+          </a:xfrm>
+          <a:prstGeom xmlns:a="http://schemas.openxmlformats.org/drawingml/2006/main" prst="rect">
+            <a:avLst/>
+          </a:prstGeom>
+          <a:noFill xmlns:a="http://schemas.openxmlformats.org/drawingml/2006/main"/>
+          <a:ln xmlns:a="http://schemas.openxmlformats.org/drawingml/2006/main" w="0">
+            <a:noFill/>
+            <a:prstDash val="solid"/>
+          </a:ln>
+        </p:spPr>
+        <p:txBody>
+          <a:bodyPr xmlns:a="http://schemas.openxmlformats.org/drawingml/2006/main"/>
+          <a:lstStyle xmlns:a="http://schemas.openxmlformats.org/drawingml/2006/main"/>
+          <a:p xmlns:a="http://schemas.openxmlformats.org/drawingml/2006/main">
+            <a:pPr>
+              <a:defRPr sz="1350" b="1">
+                <a:solidFill>
+                  <a:srgbClr val="F4F8FB"/>
+                </a:solidFill>
+              </a:defRPr>
+            </a:pPr>
+            <a:r>
+              <a:rPr sz="1350" b="1">
                 <a:solidFill>
                   <a:srgbClr val="F4F8FB"/>
                 </a:solidFill>
@@ -4000,23 +3785,179 @@
           </a:p>
         </p:txBody>
       </p:sp>
+      <p:cxnSp>
+        <p:nvCxnSpPr>
+          <p:cNvPr id="45" name=""/>
+          <p:cNvCxnSpPr>
+            <a:stCxn xmlns:a="http://schemas.openxmlformats.org/drawingml/2006/main" id="4" idx="3"/>
+            <a:endCxn xmlns:a="http://schemas.openxmlformats.org/drawingml/2006/main" id="6" idx="1"/>
+          </p:cNvCxnSpPr>
+          <p:nvPr/>
+        </p:nvCxnSpPr>
+        <p:spPr>
+          <a:xfrm xmlns:a="http://schemas.openxmlformats.org/drawingml/2006/main">
+            <a:off x="2095500" y="2438400"/>
+            <a:ext cx="152400" cy="0"/>
+          </a:xfrm>
+          <a:prstGeom xmlns:a="http://schemas.openxmlformats.org/drawingml/2006/main" prst="straightConnector1">
+            <a:avLst/>
+          </a:prstGeom>
+          <a:ln xmlns:a="http://schemas.openxmlformats.org/drawingml/2006/main" w="20955">
+            <a:solidFill>
+              <a:srgbClr val="4CC9F0"/>
+            </a:solidFill>
+            <a:prstDash val="solid"/>
+            <a:tailEnd type="arrow" w="med" len="med"/>
+          </a:ln>
+        </p:spPr>
+      </p:cxnSp>
+      <p:cxnSp>
+        <p:nvCxnSpPr>
+          <p:cNvPr id="46" name=""/>
+          <p:cNvCxnSpPr>
+            <a:stCxn xmlns:a="http://schemas.openxmlformats.org/drawingml/2006/main" id="6" idx="3"/>
+            <a:endCxn xmlns:a="http://schemas.openxmlformats.org/drawingml/2006/main" id="8" idx="1"/>
+          </p:cNvCxnSpPr>
+          <p:nvPr/>
+        </p:nvCxnSpPr>
+        <p:spPr>
+          <a:xfrm xmlns:a="http://schemas.openxmlformats.org/drawingml/2006/main">
+            <a:off x="3581400" y="2438400"/>
+            <a:ext cx="152400" cy="0"/>
+          </a:xfrm>
+          <a:prstGeom xmlns:a="http://schemas.openxmlformats.org/drawingml/2006/main" prst="straightConnector1">
+            <a:avLst/>
+          </a:prstGeom>
+          <a:ln xmlns:a="http://schemas.openxmlformats.org/drawingml/2006/main" w="20955">
+            <a:solidFill>
+              <a:srgbClr val="4CC9F0"/>
+            </a:solidFill>
+            <a:prstDash val="solid"/>
+            <a:tailEnd type="arrow" w="med" len="med"/>
+          </a:ln>
+        </p:spPr>
+      </p:cxnSp>
+      <p:cxnSp>
+        <p:nvCxnSpPr>
+          <p:cNvPr id="47" name=""/>
+          <p:cNvCxnSpPr>
+            <a:stCxn xmlns:a="http://schemas.openxmlformats.org/drawingml/2006/main" id="8" idx="3"/>
+            <a:endCxn xmlns:a="http://schemas.openxmlformats.org/drawingml/2006/main" id="10" idx="1"/>
+          </p:cNvCxnSpPr>
+          <p:nvPr/>
+        </p:nvCxnSpPr>
+        <p:spPr>
+          <a:xfrm xmlns:a="http://schemas.openxmlformats.org/drawingml/2006/main">
+            <a:off x="5543550" y="2438400"/>
+            <a:ext cx="152400" cy="0"/>
+          </a:xfrm>
+          <a:prstGeom xmlns:a="http://schemas.openxmlformats.org/drawingml/2006/main" prst="straightConnector1">
+            <a:avLst/>
+          </a:prstGeom>
+          <a:ln xmlns:a="http://schemas.openxmlformats.org/drawingml/2006/main" w="20955">
+            <a:solidFill>
+              <a:srgbClr val="4CC9F0"/>
+            </a:solidFill>
+            <a:prstDash val="solid"/>
+            <a:tailEnd type="arrow" w="med" len="med"/>
+          </a:ln>
+        </p:spPr>
+      </p:cxnSp>
+      <p:cxnSp>
+        <p:nvCxnSpPr>
+          <p:cNvPr id="48" name=""/>
+          <p:cNvCxnSpPr>
+            <a:stCxn xmlns:a="http://schemas.openxmlformats.org/drawingml/2006/main" id="10" idx="3"/>
+            <a:endCxn xmlns:a="http://schemas.openxmlformats.org/drawingml/2006/main" id="12" idx="1"/>
+          </p:cNvCxnSpPr>
+          <p:nvPr/>
+        </p:nvCxnSpPr>
+        <p:spPr>
+          <a:xfrm xmlns:a="http://schemas.openxmlformats.org/drawingml/2006/main">
+            <a:off x="7219950" y="2438400"/>
+            <a:ext cx="152400" cy="0"/>
+          </a:xfrm>
+          <a:prstGeom xmlns:a="http://schemas.openxmlformats.org/drawingml/2006/main" prst="straightConnector1">
+            <a:avLst/>
+          </a:prstGeom>
+          <a:ln xmlns:a="http://schemas.openxmlformats.org/drawingml/2006/main" w="20955">
+            <a:solidFill>
+              <a:srgbClr val="4CC9F0"/>
+            </a:solidFill>
+            <a:prstDash val="solid"/>
+            <a:tailEnd type="arrow" w="med" len="med"/>
+          </a:ln>
+        </p:spPr>
+      </p:cxnSp>
+      <p:cxnSp>
+        <p:nvCxnSpPr>
+          <p:cNvPr id="49" name=""/>
+          <p:cNvCxnSpPr>
+            <a:stCxn xmlns:a="http://schemas.openxmlformats.org/drawingml/2006/main" id="12" idx="3"/>
+            <a:endCxn xmlns:a="http://schemas.openxmlformats.org/drawingml/2006/main" id="14" idx="1"/>
+          </p:cNvCxnSpPr>
+          <p:nvPr/>
+        </p:nvCxnSpPr>
+        <p:spPr>
+          <a:xfrm xmlns:a="http://schemas.openxmlformats.org/drawingml/2006/main">
+            <a:off x="8610600" y="2438400"/>
+            <a:ext cx="152400" cy="0"/>
+          </a:xfrm>
+          <a:prstGeom xmlns:a="http://schemas.openxmlformats.org/drawingml/2006/main" prst="straightConnector1">
+            <a:avLst/>
+          </a:prstGeom>
+          <a:ln xmlns:a="http://schemas.openxmlformats.org/drawingml/2006/main" w="20955">
+            <a:solidFill>
+              <a:srgbClr val="4CC9F0"/>
+            </a:solidFill>
+            <a:prstDash val="solid"/>
+            <a:tailEnd type="arrow" w="med" len="med"/>
+          </a:ln>
+        </p:spPr>
+      </p:cxnSp>
+      <p:cxnSp>
+        <p:nvCxnSpPr>
+          <p:cNvPr id="50" name=""/>
+          <p:cNvCxnSpPr>
+            <a:stCxn xmlns:a="http://schemas.openxmlformats.org/drawingml/2006/main" id="14" idx="3"/>
+            <a:endCxn xmlns:a="http://schemas.openxmlformats.org/drawingml/2006/main" id="16" idx="1"/>
+          </p:cNvCxnSpPr>
+          <p:nvPr/>
+        </p:nvCxnSpPr>
+        <p:spPr>
+          <a:xfrm xmlns:a="http://schemas.openxmlformats.org/drawingml/2006/main">
+            <a:off x="10096500" y="2438400"/>
+            <a:ext cx="152400" cy="0"/>
+          </a:xfrm>
+          <a:prstGeom xmlns:a="http://schemas.openxmlformats.org/drawingml/2006/main" prst="straightConnector1">
+            <a:avLst/>
+          </a:prstGeom>
+          <a:ln xmlns:a="http://schemas.openxmlformats.org/drawingml/2006/main" w="20955">
+            <a:solidFill>
+              <a:srgbClr val="4CC9F0"/>
+            </a:solidFill>
+            <a:prstDash val="solid"/>
+            <a:tailEnd type="arrow" w="med" len="med"/>
+          </a:ln>
+        </p:spPr>
+      </p:cxnSp>
       <p:sp>
         <p:nvSpPr>
           <p:cNvPr id="24" name="">
             <a:extLst xmlns:a="http://schemas.openxmlformats.org/drawingml/2006/main">
               <a:ext uri="{FF2B5EF4-FFF2-40B4-BE49-F238E27FC236}">
-                <a16:creationId xmlns:a16="http://schemas.microsoft.com/office/drawing/2014/main" id="{45E2C53E-B7CC-4C8A-8C94-790C64993063}"/>
-              </a:ext>
-            </a:extLst>
-          </p:cNvPr>
-          <p:cNvSpPr>
-            <a:spLocks xmlns:a="http://schemas.openxmlformats.org/drawingml/2006/main" noGrp="1"/>
-          </p:cNvSpPr>
-          <p:nvPr/>
-        </p:nvSpPr>
-        <p:spPr>
-          <a:xfrm xmlns:a="http://schemas.openxmlformats.org/drawingml/2006/main">
-            <a:off x="1619250" y="4000500"/>
+                <a16:creationId xmlns:a16="http://schemas.microsoft.com/office/drawing/2014/main" id="{F4E69B37-AF96-4B99-A20E-90412B339B3C}"/>
+              </a:ext>
+            </a:extLst>
+          </p:cNvPr>
+          <p:cNvSpPr>
+            <a:spLocks xmlns:a="http://schemas.openxmlformats.org/drawingml/2006/main" noGrp="1"/>
+          </p:cNvSpPr>
+          <p:nvPr/>
+        </p:nvSpPr>
+        <p:spPr>
+          <a:xfrm xmlns:a="http://schemas.openxmlformats.org/drawingml/2006/main">
+            <a:off x="1619250" y="4095750"/>
             <a:ext cx="1143000" cy="361950"/>
           </a:xfrm>
           <a:prstGeom xmlns:a="http://schemas.openxmlformats.org/drawingml/2006/main" prst="rect">
@@ -4055,19 +3996,19 @@
           <p:cNvPr id="25" name="">
             <a:extLst xmlns:a="http://schemas.openxmlformats.org/drawingml/2006/main">
               <a:ext uri="{FF2B5EF4-FFF2-40B4-BE49-F238E27FC236}">
-                <a16:creationId xmlns:a16="http://schemas.microsoft.com/office/drawing/2014/main" id="{6A09E850-38E3-4384-87FC-93FB651543EC}"/>
-              </a:ext>
-            </a:extLst>
-          </p:cNvPr>
-          <p:cNvSpPr>
-            <a:spLocks xmlns:a="http://schemas.openxmlformats.org/drawingml/2006/main" noGrp="1"/>
-          </p:cNvSpPr>
-          <p:nvPr/>
-        </p:nvSpPr>
-        <p:spPr>
-          <a:xfrm xmlns:a="http://schemas.openxmlformats.org/drawingml/2006/main">
-            <a:off x="1619250" y="4400550"/>
-            <a:ext cx="3429000" cy="666750"/>
+                <a16:creationId xmlns:a16="http://schemas.microsoft.com/office/drawing/2014/main" id="{45CC9F9B-A208-4C93-A674-C0D9F132A9F7}"/>
+              </a:ext>
+            </a:extLst>
+          </p:cNvPr>
+          <p:cNvSpPr>
+            <a:spLocks xmlns:a="http://schemas.openxmlformats.org/drawingml/2006/main" noGrp="1"/>
+          </p:cNvSpPr>
+          <p:nvPr/>
+        </p:nvSpPr>
+        <p:spPr>
+          <a:xfrm xmlns:a="http://schemas.openxmlformats.org/drawingml/2006/main">
+            <a:off x="1619250" y="4514850"/>
+            <a:ext cx="3714750" cy="762000"/>
           </a:xfrm>
           <a:prstGeom xmlns:a="http://schemas.openxmlformats.org/drawingml/2006/main" prst="rect">
             <a:avLst/>
@@ -4095,7 +4036,24 @@
                   <a:srgbClr val="F4F8FB"/>
                 </a:solidFill>
               </a:rPr>
-              <a:t>Full route wasted time and cost on a documentation-only change.</a:t>
+              <a:t>Full route wasted time and cost</a:t>
+            </a:r>
+          </a:p>
+          <a:p xmlns:a="http://schemas.openxmlformats.org/drawingml/2006/main">
+            <a:pPr>
+              <a:defRPr sz="1800" b="0">
+                <a:solidFill>
+                  <a:srgbClr val="F4F8FB"/>
+                </a:solidFill>
+              </a:defRPr>
+            </a:pPr>
+            <a:r>
+              <a:rPr sz="1800" b="0">
+                <a:solidFill>
+                  <a:srgbClr val="F4F8FB"/>
+                </a:solidFill>
+              </a:rPr>
+              <a:t>on a documentation-only change.</a:t>
             </a:r>
           </a:p>
         </p:txBody>
@@ -4105,18 +4063,18 @@
           <p:cNvPr id="26" name="">
             <a:extLst xmlns:a="http://schemas.openxmlformats.org/drawingml/2006/main">
               <a:ext uri="{FF2B5EF4-FFF2-40B4-BE49-F238E27FC236}">
-                <a16:creationId xmlns:a16="http://schemas.microsoft.com/office/drawing/2014/main" id="{1F76D37E-8D8C-4B16-97BD-91C009CF2A41}"/>
-              </a:ext>
-            </a:extLst>
-          </p:cNvPr>
-          <p:cNvSpPr>
-            <a:spLocks xmlns:a="http://schemas.openxmlformats.org/drawingml/2006/main" noGrp="1"/>
-          </p:cNvSpPr>
-          <p:nvPr/>
-        </p:nvSpPr>
-        <p:spPr>
-          <a:xfrm xmlns:a="http://schemas.openxmlformats.org/drawingml/2006/main">
-            <a:off x="6667500" y="4000500"/>
+                <a16:creationId xmlns:a16="http://schemas.microsoft.com/office/drawing/2014/main" id="{BBAC3DF7-3A51-4358-944A-14D236528AF2}"/>
+              </a:ext>
+            </a:extLst>
+          </p:cNvPr>
+          <p:cNvSpPr>
+            <a:spLocks xmlns:a="http://schemas.openxmlformats.org/drawingml/2006/main" noGrp="1"/>
+          </p:cNvSpPr>
+          <p:nvPr/>
+        </p:nvSpPr>
+        <p:spPr>
+          <a:xfrm xmlns:a="http://schemas.openxmlformats.org/drawingml/2006/main">
+            <a:off x="6762750" y="4095750"/>
             <a:ext cx="1143000" cy="361950"/>
           </a:xfrm>
           <a:prstGeom xmlns:a="http://schemas.openxmlformats.org/drawingml/2006/main" prst="rect">
@@ -4155,19 +4113,19 @@
           <p:cNvPr id="27" name="">
             <a:extLst xmlns:a="http://schemas.openxmlformats.org/drawingml/2006/main">
               <a:ext uri="{FF2B5EF4-FFF2-40B4-BE49-F238E27FC236}">
-                <a16:creationId xmlns:a16="http://schemas.microsoft.com/office/drawing/2014/main" id="{D287260F-3B97-4E8A-9A74-3BA844F1DFAC}"/>
-              </a:ext>
-            </a:extLst>
-          </p:cNvPr>
-          <p:cNvSpPr>
-            <a:spLocks xmlns:a="http://schemas.openxmlformats.org/drawingml/2006/main" noGrp="1"/>
-          </p:cNvSpPr>
-          <p:nvPr/>
-        </p:nvSpPr>
-        <p:spPr>
-          <a:xfrm xmlns:a="http://schemas.openxmlformats.org/drawingml/2006/main">
-            <a:off x="6667500" y="4400550"/>
-            <a:ext cx="3810000" cy="666750"/>
+                <a16:creationId xmlns:a16="http://schemas.microsoft.com/office/drawing/2014/main" id="{7442D42F-5CB9-4AC9-8B2E-FCDC249AABCB}"/>
+              </a:ext>
+            </a:extLst>
+          </p:cNvPr>
+          <p:cNvSpPr>
+            <a:spLocks xmlns:a="http://schemas.openxmlformats.org/drawingml/2006/main" noGrp="1"/>
+          </p:cNvSpPr>
+          <p:nvPr/>
+        </p:nvSpPr>
+        <p:spPr>
+          <a:xfrm xmlns:a="http://schemas.openxmlformats.org/drawingml/2006/main">
+            <a:off x="6762750" y="4514850"/>
+            <a:ext cx="4095750" cy="762000"/>
           </a:xfrm>
           <a:prstGeom xmlns:a="http://schemas.openxmlformats.org/drawingml/2006/main" prst="rect">
             <a:avLst/>
@@ -4195,7 +4153,24 @@
                   <a:srgbClr val="F4F8FB"/>
                 </a:solidFill>
               </a:rPr>
-              <a:t>Removing governance would have been unsafe for policy-sensitive work.</a:t>
+              <a:t>Removing governance would have</a:t>
+            </a:r>
+          </a:p>
+          <a:p xmlns:a="http://schemas.openxmlformats.org/drawingml/2006/main">
+            <a:pPr>
+              <a:defRPr sz="1800" b="0">
+                <a:solidFill>
+                  <a:srgbClr val="F4F8FB"/>
+                </a:solidFill>
+              </a:defRPr>
+            </a:pPr>
+            <a:r>
+              <a:rPr sz="1800" b="0">
+                <a:solidFill>
+                  <a:srgbClr val="F4F8FB"/>
+                </a:solidFill>
+              </a:rPr>
+              <a:t>been unsafe for policy-sensitive work.</a:t>
             </a:r>
           </a:p>
         </p:txBody>
@@ -4203,7 +4178,7 @@
     </p:spTree>
     <p:extLst>
       <p:ext uri="{BB962C8B-B14F-4D97-AF65-F5344CB8AC3E}">
-        <p14:creationId xmlns:p14="http://schemas.microsoft.com/office/powerpoint/2010/main" val="383976842"/>
+        <p14:creationId xmlns:p14="http://schemas.microsoft.com/office/powerpoint/2010/main" val="2001156157"/>
       </p:ext>
     </p:extLst>
   </p:cSld>
@@ -4231,10 +4206,10 @@
       </p:grpSpPr>
       <p:sp>
         <p:nvSpPr>
-          <p:cNvPr id="7" name="slide-title">
-            <a:extLst xmlns:a="http://schemas.openxmlformats.org/drawingml/2006/main">
-              <a:ext uri="{FF2B5EF4-FFF2-40B4-BE49-F238E27FC236}">
-                <a16:creationId xmlns:a16="http://schemas.microsoft.com/office/drawing/2014/main" id="{18BD5A04-36D8-4698-A700-DB75F4D8572E}"/>
+          <p:cNvPr id="7" name="">
+            <a:extLst xmlns:a="http://schemas.openxmlformats.org/drawingml/2006/main">
+              <a:ext uri="{FF2B5EF4-FFF2-40B4-BE49-F238E27FC236}">
+                <a16:creationId xmlns:a16="http://schemas.microsoft.com/office/drawing/2014/main" id="{9C92DE55-C58E-4921-AC08-04CD0A2832BE}"/>
               </a:ext>
             </a:extLst>
           </p:cNvPr>
@@ -4246,7 +4221,7 @@
         <p:spPr>
           <a:xfrm xmlns:a="http://schemas.openxmlformats.org/drawingml/2006/main">
             <a:off x="666750" y="323850"/>
-            <a:ext cx="8763000" cy="552450"/>
+            <a:ext cx="9715500" cy="495300"/>
           </a:xfrm>
           <a:prstGeom xmlns:a="http://schemas.openxmlformats.org/drawingml/2006/main" prst="rect">
             <a:avLst/>
@@ -4281,22 +4256,22 @@
       </p:sp>
       <p:sp>
         <p:nvSpPr>
-          <p:cNvPr id="2" name="slide-subtitle">
-            <a:extLst xmlns:a="http://schemas.openxmlformats.org/drawingml/2006/main">
-              <a:ext uri="{FF2B5EF4-FFF2-40B4-BE49-F238E27FC236}">
-                <a16:creationId xmlns:a16="http://schemas.microsoft.com/office/drawing/2014/main" id="{633F58DA-DFD9-46C0-A19F-D6CA1C69B632}"/>
-              </a:ext>
-            </a:extLst>
-          </p:cNvPr>
-          <p:cNvSpPr>
-            <a:spLocks xmlns:a="http://schemas.openxmlformats.org/drawingml/2006/main" noGrp="1"/>
-          </p:cNvSpPr>
-          <p:nvPr/>
-        </p:nvSpPr>
-        <p:spPr>
-          <a:xfrm xmlns:a="http://schemas.openxmlformats.org/drawingml/2006/main">
-            <a:off x="666750" y="838200"/>
-            <a:ext cx="9144000" cy="323850"/>
+          <p:cNvPr id="2" name="">
+            <a:extLst xmlns:a="http://schemas.openxmlformats.org/drawingml/2006/main">
+              <a:ext uri="{FF2B5EF4-FFF2-40B4-BE49-F238E27FC236}">
+                <a16:creationId xmlns:a16="http://schemas.microsoft.com/office/drawing/2014/main" id="{15A2123E-1232-4034-B406-E4B49D80B66D}"/>
+              </a:ext>
+            </a:extLst>
+          </p:cNvPr>
+          <p:cNvSpPr>
+            <a:spLocks xmlns:a="http://schemas.openxmlformats.org/drawingml/2006/main" noGrp="1"/>
+          </p:cNvSpPr>
+          <p:nvPr/>
+        </p:nvSpPr>
+        <p:spPr>
+          <a:xfrm xmlns:a="http://schemas.openxmlformats.org/drawingml/2006/main">
+            <a:off x="666750" y="876300"/>
+            <a:ext cx="9810750" cy="285750"/>
           </a:xfrm>
           <a:prstGeom xmlns:a="http://schemas.openxmlformats.org/drawingml/2006/main" prst="rect">
             <a:avLst/>
@@ -4331,10 +4306,10 @@
       </p:sp>
       <p:sp>
         <p:nvSpPr>
-          <p:cNvPr id="3" name="slide-number">
-            <a:extLst xmlns:a="http://schemas.openxmlformats.org/drawingml/2006/main">
-              <a:ext uri="{FF2B5EF4-FFF2-40B4-BE49-F238E27FC236}">
-                <a16:creationId xmlns:a16="http://schemas.microsoft.com/office/drawing/2014/main" id="{2F55FBEC-D328-40C3-B3FD-F8E01422EB2F}"/>
+          <p:cNvPr id="3" name="">
+            <a:extLst xmlns:a="http://schemas.openxmlformats.org/drawingml/2006/main">
+              <a:ext uri="{FF2B5EF4-FFF2-40B4-BE49-F238E27FC236}">
+                <a16:creationId xmlns:a16="http://schemas.microsoft.com/office/drawing/2014/main" id="{18DD7EB2-7438-4A1D-84B0-4A5F57818B71}"/>
               </a:ext>
             </a:extLst>
           </p:cNvPr>
@@ -4388,7 +4363,7 @@
           <p:nvPr/>
         </p:nvPicPr>
         <p:blipFill>
-          <a:blip xmlns:r="http://schemas.openxmlformats.org/officeDocument/2006/relationships" xmlns:a="http://schemas.openxmlformats.org/drawingml/2006/main" r:embed="R62523c364d4e4c18"/>
+          <a:blip xmlns:r="http://schemas.openxmlformats.org/officeDocument/2006/relationships" xmlns:a="http://schemas.openxmlformats.org/drawingml/2006/main" r:embed="R8f1108f2d9c146be"/>
           <a:stretch xmlns:a="http://schemas.openxmlformats.org/drawingml/2006/main"/>
         </p:blipFill>
         <p:spPr>
@@ -4406,7 +4381,7 @@
           <p:cNvPr id="5" name="">
             <a:extLst xmlns:a="http://schemas.openxmlformats.org/drawingml/2006/main">
               <a:ext uri="{FF2B5EF4-FFF2-40B4-BE49-F238E27FC236}">
-                <a16:creationId xmlns:a16="http://schemas.microsoft.com/office/drawing/2014/main" id="{8C1432A4-65A8-4014-871F-E0A124607500}"/>
+                <a16:creationId xmlns:a16="http://schemas.microsoft.com/office/drawing/2014/main" id="{B2E6FC61-7E51-432E-8475-DD813AE226C8}"/>
               </a:ext>
             </a:extLst>
           </p:cNvPr>
@@ -4456,7 +4431,7 @@
           <p:cNvPr id="6" name="">
             <a:extLst xmlns:a="http://schemas.openxmlformats.org/drawingml/2006/main">
               <a:ext uri="{FF2B5EF4-FFF2-40B4-BE49-F238E27FC236}">
-                <a16:creationId xmlns:a16="http://schemas.microsoft.com/office/drawing/2014/main" id="{36CB39F2-89C2-4734-A787-6E6E84F52AED}"/>
+                <a16:creationId xmlns:a16="http://schemas.microsoft.com/office/drawing/2014/main" id="{75919E59-31B8-4199-92A5-8D9CB088D1F4}"/>
               </a:ext>
             </a:extLst>
           </p:cNvPr>
@@ -4504,7 +4479,7 @@
     </p:spTree>
     <p:extLst>
       <p:ext uri="{BB962C8B-B14F-4D97-AF65-F5344CB8AC3E}">
-        <p14:creationId xmlns:p14="http://schemas.microsoft.com/office/powerpoint/2010/main" val="896854736"/>
+        <p14:creationId xmlns:p14="http://schemas.microsoft.com/office/powerpoint/2010/main" val="1873745157"/>
       </p:ext>
     </p:extLst>
   </p:cSld>
@@ -4532,10 +4507,10 @@
       </p:grpSpPr>
       <p:sp>
         <p:nvSpPr>
-          <p:cNvPr id="6" name="slide-title">
-            <a:extLst xmlns:a="http://schemas.openxmlformats.org/drawingml/2006/main">
-              <a:ext uri="{FF2B5EF4-FFF2-40B4-BE49-F238E27FC236}">
-                <a16:creationId xmlns:a16="http://schemas.microsoft.com/office/drawing/2014/main" id="{CD489152-F0DC-4BA4-8E41-24E87E1F052D}"/>
+          <p:cNvPr id="17" name="">
+            <a:extLst xmlns:a="http://schemas.openxmlformats.org/drawingml/2006/main">
+              <a:ext uri="{FF2B5EF4-FFF2-40B4-BE49-F238E27FC236}">
+                <a16:creationId xmlns:a16="http://schemas.microsoft.com/office/drawing/2014/main" id="{B476057A-CF8F-4B58-A883-6F4CCDB90CDD}"/>
               </a:ext>
             </a:extLst>
           </p:cNvPr>
@@ -4547,7 +4522,7 @@
         <p:spPr>
           <a:xfrm xmlns:a="http://schemas.openxmlformats.org/drawingml/2006/main">
             <a:off x="666750" y="323850"/>
-            <a:ext cx="8763000" cy="552450"/>
+            <a:ext cx="9715500" cy="495300"/>
           </a:xfrm>
           <a:prstGeom xmlns:a="http://schemas.openxmlformats.org/drawingml/2006/main" prst="rect">
             <a:avLst/>
@@ -4582,22 +4557,22 @@
       </p:sp>
       <p:sp>
         <p:nvSpPr>
-          <p:cNvPr id="2" name="slide-subtitle">
-            <a:extLst xmlns:a="http://schemas.openxmlformats.org/drawingml/2006/main">
-              <a:ext uri="{FF2B5EF4-FFF2-40B4-BE49-F238E27FC236}">
-                <a16:creationId xmlns:a16="http://schemas.microsoft.com/office/drawing/2014/main" id="{090A84B6-C130-447B-947C-620932AB6CE0}"/>
-              </a:ext>
-            </a:extLst>
-          </p:cNvPr>
-          <p:cNvSpPr>
-            <a:spLocks xmlns:a="http://schemas.openxmlformats.org/drawingml/2006/main" noGrp="1"/>
-          </p:cNvSpPr>
-          <p:nvPr/>
-        </p:nvSpPr>
-        <p:spPr>
-          <a:xfrm xmlns:a="http://schemas.openxmlformats.org/drawingml/2006/main">
-            <a:off x="666750" y="838200"/>
-            <a:ext cx="9144000" cy="323850"/>
+          <p:cNvPr id="2" name="">
+            <a:extLst xmlns:a="http://schemas.openxmlformats.org/drawingml/2006/main">
+              <a:ext uri="{FF2B5EF4-FFF2-40B4-BE49-F238E27FC236}">
+                <a16:creationId xmlns:a16="http://schemas.microsoft.com/office/drawing/2014/main" id="{728FE4FF-A8DC-47DE-9D2C-252EDE4BB8BF}"/>
+              </a:ext>
+            </a:extLst>
+          </p:cNvPr>
+          <p:cNvSpPr>
+            <a:spLocks xmlns:a="http://schemas.openxmlformats.org/drawingml/2006/main" noGrp="1"/>
+          </p:cNvSpPr>
+          <p:nvPr/>
+        </p:nvSpPr>
+        <p:spPr>
+          <a:xfrm xmlns:a="http://schemas.openxmlformats.org/drawingml/2006/main">
+            <a:off x="666750" y="876300"/>
+            <a:ext cx="9810750" cy="285750"/>
           </a:xfrm>
           <a:prstGeom xmlns:a="http://schemas.openxmlformats.org/drawingml/2006/main" prst="rect">
             <a:avLst/>
@@ -4632,10 +4607,10 @@
       </p:sp>
       <p:sp>
         <p:nvSpPr>
-          <p:cNvPr id="3" name="slide-number">
-            <a:extLst xmlns:a="http://schemas.openxmlformats.org/drawingml/2006/main">
-              <a:ext uri="{FF2B5EF4-FFF2-40B4-BE49-F238E27FC236}">
-                <a16:creationId xmlns:a16="http://schemas.microsoft.com/office/drawing/2014/main" id="{3A7FBCB4-F5E9-49D4-9333-3B6687262798}"/>
+          <p:cNvPr id="3" name="">
+            <a:extLst xmlns:a="http://schemas.openxmlformats.org/drawingml/2006/main">
+              <a:ext uri="{FF2B5EF4-FFF2-40B4-BE49-F238E27FC236}">
+                <a16:creationId xmlns:a16="http://schemas.microsoft.com/office/drawing/2014/main" id="{84436EF5-1FBE-418D-8AF3-FEB25BB0D5A8}"/>
               </a:ext>
             </a:extLst>
           </p:cNvPr>
@@ -4680,46 +4655,609 @@
           </a:p>
         </p:txBody>
       </p:sp>
-      <p:pic>
-        <p:nvPicPr>
-          <p:cNvPr id="9" name=""/>
-          <p:cNvPicPr>
-            <a:picLocks xmlns:a="http://schemas.openxmlformats.org/drawingml/2006/main" noChangeAspect="1"/>
-          </p:cNvPicPr>
-          <p:nvPr/>
-        </p:nvPicPr>
-        <p:blipFill>
-          <a:blip xmlns:r="http://schemas.openxmlformats.org/officeDocument/2006/relationships" xmlns:a="http://schemas.openxmlformats.org/drawingml/2006/main" r:embed="Ref129e69d87245d7"/>
-          <a:stretch xmlns:a="http://schemas.openxmlformats.org/drawingml/2006/main"/>
-        </p:blipFill>
-        <p:spPr>
-          <a:xfrm xmlns:a="http://schemas.openxmlformats.org/drawingml/2006/main">
-            <a:off x="1826683" y="1238250"/>
-            <a:ext cx="8043333" cy="4524375"/>
-          </a:xfrm>
-          <a:prstGeom xmlns:a="http://schemas.openxmlformats.org/drawingml/2006/main" prst="rect">
-            <a:avLst/>
-          </a:prstGeom>
-        </p:spPr>
-      </p:pic>
+      <p:sp>
+        <p:nvSpPr>
+          <p:cNvPr id="4" name="">
+            <a:extLst xmlns:a="http://schemas.openxmlformats.org/drawingml/2006/main">
+              <a:ext uri="{FF2B5EF4-FFF2-40B4-BE49-F238E27FC236}">
+                <a16:creationId xmlns:a16="http://schemas.microsoft.com/office/drawing/2014/main" id="{6E29D979-03CD-4021-BC88-E92FE6B4D687}"/>
+              </a:ext>
+            </a:extLst>
+          </p:cNvPr>
+          <p:cNvSpPr>
+            <a:spLocks xmlns:a="http://schemas.openxmlformats.org/drawingml/2006/main" noGrp="1"/>
+          </p:cNvSpPr>
+          <p:nvPr/>
+        </p:nvSpPr>
+        <p:spPr>
+          <a:xfrm xmlns:a="http://schemas.openxmlformats.org/drawingml/2006/main">
+            <a:off x="1047750" y="1381125"/>
+            <a:ext cx="9620250" cy="4286250"/>
+          </a:xfrm>
+          <a:prstGeom xmlns:a="http://schemas.openxmlformats.org/drawingml/2006/main" prst="roundRect">
+            <a:avLst>
+              <a:gd name="adj" fmla="val 1778"/>
+            </a:avLst>
+          </a:prstGeom>
+          <a:solidFill xmlns:a="http://schemas.openxmlformats.org/drawingml/2006/main">
+            <a:srgbClr val="13263D"/>
+          </a:solidFill>
+          <a:ln xmlns:a="http://schemas.openxmlformats.org/drawingml/2006/main" w="11430">
+            <a:solidFill>
+              <a:srgbClr val="2A4663"/>
+            </a:solidFill>
+            <a:prstDash val="solid"/>
+          </a:ln>
+        </p:spPr>
+      </p:sp>
       <p:sp>
         <p:nvSpPr>
           <p:cNvPr id="5" name="">
             <a:extLst xmlns:a="http://schemas.openxmlformats.org/drawingml/2006/main">
               <a:ext uri="{FF2B5EF4-FFF2-40B4-BE49-F238E27FC236}">
-                <a16:creationId xmlns:a16="http://schemas.microsoft.com/office/drawing/2014/main" id="{473E502C-04AC-40E1-9A9A-C03FEB1EEF45}"/>
-              </a:ext>
-            </a:extLst>
-          </p:cNvPr>
-          <p:cNvSpPr>
-            <a:spLocks xmlns:a="http://schemas.openxmlformats.org/drawingml/2006/main" noGrp="1"/>
-          </p:cNvSpPr>
-          <p:nvPr/>
-        </p:nvSpPr>
-        <p:spPr>
-          <a:xfrm xmlns:a="http://schemas.openxmlformats.org/drawingml/2006/main">
-            <a:off x="8239125" y="5810250"/>
-            <a:ext cx="2952750" cy="304800"/>
+                <a16:creationId xmlns:a16="http://schemas.microsoft.com/office/drawing/2014/main" id="{86BACB27-4D25-498F-849E-A4177615E701}"/>
+              </a:ext>
+            </a:extLst>
+          </p:cNvPr>
+          <p:cNvSpPr>
+            <a:spLocks xmlns:a="http://schemas.openxmlformats.org/drawingml/2006/main" noGrp="1"/>
+          </p:cNvSpPr>
+          <p:nvPr/>
+        </p:nvSpPr>
+        <p:spPr>
+          <a:xfrm xmlns:a="http://schemas.openxmlformats.org/drawingml/2006/main">
+            <a:off x="1476375" y="1695450"/>
+            <a:ext cx="4000500" cy="304800"/>
+          </a:xfrm>
+          <a:prstGeom xmlns:a="http://schemas.openxmlformats.org/drawingml/2006/main" prst="rect">
+            <a:avLst/>
+          </a:prstGeom>
+          <a:noFill xmlns:a="http://schemas.openxmlformats.org/drawingml/2006/main"/>
+          <a:ln xmlns:a="http://schemas.openxmlformats.org/drawingml/2006/main" w="0">
+            <a:noFill/>
+            <a:prstDash val="solid"/>
+          </a:ln>
+        </p:spPr>
+        <p:txBody>
+          <a:bodyPr xmlns:a="http://schemas.openxmlformats.org/drawingml/2006/main"/>
+          <a:lstStyle xmlns:a="http://schemas.openxmlformats.org/drawingml/2006/main"/>
+          <a:p xmlns:a="http://schemas.openxmlformats.org/drawingml/2006/main">
+            <a:pPr>
+              <a:defRPr sz="2250" b="1">
+                <a:solidFill>
+                  <a:srgbClr val="F4F8FB"/>
+                </a:solidFill>
+              </a:defRPr>
+            </a:pPr>
+            <a:r>
+              <a:rPr sz="2250" b="1">
+                <a:solidFill>
+                  <a:srgbClr val="F4F8FB"/>
+                </a:solidFill>
+              </a:rPr>
+              <a:t>Adaptive route matrix</a:t>
+            </a:r>
+          </a:p>
+        </p:txBody>
+      </p:sp>
+      <p:sp>
+        <p:nvSpPr>
+          <p:cNvPr id="6" name="">
+            <a:extLst xmlns:a="http://schemas.openxmlformats.org/drawingml/2006/main">
+              <a:ext uri="{FF2B5EF4-FFF2-40B4-BE49-F238E27FC236}">
+                <a16:creationId xmlns:a16="http://schemas.microsoft.com/office/drawing/2014/main" id="{F7171ECE-85C4-4670-9ED3-695654573CF2}"/>
+              </a:ext>
+            </a:extLst>
+          </p:cNvPr>
+          <p:cNvSpPr>
+            <a:spLocks xmlns:a="http://schemas.openxmlformats.org/drawingml/2006/main" noGrp="1"/>
+          </p:cNvSpPr>
+          <p:nvPr/>
+        </p:nvSpPr>
+        <p:spPr>
+          <a:xfrm xmlns:a="http://schemas.openxmlformats.org/drawingml/2006/main">
+            <a:off x="1476375" y="2381250"/>
+            <a:ext cx="1143000" cy="247650"/>
+          </a:xfrm>
+          <a:prstGeom xmlns:a="http://schemas.openxmlformats.org/drawingml/2006/main" prst="rect">
+            <a:avLst/>
+          </a:prstGeom>
+          <a:noFill xmlns:a="http://schemas.openxmlformats.org/drawingml/2006/main"/>
+          <a:ln xmlns:a="http://schemas.openxmlformats.org/drawingml/2006/main" w="0">
+            <a:noFill/>
+            <a:prstDash val="solid"/>
+          </a:ln>
+        </p:spPr>
+        <p:txBody>
+          <a:bodyPr xmlns:a="http://schemas.openxmlformats.org/drawingml/2006/main"/>
+          <a:lstStyle xmlns:a="http://schemas.openxmlformats.org/drawingml/2006/main"/>
+          <a:p xmlns:a="http://schemas.openxmlformats.org/drawingml/2006/main">
+            <a:pPr>
+              <a:defRPr sz="1575" b="1">
+                <a:solidFill>
+                  <a:srgbClr val="A9BACB"/>
+                </a:solidFill>
+              </a:defRPr>
+            </a:pPr>
+            <a:r>
+              <a:rPr sz="1575" b="1">
+                <a:solidFill>
+                  <a:srgbClr val="A9BACB"/>
+                </a:solidFill>
+              </a:rPr>
+              <a:t>LOW</a:t>
+            </a:r>
+          </a:p>
+        </p:txBody>
+      </p:sp>
+      <p:sp>
+        <p:nvSpPr>
+          <p:cNvPr id="7" name="">
+            <a:extLst xmlns:a="http://schemas.openxmlformats.org/drawingml/2006/main">
+              <a:ext uri="{FF2B5EF4-FFF2-40B4-BE49-F238E27FC236}">
+                <a16:creationId xmlns:a16="http://schemas.microsoft.com/office/drawing/2014/main" id="{5A4D92AE-554F-47BE-BFE6-875B8BAB3FA7}"/>
+              </a:ext>
+            </a:extLst>
+          </p:cNvPr>
+          <p:cNvSpPr>
+            <a:spLocks xmlns:a="http://schemas.openxmlformats.org/drawingml/2006/main" noGrp="1"/>
+          </p:cNvSpPr>
+          <p:nvPr/>
+        </p:nvSpPr>
+        <p:spPr>
+          <a:xfrm xmlns:a="http://schemas.openxmlformats.org/drawingml/2006/main">
+            <a:off x="4191000" y="2381250"/>
+            <a:ext cx="5524500" cy="247650"/>
+          </a:xfrm>
+          <a:prstGeom xmlns:a="http://schemas.openxmlformats.org/drawingml/2006/main" prst="rect">
+            <a:avLst/>
+          </a:prstGeom>
+          <a:noFill xmlns:a="http://schemas.openxmlformats.org/drawingml/2006/main"/>
+          <a:ln xmlns:a="http://schemas.openxmlformats.org/drawingml/2006/main" w="0">
+            <a:noFill/>
+            <a:prstDash val="solid"/>
+          </a:ln>
+        </p:spPr>
+        <p:txBody>
+          <a:bodyPr xmlns:a="http://schemas.openxmlformats.org/drawingml/2006/main"/>
+          <a:lstStyle xmlns:a="http://schemas.openxmlformats.org/drawingml/2006/main"/>
+          <a:p xmlns:a="http://schemas.openxmlformats.org/drawingml/2006/main">
+            <a:pPr>
+              <a:defRPr sz="1725" b="1">
+                <a:solidFill>
+                  <a:srgbClr val="7BD88F"/>
+                </a:solidFill>
+              </a:defRPr>
+            </a:pPr>
+            <a:r>
+              <a:rPr sz="1725" b="1">
+                <a:solidFill>
+                  <a:srgbClr val="7BD88F"/>
+                </a:solidFill>
+              </a:rPr>
+              <a:t>Implementer -&gt; Reviewer -&gt; deterministic gates</a:t>
+            </a:r>
+          </a:p>
+        </p:txBody>
+      </p:sp>
+      <p:sp>
+        <p:nvSpPr>
+          <p:cNvPr id="8" name="">
+            <a:extLst xmlns:a="http://schemas.openxmlformats.org/drawingml/2006/main">
+              <a:ext uri="{FF2B5EF4-FFF2-40B4-BE49-F238E27FC236}">
+                <a16:creationId xmlns:a16="http://schemas.microsoft.com/office/drawing/2014/main" id="{A2D974D4-4C0F-4EF2-B7CB-4407186B2731}"/>
+              </a:ext>
+            </a:extLst>
+          </p:cNvPr>
+          <p:cNvSpPr>
+            <a:spLocks xmlns:a="http://schemas.openxmlformats.org/drawingml/2006/main" noGrp="1"/>
+          </p:cNvSpPr>
+          <p:nvPr/>
+        </p:nvSpPr>
+        <p:spPr>
+          <a:xfrm xmlns:a="http://schemas.openxmlformats.org/drawingml/2006/main">
+            <a:off x="1476375" y="3190875"/>
+            <a:ext cx="1238250" cy="247650"/>
+          </a:xfrm>
+          <a:prstGeom xmlns:a="http://schemas.openxmlformats.org/drawingml/2006/main" prst="rect">
+            <a:avLst/>
+          </a:prstGeom>
+          <a:noFill xmlns:a="http://schemas.openxmlformats.org/drawingml/2006/main"/>
+          <a:ln xmlns:a="http://schemas.openxmlformats.org/drawingml/2006/main" w="0">
+            <a:noFill/>
+            <a:prstDash val="solid"/>
+          </a:ln>
+        </p:spPr>
+        <p:txBody>
+          <a:bodyPr xmlns:a="http://schemas.openxmlformats.org/drawingml/2006/main"/>
+          <a:lstStyle xmlns:a="http://schemas.openxmlformats.org/drawingml/2006/main"/>
+          <a:p xmlns:a="http://schemas.openxmlformats.org/drawingml/2006/main">
+            <a:pPr>
+              <a:defRPr sz="1575" b="1">
+                <a:solidFill>
+                  <a:srgbClr val="A9BACB"/>
+                </a:solidFill>
+              </a:defRPr>
+            </a:pPr>
+            <a:r>
+              <a:rPr sz="1575" b="1">
+                <a:solidFill>
+                  <a:srgbClr val="A9BACB"/>
+                </a:solidFill>
+              </a:rPr>
+              <a:t>MEDIUM</a:t>
+            </a:r>
+          </a:p>
+        </p:txBody>
+      </p:sp>
+      <p:sp>
+        <p:nvSpPr>
+          <p:cNvPr id="9" name="">
+            <a:extLst xmlns:a="http://schemas.openxmlformats.org/drawingml/2006/main">
+              <a:ext uri="{FF2B5EF4-FFF2-40B4-BE49-F238E27FC236}">
+                <a16:creationId xmlns:a16="http://schemas.microsoft.com/office/drawing/2014/main" id="{1665C50F-4023-4F27-9430-87A2FDAE658D}"/>
+              </a:ext>
+            </a:extLst>
+          </p:cNvPr>
+          <p:cNvSpPr>
+            <a:spLocks xmlns:a="http://schemas.openxmlformats.org/drawingml/2006/main" noGrp="1"/>
+          </p:cNvSpPr>
+          <p:nvPr/>
+        </p:nvSpPr>
+        <p:spPr>
+          <a:xfrm xmlns:a="http://schemas.openxmlformats.org/drawingml/2006/main">
+            <a:off x="4191000" y="3190875"/>
+            <a:ext cx="6000750" cy="247650"/>
+          </a:xfrm>
+          <a:prstGeom xmlns:a="http://schemas.openxmlformats.org/drawingml/2006/main" prst="rect">
+            <a:avLst/>
+          </a:prstGeom>
+          <a:noFill xmlns:a="http://schemas.openxmlformats.org/drawingml/2006/main"/>
+          <a:ln xmlns:a="http://schemas.openxmlformats.org/drawingml/2006/main" w="0">
+            <a:noFill/>
+            <a:prstDash val="solid"/>
+          </a:ln>
+        </p:spPr>
+        <p:txBody>
+          <a:bodyPr xmlns:a="http://schemas.openxmlformats.org/drawingml/2006/main"/>
+          <a:lstStyle xmlns:a="http://schemas.openxmlformats.org/drawingml/2006/main"/>
+          <a:p xmlns:a="http://schemas.openxmlformats.org/drawingml/2006/main">
+            <a:pPr>
+              <a:defRPr sz="1725" b="1">
+                <a:solidFill>
+                  <a:srgbClr val="4CC9F0"/>
+                </a:solidFill>
+              </a:defRPr>
+            </a:pPr>
+            <a:r>
+              <a:rPr sz="1725" b="1">
+                <a:solidFill>
+                  <a:srgbClr val="4CC9F0"/>
+                </a:solidFill>
+              </a:rPr>
+              <a:t>Implementer -&gt; Reviewer -&gt; Tester -&gt; final approval</a:t>
+            </a:r>
+          </a:p>
+        </p:txBody>
+      </p:sp>
+      <p:sp>
+        <p:nvSpPr>
+          <p:cNvPr id="10" name="">
+            <a:extLst xmlns:a="http://schemas.openxmlformats.org/drawingml/2006/main">
+              <a:ext uri="{FF2B5EF4-FFF2-40B4-BE49-F238E27FC236}">
+                <a16:creationId xmlns:a16="http://schemas.microsoft.com/office/drawing/2014/main" id="{55A71A63-FDA5-4001-BA91-918D2445101C}"/>
+              </a:ext>
+            </a:extLst>
+          </p:cNvPr>
+          <p:cNvSpPr>
+            <a:spLocks xmlns:a="http://schemas.openxmlformats.org/drawingml/2006/main" noGrp="1"/>
+          </p:cNvSpPr>
+          <p:nvPr/>
+        </p:nvSpPr>
+        <p:spPr>
+          <a:xfrm xmlns:a="http://schemas.openxmlformats.org/drawingml/2006/main">
+            <a:off x="1476375" y="3857625"/>
+            <a:ext cx="1143000" cy="247650"/>
+          </a:xfrm>
+          <a:prstGeom xmlns:a="http://schemas.openxmlformats.org/drawingml/2006/main" prst="rect">
+            <a:avLst/>
+          </a:prstGeom>
+          <a:noFill xmlns:a="http://schemas.openxmlformats.org/drawingml/2006/main"/>
+          <a:ln xmlns:a="http://schemas.openxmlformats.org/drawingml/2006/main" w="0">
+            <a:noFill/>
+            <a:prstDash val="solid"/>
+          </a:ln>
+        </p:spPr>
+        <p:txBody>
+          <a:bodyPr xmlns:a="http://schemas.openxmlformats.org/drawingml/2006/main"/>
+          <a:lstStyle xmlns:a="http://schemas.openxmlformats.org/drawingml/2006/main"/>
+          <a:p xmlns:a="http://schemas.openxmlformats.org/drawingml/2006/main">
+            <a:pPr>
+              <a:defRPr sz="1575" b="1">
+                <a:solidFill>
+                  <a:srgbClr val="A9BACB"/>
+                </a:solidFill>
+              </a:defRPr>
+            </a:pPr>
+            <a:r>
+              <a:rPr sz="1575" b="1">
+                <a:solidFill>
+                  <a:srgbClr val="A9BACB"/>
+                </a:solidFill>
+              </a:rPr>
+              <a:t>HIGH</a:t>
+            </a:r>
+          </a:p>
+        </p:txBody>
+      </p:sp>
+      <p:sp>
+        <p:nvSpPr>
+          <p:cNvPr id="11" name="">
+            <a:extLst xmlns:a="http://schemas.openxmlformats.org/drawingml/2006/main">
+              <a:ext uri="{FF2B5EF4-FFF2-40B4-BE49-F238E27FC236}">
+                <a16:creationId xmlns:a16="http://schemas.microsoft.com/office/drawing/2014/main" id="{EFA497F0-99FC-4AAB-A269-88552DEA7E99}"/>
+              </a:ext>
+            </a:extLst>
+          </p:cNvPr>
+          <p:cNvSpPr>
+            <a:spLocks xmlns:a="http://schemas.openxmlformats.org/drawingml/2006/main" noGrp="1"/>
+          </p:cNvSpPr>
+          <p:nvPr/>
+        </p:nvSpPr>
+        <p:spPr>
+          <a:xfrm xmlns:a="http://schemas.openxmlformats.org/drawingml/2006/main">
+            <a:off x="4191000" y="3857625"/>
+            <a:ext cx="5905500" cy="247650"/>
+          </a:xfrm>
+          <a:prstGeom xmlns:a="http://schemas.openxmlformats.org/drawingml/2006/main" prst="rect">
+            <a:avLst/>
+          </a:prstGeom>
+          <a:noFill xmlns:a="http://schemas.openxmlformats.org/drawingml/2006/main"/>
+          <a:ln xmlns:a="http://schemas.openxmlformats.org/drawingml/2006/main" w="0">
+            <a:noFill/>
+            <a:prstDash val="solid"/>
+          </a:ln>
+        </p:spPr>
+        <p:txBody>
+          <a:bodyPr xmlns:a="http://schemas.openxmlformats.org/drawingml/2006/main"/>
+          <a:lstStyle xmlns:a="http://schemas.openxmlformats.org/drawingml/2006/main"/>
+          <a:p xmlns:a="http://schemas.openxmlformats.org/drawingml/2006/main">
+            <a:pPr>
+              <a:defRPr sz="1500" b="1">
+                <a:solidFill>
+                  <a:srgbClr val="F6C85F"/>
+                </a:solidFill>
+              </a:defRPr>
+            </a:pPr>
+            <a:r>
+              <a:rPr sz="1500" b="1">
+                <a:solidFill>
+                  <a:srgbClr val="F6C85F"/>
+                </a:solidFill>
+              </a:rPr>
+              <a:t>Planner -&gt; plan approval -&gt; Implementer</a:t>
+            </a:r>
+          </a:p>
+        </p:txBody>
+      </p:sp>
+      <p:sp>
+        <p:nvSpPr>
+          <p:cNvPr id="12" name="">
+            <a:extLst xmlns:a="http://schemas.openxmlformats.org/drawingml/2006/main">
+              <a:ext uri="{FF2B5EF4-FFF2-40B4-BE49-F238E27FC236}">
+                <a16:creationId xmlns:a16="http://schemas.microsoft.com/office/drawing/2014/main" id="{FFC98AF7-917C-45E9-A630-EA2278010FB3}"/>
+              </a:ext>
+            </a:extLst>
+          </p:cNvPr>
+          <p:cNvSpPr>
+            <a:spLocks xmlns:a="http://schemas.openxmlformats.org/drawingml/2006/main" noGrp="1"/>
+          </p:cNvSpPr>
+          <p:nvPr/>
+        </p:nvSpPr>
+        <p:spPr>
+          <a:xfrm xmlns:a="http://schemas.openxmlformats.org/drawingml/2006/main">
+            <a:off x="4191000" y="4181475"/>
+            <a:ext cx="5905500" cy="247650"/>
+          </a:xfrm>
+          <a:prstGeom xmlns:a="http://schemas.openxmlformats.org/drawingml/2006/main" prst="rect">
+            <a:avLst/>
+          </a:prstGeom>
+          <a:noFill xmlns:a="http://schemas.openxmlformats.org/drawingml/2006/main"/>
+          <a:ln xmlns:a="http://schemas.openxmlformats.org/drawingml/2006/main" w="0">
+            <a:noFill/>
+            <a:prstDash val="solid"/>
+          </a:ln>
+        </p:spPr>
+        <p:txBody>
+          <a:bodyPr xmlns:a="http://schemas.openxmlformats.org/drawingml/2006/main"/>
+          <a:lstStyle xmlns:a="http://schemas.openxmlformats.org/drawingml/2006/main"/>
+          <a:p xmlns:a="http://schemas.openxmlformats.org/drawingml/2006/main">
+            <a:pPr>
+              <a:defRPr sz="1500" b="1">
+                <a:solidFill>
+                  <a:srgbClr val="F6C85F"/>
+                </a:solidFill>
+              </a:defRPr>
+            </a:pPr>
+            <a:r>
+              <a:rPr sz="1500" b="1">
+                <a:solidFill>
+                  <a:srgbClr val="F6C85F"/>
+                </a:solidFill>
+              </a:rPr>
+              <a:t>-&gt; Reviewer -&gt; Tester -&gt; policy/eval gates</a:t>
+            </a:r>
+          </a:p>
+        </p:txBody>
+      </p:sp>
+      <p:sp>
+        <p:nvSpPr>
+          <p:cNvPr id="13" name="">
+            <a:extLst xmlns:a="http://schemas.openxmlformats.org/drawingml/2006/main">
+              <a:ext uri="{FF2B5EF4-FFF2-40B4-BE49-F238E27FC236}">
+                <a16:creationId xmlns:a16="http://schemas.microsoft.com/office/drawing/2014/main" id="{5FC99135-5D39-4247-912E-98BCE3CC4D98}"/>
+              </a:ext>
+            </a:extLst>
+          </p:cNvPr>
+          <p:cNvSpPr>
+            <a:spLocks xmlns:a="http://schemas.openxmlformats.org/drawingml/2006/main" noGrp="1"/>
+          </p:cNvSpPr>
+          <p:nvPr/>
+        </p:nvSpPr>
+        <p:spPr>
+          <a:xfrm xmlns:a="http://schemas.openxmlformats.org/drawingml/2006/main">
+            <a:off x="4191000" y="4505325"/>
+            <a:ext cx="4762500" cy="247650"/>
+          </a:xfrm>
+          <a:prstGeom xmlns:a="http://schemas.openxmlformats.org/drawingml/2006/main" prst="rect">
+            <a:avLst/>
+          </a:prstGeom>
+          <a:noFill xmlns:a="http://schemas.openxmlformats.org/drawingml/2006/main"/>
+          <a:ln xmlns:a="http://schemas.openxmlformats.org/drawingml/2006/main" w="0">
+            <a:noFill/>
+            <a:prstDash val="solid"/>
+          </a:ln>
+        </p:spPr>
+        <p:txBody>
+          <a:bodyPr xmlns:a="http://schemas.openxmlformats.org/drawingml/2006/main"/>
+          <a:lstStyle xmlns:a="http://schemas.openxmlformats.org/drawingml/2006/main"/>
+          <a:p xmlns:a="http://schemas.openxmlformats.org/drawingml/2006/main">
+            <a:pPr>
+              <a:defRPr sz="1500" b="1">
+                <a:solidFill>
+                  <a:srgbClr val="F6C85F"/>
+                </a:solidFill>
+              </a:defRPr>
+            </a:pPr>
+            <a:r>
+              <a:rPr sz="1500" b="1">
+                <a:solidFill>
+                  <a:srgbClr val="F6C85F"/>
+                </a:solidFill>
+              </a:rPr>
+              <a:t>-&gt; final approval -&gt; PM</a:t>
+            </a:r>
+          </a:p>
+        </p:txBody>
+      </p:sp>
+      <p:sp>
+        <p:nvSpPr>
+          <p:cNvPr id="14" name="">
+            <a:extLst xmlns:a="http://schemas.openxmlformats.org/drawingml/2006/main">
+              <a:ext uri="{FF2B5EF4-FFF2-40B4-BE49-F238E27FC236}">
+                <a16:creationId xmlns:a16="http://schemas.microsoft.com/office/drawing/2014/main" id="{62D9FFA3-3A2F-473B-A1D5-BC804970382A}"/>
+              </a:ext>
+            </a:extLst>
+          </p:cNvPr>
+          <p:cNvSpPr>
+            <a:spLocks xmlns:a="http://schemas.openxmlformats.org/drawingml/2006/main" noGrp="1"/>
+          </p:cNvSpPr>
+          <p:nvPr/>
+        </p:nvSpPr>
+        <p:spPr>
+          <a:xfrm xmlns:a="http://schemas.openxmlformats.org/drawingml/2006/main">
+            <a:off x="1476375" y="5095875"/>
+            <a:ext cx="2476500" cy="247650"/>
+          </a:xfrm>
+          <a:prstGeom xmlns:a="http://schemas.openxmlformats.org/drawingml/2006/main" prst="rect">
+            <a:avLst/>
+          </a:prstGeom>
+          <a:noFill xmlns:a="http://schemas.openxmlformats.org/drawingml/2006/main"/>
+          <a:ln xmlns:a="http://schemas.openxmlformats.org/drawingml/2006/main" w="0">
+            <a:noFill/>
+            <a:prstDash val="solid"/>
+          </a:ln>
+        </p:spPr>
+        <p:txBody>
+          <a:bodyPr xmlns:a="http://schemas.openxmlformats.org/drawingml/2006/main"/>
+          <a:lstStyle xmlns:a="http://schemas.openxmlformats.org/drawingml/2006/main"/>
+          <a:p xmlns:a="http://schemas.openxmlformats.org/drawingml/2006/main">
+            <a:pPr>
+              <a:defRPr sz="1575" b="1">
+                <a:solidFill>
+                  <a:srgbClr val="A9BACB"/>
+                </a:solidFill>
+              </a:defRPr>
+            </a:pPr>
+            <a:r>
+              <a:rPr sz="1575" b="1">
+                <a:solidFill>
+                  <a:srgbClr val="A9BACB"/>
+                </a:solidFill>
+              </a:rPr>
+              <a:t>Human checkpoints</a:t>
+            </a:r>
+          </a:p>
+        </p:txBody>
+      </p:sp>
+      <p:sp>
+        <p:nvSpPr>
+          <p:cNvPr id="15" name="">
+            <a:extLst xmlns:a="http://schemas.openxmlformats.org/drawingml/2006/main">
+              <a:ext uri="{FF2B5EF4-FFF2-40B4-BE49-F238E27FC236}">
+                <a16:creationId xmlns:a16="http://schemas.microsoft.com/office/drawing/2014/main" id="{1DE3EE03-CFA3-4BED-B16D-F9DCCFADF07B}"/>
+              </a:ext>
+            </a:extLst>
+          </p:cNvPr>
+          <p:cNvSpPr>
+            <a:spLocks xmlns:a="http://schemas.openxmlformats.org/drawingml/2006/main" noGrp="1"/>
+          </p:cNvSpPr>
+          <p:nvPr/>
+        </p:nvSpPr>
+        <p:spPr>
+          <a:xfrm xmlns:a="http://schemas.openxmlformats.org/drawingml/2006/main">
+            <a:off x="4191000" y="5095875"/>
+            <a:ext cx="4953000" cy="247650"/>
+          </a:xfrm>
+          <a:prstGeom xmlns:a="http://schemas.openxmlformats.org/drawingml/2006/main" prst="rect">
+            <a:avLst/>
+          </a:prstGeom>
+          <a:noFill xmlns:a="http://schemas.openxmlformats.org/drawingml/2006/main"/>
+          <a:ln xmlns:a="http://schemas.openxmlformats.org/drawingml/2006/main" w="0">
+            <a:noFill/>
+            <a:prstDash val="solid"/>
+          </a:ln>
+        </p:spPr>
+        <p:txBody>
+          <a:bodyPr xmlns:a="http://schemas.openxmlformats.org/drawingml/2006/main"/>
+          <a:lstStyle xmlns:a="http://schemas.openxmlformats.org/drawingml/2006/main"/>
+          <a:p xmlns:a="http://schemas.openxmlformats.org/drawingml/2006/main">
+            <a:pPr>
+              <a:defRPr sz="1725" b="1">
+                <a:solidFill>
+                  <a:srgbClr val="F4F8FB"/>
+                </a:solidFill>
+              </a:defRPr>
+            </a:pPr>
+            <a:r>
+              <a:rPr sz="1725" b="1">
+                <a:solidFill>
+                  <a:srgbClr val="F4F8FB"/>
+                </a:solidFill>
+              </a:rPr>
+              <a:t>LOW 0     MEDIUM 1     HIGH 2</a:t>
+            </a:r>
+          </a:p>
+        </p:txBody>
+      </p:sp>
+      <p:sp>
+        <p:nvSpPr>
+          <p:cNvPr id="16" name="">
+            <a:extLst xmlns:a="http://schemas.openxmlformats.org/drawingml/2006/main">
+              <a:ext uri="{FF2B5EF4-FFF2-40B4-BE49-F238E27FC236}">
+                <a16:creationId xmlns:a16="http://schemas.microsoft.com/office/drawing/2014/main" id="{163ED79D-0559-4F6A-8701-4BAD7B20E25F}"/>
+              </a:ext>
+            </a:extLst>
+          </p:cNvPr>
+          <p:cNvSpPr>
+            <a:spLocks xmlns:a="http://schemas.openxmlformats.org/drawingml/2006/main" noGrp="1"/>
+          </p:cNvSpPr>
+          <p:nvPr/>
+        </p:nvSpPr>
+        <p:spPr>
+          <a:xfrm xmlns:a="http://schemas.openxmlformats.org/drawingml/2006/main">
+            <a:off x="8096250" y="5810250"/>
+            <a:ext cx="3143250" cy="428625"/>
           </a:xfrm>
           <a:prstGeom xmlns:a="http://schemas.openxmlformats.org/drawingml/2006/main" prst="rect">
             <a:avLst/>
@@ -4755,7 +5293,7 @@
     </p:spTree>
     <p:extLst>
       <p:ext uri="{BB962C8B-B14F-4D97-AF65-F5344CB8AC3E}">
-        <p14:creationId xmlns:p14="http://schemas.microsoft.com/office/powerpoint/2010/main" val="1881408934"/>
+        <p14:creationId xmlns:p14="http://schemas.microsoft.com/office/powerpoint/2010/main" val="1040423757"/>
       </p:ext>
     </p:extLst>
   </p:cSld>
@@ -4783,10 +5321,10 @@
       </p:grpSpPr>
       <p:sp>
         <p:nvSpPr>
-          <p:cNvPr id="15" name="slide-title">
-            <a:extLst xmlns:a="http://schemas.openxmlformats.org/drawingml/2006/main">
-              <a:ext uri="{FF2B5EF4-FFF2-40B4-BE49-F238E27FC236}">
-                <a16:creationId xmlns:a16="http://schemas.microsoft.com/office/drawing/2014/main" id="{D26F29C5-960F-4888-8553-31B2D9C0DD47}"/>
+          <p:cNvPr id="15" name="">
+            <a:extLst xmlns:a="http://schemas.openxmlformats.org/drawingml/2006/main">
+              <a:ext uri="{FF2B5EF4-FFF2-40B4-BE49-F238E27FC236}">
+                <a16:creationId xmlns:a16="http://schemas.microsoft.com/office/drawing/2014/main" id="{47DFFE62-C369-4A07-805E-276E5AD6CCB8}"/>
               </a:ext>
             </a:extLst>
           </p:cNvPr>
@@ -4798,7 +5336,7 @@
         <p:spPr>
           <a:xfrm xmlns:a="http://schemas.openxmlformats.org/drawingml/2006/main">
             <a:off x="666750" y="323850"/>
-            <a:ext cx="8763000" cy="552450"/>
+            <a:ext cx="9715500" cy="495300"/>
           </a:xfrm>
           <a:prstGeom xmlns:a="http://schemas.openxmlformats.org/drawingml/2006/main" prst="rect">
             <a:avLst/>
@@ -4833,22 +5371,22 @@
       </p:sp>
       <p:sp>
         <p:nvSpPr>
-          <p:cNvPr id="2" name="slide-subtitle">
-            <a:extLst xmlns:a="http://schemas.openxmlformats.org/drawingml/2006/main">
-              <a:ext uri="{FF2B5EF4-FFF2-40B4-BE49-F238E27FC236}">
-                <a16:creationId xmlns:a16="http://schemas.microsoft.com/office/drawing/2014/main" id="{5A6EF4F6-CD7D-4287-BC09-E4D39BB93BEC}"/>
-              </a:ext>
-            </a:extLst>
-          </p:cNvPr>
-          <p:cNvSpPr>
-            <a:spLocks xmlns:a="http://schemas.openxmlformats.org/drawingml/2006/main" noGrp="1"/>
-          </p:cNvSpPr>
-          <p:nvPr/>
-        </p:nvSpPr>
-        <p:spPr>
-          <a:xfrm xmlns:a="http://schemas.openxmlformats.org/drawingml/2006/main">
-            <a:off x="666750" y="838200"/>
-            <a:ext cx="9144000" cy="323850"/>
+          <p:cNvPr id="2" name="">
+            <a:extLst xmlns:a="http://schemas.openxmlformats.org/drawingml/2006/main">
+              <a:ext uri="{FF2B5EF4-FFF2-40B4-BE49-F238E27FC236}">
+                <a16:creationId xmlns:a16="http://schemas.microsoft.com/office/drawing/2014/main" id="{D3393F17-27C9-4C2C-B53F-A00A6A176F25}"/>
+              </a:ext>
+            </a:extLst>
+          </p:cNvPr>
+          <p:cNvSpPr>
+            <a:spLocks xmlns:a="http://schemas.openxmlformats.org/drawingml/2006/main" noGrp="1"/>
+          </p:cNvSpPr>
+          <p:nvPr/>
+        </p:nvSpPr>
+        <p:spPr>
+          <a:xfrm xmlns:a="http://schemas.openxmlformats.org/drawingml/2006/main">
+            <a:off x="666750" y="876300"/>
+            <a:ext cx="9810750" cy="285750"/>
           </a:xfrm>
           <a:prstGeom xmlns:a="http://schemas.openxmlformats.org/drawingml/2006/main" prst="rect">
             <a:avLst/>
@@ -4883,10 +5421,10 @@
       </p:sp>
       <p:sp>
         <p:nvSpPr>
-          <p:cNvPr id="3" name="slide-number">
-            <a:extLst xmlns:a="http://schemas.openxmlformats.org/drawingml/2006/main">
-              <a:ext uri="{FF2B5EF4-FFF2-40B4-BE49-F238E27FC236}">
-                <a16:creationId xmlns:a16="http://schemas.microsoft.com/office/drawing/2014/main" id="{74EB770C-9553-4D2D-921B-06DFABF7D904}"/>
+          <p:cNvPr id="3" name="">
+            <a:extLst xmlns:a="http://schemas.openxmlformats.org/drawingml/2006/main">
+              <a:ext uri="{FF2B5EF4-FFF2-40B4-BE49-F238E27FC236}">
+                <a16:creationId xmlns:a16="http://schemas.microsoft.com/office/drawing/2014/main" id="{9041C1D1-2DBA-499A-A80D-130C7BF0B473}"/>
               </a:ext>
             </a:extLst>
           </p:cNvPr>
@@ -4936,23 +5474,23 @@
           <p:cNvPr id="4" name="">
             <a:extLst xmlns:a="http://schemas.openxmlformats.org/drawingml/2006/main">
               <a:ext uri="{FF2B5EF4-FFF2-40B4-BE49-F238E27FC236}">
-                <a16:creationId xmlns:a16="http://schemas.microsoft.com/office/drawing/2014/main" id="{4568C6DF-CDA4-4E15-A831-B8A3B993A118}"/>
-              </a:ext>
-            </a:extLst>
-          </p:cNvPr>
-          <p:cNvSpPr>
-            <a:spLocks xmlns:a="http://schemas.openxmlformats.org/drawingml/2006/main" noGrp="1"/>
-          </p:cNvSpPr>
-          <p:nvPr/>
-        </p:nvSpPr>
-        <p:spPr>
-          <a:xfrm xmlns:a="http://schemas.openxmlformats.org/drawingml/2006/main">
-            <a:off x="1143000" y="1952625"/>
-            <a:ext cx="2857500" cy="1857375"/>
+                <a16:creationId xmlns:a16="http://schemas.microsoft.com/office/drawing/2014/main" id="{37B32280-AD13-48E4-821D-C15A1FE54AC5}"/>
+              </a:ext>
+            </a:extLst>
+          </p:cNvPr>
+          <p:cNvSpPr>
+            <a:spLocks xmlns:a="http://schemas.openxmlformats.org/drawingml/2006/main" noGrp="1"/>
+          </p:cNvSpPr>
+          <p:nvPr/>
+        </p:nvSpPr>
+        <p:spPr>
+          <a:xfrm xmlns:a="http://schemas.openxmlformats.org/drawingml/2006/main">
+            <a:off x="990600" y="1809750"/>
+            <a:ext cx="2952750" cy="2047875"/>
           </a:xfrm>
           <a:prstGeom xmlns:a="http://schemas.openxmlformats.org/drawingml/2006/main" prst="roundRect">
             <a:avLst>
-              <a:gd name="adj" fmla="val 4103"/>
+              <a:gd name="adj" fmla="val 3721"/>
             </a:avLst>
           </a:prstGeom>
           <a:solidFill xmlns:a="http://schemas.openxmlformats.org/drawingml/2006/main">
@@ -4971,42 +5509,42 @@
           <p:cNvPr id="5" name="">
             <a:extLst xmlns:a="http://schemas.openxmlformats.org/drawingml/2006/main">
               <a:ext uri="{FF2B5EF4-FFF2-40B4-BE49-F238E27FC236}">
-                <a16:creationId xmlns:a16="http://schemas.microsoft.com/office/drawing/2014/main" id="{9A09D294-1B34-4413-AB56-37F47C9FA422}"/>
-              </a:ext>
-            </a:extLst>
-          </p:cNvPr>
-          <p:cNvSpPr>
-            <a:spLocks xmlns:a="http://schemas.openxmlformats.org/drawingml/2006/main" noGrp="1"/>
-          </p:cNvSpPr>
-          <p:nvPr/>
-        </p:nvSpPr>
-        <p:spPr>
-          <a:xfrm xmlns:a="http://schemas.openxmlformats.org/drawingml/2006/main">
-            <a:off x="1409700" y="2333625"/>
-            <a:ext cx="2381250" cy="323850"/>
-          </a:xfrm>
-          <a:prstGeom xmlns:a="http://schemas.openxmlformats.org/drawingml/2006/main" prst="rect">
-            <a:avLst/>
-          </a:prstGeom>
-          <a:noFill xmlns:a="http://schemas.openxmlformats.org/drawingml/2006/main"/>
-          <a:ln xmlns:a="http://schemas.openxmlformats.org/drawingml/2006/main" w="0">
-            <a:noFill/>
-            <a:prstDash val="solid"/>
-          </a:ln>
-        </p:spPr>
-        <p:txBody>
-          <a:bodyPr xmlns:a="http://schemas.openxmlformats.org/drawingml/2006/main"/>
-          <a:lstStyle xmlns:a="http://schemas.openxmlformats.org/drawingml/2006/main"/>
-          <a:p xmlns:a="http://schemas.openxmlformats.org/drawingml/2006/main">
-            <a:pPr>
-              <a:defRPr sz="2250" b="1">
+                <a16:creationId xmlns:a16="http://schemas.microsoft.com/office/drawing/2014/main" id="{5725C06C-F0E6-4F51-9FEB-45586C99B713}"/>
+              </a:ext>
+            </a:extLst>
+          </p:cNvPr>
+          <p:cNvSpPr>
+            <a:spLocks xmlns:a="http://schemas.openxmlformats.org/drawingml/2006/main" noGrp="1"/>
+          </p:cNvSpPr>
+          <p:nvPr/>
+        </p:nvSpPr>
+        <p:spPr>
+          <a:xfrm xmlns:a="http://schemas.openxmlformats.org/drawingml/2006/main">
+            <a:off x="1295400" y="2286000"/>
+            <a:ext cx="2381250" cy="552450"/>
+          </a:xfrm>
+          <a:prstGeom xmlns:a="http://schemas.openxmlformats.org/drawingml/2006/main" prst="rect">
+            <a:avLst/>
+          </a:prstGeom>
+          <a:noFill xmlns:a="http://schemas.openxmlformats.org/drawingml/2006/main"/>
+          <a:ln xmlns:a="http://schemas.openxmlformats.org/drawingml/2006/main" w="0">
+            <a:noFill/>
+            <a:prstDash val="solid"/>
+          </a:ln>
+        </p:spPr>
+        <p:txBody>
+          <a:bodyPr xmlns:a="http://schemas.openxmlformats.org/drawingml/2006/main"/>
+          <a:lstStyle xmlns:a="http://schemas.openxmlformats.org/drawingml/2006/main"/>
+          <a:p xmlns:a="http://schemas.openxmlformats.org/drawingml/2006/main">
+            <a:pPr>
+              <a:defRPr sz="2100" b="1">
                 <a:solidFill>
                   <a:srgbClr val="7BD88F"/>
                 </a:solidFill>
               </a:defRPr>
             </a:pPr>
             <a:r>
-              <a:rPr sz="2250" b="1">
+              <a:rPr sz="2100" b="1">
                 <a:solidFill>
                   <a:srgbClr val="7BD88F"/>
                 </a:solidFill>
@@ -5021,47 +5559,64 @@
           <p:cNvPr id="6" name="">
             <a:extLst xmlns:a="http://schemas.openxmlformats.org/drawingml/2006/main">
               <a:ext uri="{FF2B5EF4-FFF2-40B4-BE49-F238E27FC236}">
-                <a16:creationId xmlns:a16="http://schemas.microsoft.com/office/drawing/2014/main" id="{A8650FCA-C1D2-4326-A510-8827BB74662E}"/>
-              </a:ext>
-            </a:extLst>
-          </p:cNvPr>
-          <p:cNvSpPr>
-            <a:spLocks xmlns:a="http://schemas.openxmlformats.org/drawingml/2006/main" noGrp="1"/>
-          </p:cNvSpPr>
-          <p:nvPr/>
-        </p:nvSpPr>
-        <p:spPr>
-          <a:xfrm xmlns:a="http://schemas.openxmlformats.org/drawingml/2006/main">
-            <a:off x="1409700" y="2905125"/>
-            <a:ext cx="2238375" cy="666750"/>
-          </a:xfrm>
-          <a:prstGeom xmlns:a="http://schemas.openxmlformats.org/drawingml/2006/main" prst="rect">
-            <a:avLst/>
-          </a:prstGeom>
-          <a:noFill xmlns:a="http://schemas.openxmlformats.org/drawingml/2006/main"/>
-          <a:ln xmlns:a="http://schemas.openxmlformats.org/drawingml/2006/main" w="0">
-            <a:noFill/>
-            <a:prstDash val="solid"/>
-          </a:ln>
-        </p:spPr>
-        <p:txBody>
-          <a:bodyPr xmlns:a="http://schemas.openxmlformats.org/drawingml/2006/main"/>
-          <a:lstStyle xmlns:a="http://schemas.openxmlformats.org/drawingml/2006/main"/>
-          <a:p xmlns:a="http://schemas.openxmlformats.org/drawingml/2006/main">
-            <a:pPr>
-              <a:defRPr sz="1800" b="0">
-                <a:solidFill>
-                  <a:srgbClr val="F4F8FB"/>
-                </a:solidFill>
-              </a:defRPr>
-            </a:pPr>
-            <a:r>
-              <a:rPr sz="1800" b="0">
-                <a:solidFill>
-                  <a:srgbClr val="F4F8FB"/>
-                </a:solidFill>
-              </a:rPr>
-              <a:t>Documentation / accessibility</a:t>
+                <a16:creationId xmlns:a16="http://schemas.microsoft.com/office/drawing/2014/main" id="{FF934F9A-E68B-4F11-9132-96232C99822A}"/>
+              </a:ext>
+            </a:extLst>
+          </p:cNvPr>
+          <p:cNvSpPr>
+            <a:spLocks xmlns:a="http://schemas.openxmlformats.org/drawingml/2006/main" noGrp="1"/>
+          </p:cNvSpPr>
+          <p:nvPr/>
+        </p:nvSpPr>
+        <p:spPr>
+          <a:xfrm xmlns:a="http://schemas.openxmlformats.org/drawingml/2006/main">
+            <a:off x="1295400" y="3086100"/>
+            <a:ext cx="2286000" cy="590550"/>
+          </a:xfrm>
+          <a:prstGeom xmlns:a="http://schemas.openxmlformats.org/drawingml/2006/main" prst="rect">
+            <a:avLst/>
+          </a:prstGeom>
+          <a:noFill xmlns:a="http://schemas.openxmlformats.org/drawingml/2006/main"/>
+          <a:ln xmlns:a="http://schemas.openxmlformats.org/drawingml/2006/main" w="0">
+            <a:noFill/>
+            <a:prstDash val="solid"/>
+          </a:ln>
+        </p:spPr>
+        <p:txBody>
+          <a:bodyPr xmlns:a="http://schemas.openxmlformats.org/drawingml/2006/main"/>
+          <a:lstStyle xmlns:a="http://schemas.openxmlformats.org/drawingml/2006/main"/>
+          <a:p xmlns:a="http://schemas.openxmlformats.org/drawingml/2006/main">
+            <a:pPr>
+              <a:defRPr sz="1725" b="0">
+                <a:solidFill>
+                  <a:srgbClr val="F4F8FB"/>
+                </a:solidFill>
+              </a:defRPr>
+            </a:pPr>
+            <a:r>
+              <a:rPr sz="1725" b="0">
+                <a:solidFill>
+                  <a:srgbClr val="F4F8FB"/>
+                </a:solidFill>
+              </a:rPr>
+              <a:t>Documentation /</a:t>
+            </a:r>
+          </a:p>
+          <a:p xmlns:a="http://schemas.openxmlformats.org/drawingml/2006/main">
+            <a:pPr>
+              <a:defRPr sz="1725" b="0">
+                <a:solidFill>
+                  <a:srgbClr val="F4F8FB"/>
+                </a:solidFill>
+              </a:defRPr>
+            </a:pPr>
+            <a:r>
+              <a:rPr sz="1725" b="0">
+                <a:solidFill>
+                  <a:srgbClr val="F4F8FB"/>
+                </a:solidFill>
+              </a:rPr>
+              <a:t>accessibility</a:t>
             </a:r>
           </a:p>
         </p:txBody>
@@ -5071,23 +5626,23 @@
           <p:cNvPr id="7" name="">
             <a:extLst xmlns:a="http://schemas.openxmlformats.org/drawingml/2006/main">
               <a:ext uri="{FF2B5EF4-FFF2-40B4-BE49-F238E27FC236}">
-                <a16:creationId xmlns:a16="http://schemas.microsoft.com/office/drawing/2014/main" id="{6FC3DF55-D1EB-4BA5-BFC9-712214E94FC1}"/>
-              </a:ext>
-            </a:extLst>
-          </p:cNvPr>
-          <p:cNvSpPr>
-            <a:spLocks xmlns:a="http://schemas.openxmlformats.org/drawingml/2006/main" noGrp="1"/>
-          </p:cNvSpPr>
-          <p:nvPr/>
-        </p:nvSpPr>
-        <p:spPr>
-          <a:xfrm xmlns:a="http://schemas.openxmlformats.org/drawingml/2006/main">
-            <a:off x="4619625" y="1952625"/>
-            <a:ext cx="2857500" cy="1857375"/>
+                <a16:creationId xmlns:a16="http://schemas.microsoft.com/office/drawing/2014/main" id="{F17929F8-2561-4047-8B43-75F7CFCD3F68}"/>
+              </a:ext>
+            </a:extLst>
+          </p:cNvPr>
+          <p:cNvSpPr>
+            <a:spLocks xmlns:a="http://schemas.openxmlformats.org/drawingml/2006/main" noGrp="1"/>
+          </p:cNvSpPr>
+          <p:nvPr/>
+        </p:nvSpPr>
+        <p:spPr>
+          <a:xfrm xmlns:a="http://schemas.openxmlformats.org/drawingml/2006/main">
+            <a:off x="4705350" y="1809750"/>
+            <a:ext cx="2952750" cy="2047875"/>
           </a:xfrm>
           <a:prstGeom xmlns:a="http://schemas.openxmlformats.org/drawingml/2006/main" prst="roundRect">
             <a:avLst>
-              <a:gd name="adj" fmla="val 4103"/>
+              <a:gd name="adj" fmla="val 3721"/>
             </a:avLst>
           </a:prstGeom>
           <a:solidFill xmlns:a="http://schemas.openxmlformats.org/drawingml/2006/main">
@@ -5106,47 +5661,64 @@
           <p:cNvPr id="8" name="">
             <a:extLst xmlns:a="http://schemas.openxmlformats.org/drawingml/2006/main">
               <a:ext uri="{FF2B5EF4-FFF2-40B4-BE49-F238E27FC236}">
-                <a16:creationId xmlns:a16="http://schemas.microsoft.com/office/drawing/2014/main" id="{930519C8-7F3D-4BF2-9208-190D066F0D0B}"/>
-              </a:ext>
-            </a:extLst>
-          </p:cNvPr>
-          <p:cNvSpPr>
-            <a:spLocks xmlns:a="http://schemas.openxmlformats.org/drawingml/2006/main" noGrp="1"/>
-          </p:cNvSpPr>
-          <p:nvPr/>
-        </p:nvSpPr>
-        <p:spPr>
-          <a:xfrm xmlns:a="http://schemas.openxmlformats.org/drawingml/2006/main">
-            <a:off x="4886325" y="2333625"/>
-            <a:ext cx="2381250" cy="323850"/>
-          </a:xfrm>
-          <a:prstGeom xmlns:a="http://schemas.openxmlformats.org/drawingml/2006/main" prst="rect">
-            <a:avLst/>
-          </a:prstGeom>
-          <a:noFill xmlns:a="http://schemas.openxmlformats.org/drawingml/2006/main"/>
-          <a:ln xmlns:a="http://schemas.openxmlformats.org/drawingml/2006/main" w="0">
-            <a:noFill/>
-            <a:prstDash val="solid"/>
-          </a:ln>
-        </p:spPr>
-        <p:txBody>
-          <a:bodyPr xmlns:a="http://schemas.openxmlformats.org/drawingml/2006/main"/>
-          <a:lstStyle xmlns:a="http://schemas.openxmlformats.org/drawingml/2006/main"/>
-          <a:p xmlns:a="http://schemas.openxmlformats.org/drawingml/2006/main">
-            <a:pPr>
-              <a:defRPr sz="2250" b="1">
+                <a16:creationId xmlns:a16="http://schemas.microsoft.com/office/drawing/2014/main" id="{6296E9D0-A5B6-4035-961D-D374D7A065BE}"/>
+              </a:ext>
+            </a:extLst>
+          </p:cNvPr>
+          <p:cNvSpPr>
+            <a:spLocks xmlns:a="http://schemas.openxmlformats.org/drawingml/2006/main" noGrp="1"/>
+          </p:cNvSpPr>
+          <p:nvPr/>
+        </p:nvSpPr>
+        <p:spPr>
+          <a:xfrm xmlns:a="http://schemas.openxmlformats.org/drawingml/2006/main">
+            <a:off x="5010150" y="2286000"/>
+            <a:ext cx="2381250" cy="552450"/>
+          </a:xfrm>
+          <a:prstGeom xmlns:a="http://schemas.openxmlformats.org/drawingml/2006/main" prst="rect">
+            <a:avLst/>
+          </a:prstGeom>
+          <a:noFill xmlns:a="http://schemas.openxmlformats.org/drawingml/2006/main"/>
+          <a:ln xmlns:a="http://schemas.openxmlformats.org/drawingml/2006/main" w="0">
+            <a:noFill/>
+            <a:prstDash val="solid"/>
+          </a:ln>
+        </p:spPr>
+        <p:txBody>
+          <a:bodyPr xmlns:a="http://schemas.openxmlformats.org/drawingml/2006/main"/>
+          <a:lstStyle xmlns:a="http://schemas.openxmlformats.org/drawingml/2006/main"/>
+          <a:p xmlns:a="http://schemas.openxmlformats.org/drawingml/2006/main">
+            <a:pPr>
+              <a:defRPr sz="2100" b="1">
                 <a:solidFill>
                   <a:srgbClr val="4CC9F0"/>
                 </a:solidFill>
               </a:defRPr>
             </a:pPr>
             <a:r>
-              <a:rPr sz="2250" b="1">
+              <a:rPr sz="2100" b="1">
                 <a:solidFill>
                   <a:srgbClr val="4CC9F0"/>
                 </a:solidFill>
               </a:rPr>
-              <a:t>AF-MEDIUM-001</a:t>
+              <a:t>AF-MEDIUM-</a:t>
+            </a:r>
+          </a:p>
+          <a:p xmlns:a="http://schemas.openxmlformats.org/drawingml/2006/main">
+            <a:pPr>
+              <a:defRPr sz="2100" b="1">
+                <a:solidFill>
+                  <a:srgbClr val="4CC9F0"/>
+                </a:solidFill>
+              </a:defRPr>
+            </a:pPr>
+            <a:r>
+              <a:rPr sz="2100" b="1">
+                <a:solidFill>
+                  <a:srgbClr val="4CC9F0"/>
+                </a:solidFill>
+              </a:rPr>
+              <a:t>001</a:t>
             </a:r>
           </a:p>
         </p:txBody>
@@ -5156,47 +5728,64 @@
           <p:cNvPr id="9" name="">
             <a:extLst xmlns:a="http://schemas.openxmlformats.org/drawingml/2006/main">
               <a:ext uri="{FF2B5EF4-FFF2-40B4-BE49-F238E27FC236}">
-                <a16:creationId xmlns:a16="http://schemas.microsoft.com/office/drawing/2014/main" id="{CCCDBC51-955D-4310-9C01-35893D3C4760}"/>
-              </a:ext>
-            </a:extLst>
-          </p:cNvPr>
-          <p:cNvSpPr>
-            <a:spLocks xmlns:a="http://schemas.openxmlformats.org/drawingml/2006/main" noGrp="1"/>
-          </p:cNvSpPr>
-          <p:nvPr/>
-        </p:nvSpPr>
-        <p:spPr>
-          <a:xfrm xmlns:a="http://schemas.openxmlformats.org/drawingml/2006/main">
-            <a:off x="4886325" y="2905125"/>
-            <a:ext cx="2238375" cy="666750"/>
-          </a:xfrm>
-          <a:prstGeom xmlns:a="http://schemas.openxmlformats.org/drawingml/2006/main" prst="rect">
-            <a:avLst/>
-          </a:prstGeom>
-          <a:noFill xmlns:a="http://schemas.openxmlformats.org/drawingml/2006/main"/>
-          <a:ln xmlns:a="http://schemas.openxmlformats.org/drawingml/2006/main" w="0">
-            <a:noFill/>
-            <a:prstDash val="solid"/>
-          </a:ln>
-        </p:spPr>
-        <p:txBody>
-          <a:bodyPr xmlns:a="http://schemas.openxmlformats.org/drawingml/2006/main"/>
-          <a:lstStyle xmlns:a="http://schemas.openxmlformats.org/drawingml/2006/main"/>
-          <a:p xmlns:a="http://schemas.openxmlformats.org/drawingml/2006/main">
-            <a:pPr>
-              <a:defRPr sz="1800" b="0">
-                <a:solidFill>
-                  <a:srgbClr val="F4F8FB"/>
-                </a:solidFill>
-              </a:defRPr>
-            </a:pPr>
-            <a:r>
-              <a:rPr sz="1800" b="0">
-                <a:solidFill>
-                  <a:srgbClr val="F4F8FB"/>
-                </a:solidFill>
-              </a:rPr>
-              <a:t>Bounded executable test change</a:t>
+                <a16:creationId xmlns:a16="http://schemas.microsoft.com/office/drawing/2014/main" id="{87AFAC5C-96B9-4073-9619-6CAC967E1D46}"/>
+              </a:ext>
+            </a:extLst>
+          </p:cNvPr>
+          <p:cNvSpPr>
+            <a:spLocks xmlns:a="http://schemas.openxmlformats.org/drawingml/2006/main" noGrp="1"/>
+          </p:cNvSpPr>
+          <p:nvPr/>
+        </p:nvSpPr>
+        <p:spPr>
+          <a:xfrm xmlns:a="http://schemas.openxmlformats.org/drawingml/2006/main">
+            <a:off x="5010150" y="3086100"/>
+            <a:ext cx="2286000" cy="590550"/>
+          </a:xfrm>
+          <a:prstGeom xmlns:a="http://schemas.openxmlformats.org/drawingml/2006/main" prst="rect">
+            <a:avLst/>
+          </a:prstGeom>
+          <a:noFill xmlns:a="http://schemas.openxmlformats.org/drawingml/2006/main"/>
+          <a:ln xmlns:a="http://schemas.openxmlformats.org/drawingml/2006/main" w="0">
+            <a:noFill/>
+            <a:prstDash val="solid"/>
+          </a:ln>
+        </p:spPr>
+        <p:txBody>
+          <a:bodyPr xmlns:a="http://schemas.openxmlformats.org/drawingml/2006/main"/>
+          <a:lstStyle xmlns:a="http://schemas.openxmlformats.org/drawingml/2006/main"/>
+          <a:p xmlns:a="http://schemas.openxmlformats.org/drawingml/2006/main">
+            <a:pPr>
+              <a:defRPr sz="1725" b="0">
+                <a:solidFill>
+                  <a:srgbClr val="F4F8FB"/>
+                </a:solidFill>
+              </a:defRPr>
+            </a:pPr>
+            <a:r>
+              <a:rPr sz="1725" b="0">
+                <a:solidFill>
+                  <a:srgbClr val="F4F8FB"/>
+                </a:solidFill>
+              </a:rPr>
+              <a:t>Bounded executable</a:t>
+            </a:r>
+          </a:p>
+          <a:p xmlns:a="http://schemas.openxmlformats.org/drawingml/2006/main">
+            <a:pPr>
+              <a:defRPr sz="1725" b="0">
+                <a:solidFill>
+                  <a:srgbClr val="F4F8FB"/>
+                </a:solidFill>
+              </a:defRPr>
+            </a:pPr>
+            <a:r>
+              <a:rPr sz="1725" b="0">
+                <a:solidFill>
+                  <a:srgbClr val="F4F8FB"/>
+                </a:solidFill>
+              </a:rPr>
+              <a:t>test change</a:t>
             </a:r>
           </a:p>
         </p:txBody>
@@ -5206,23 +5795,23 @@
           <p:cNvPr id="10" name="">
             <a:extLst xmlns:a="http://schemas.openxmlformats.org/drawingml/2006/main">
               <a:ext uri="{FF2B5EF4-FFF2-40B4-BE49-F238E27FC236}">
-                <a16:creationId xmlns:a16="http://schemas.microsoft.com/office/drawing/2014/main" id="{5BCC1A32-6A0B-4AC7-B803-518C5B59ABC6}"/>
-              </a:ext>
-            </a:extLst>
-          </p:cNvPr>
-          <p:cNvSpPr>
-            <a:spLocks xmlns:a="http://schemas.openxmlformats.org/drawingml/2006/main" noGrp="1"/>
-          </p:cNvSpPr>
-          <p:nvPr/>
-        </p:nvSpPr>
-        <p:spPr>
-          <a:xfrm xmlns:a="http://schemas.openxmlformats.org/drawingml/2006/main">
-            <a:off x="8096250" y="1952625"/>
-            <a:ext cx="2857500" cy="1857375"/>
+                <a16:creationId xmlns:a16="http://schemas.microsoft.com/office/drawing/2014/main" id="{AD6E24CA-FA37-4D3D-B7D5-40506F68932E}"/>
+              </a:ext>
+            </a:extLst>
+          </p:cNvPr>
+          <p:cNvSpPr>
+            <a:spLocks xmlns:a="http://schemas.openxmlformats.org/drawingml/2006/main" noGrp="1"/>
+          </p:cNvSpPr>
+          <p:nvPr/>
+        </p:nvSpPr>
+        <p:spPr>
+          <a:xfrm xmlns:a="http://schemas.openxmlformats.org/drawingml/2006/main">
+            <a:off x="8420100" y="1809750"/>
+            <a:ext cx="2952750" cy="2047875"/>
           </a:xfrm>
           <a:prstGeom xmlns:a="http://schemas.openxmlformats.org/drawingml/2006/main" prst="roundRect">
             <a:avLst>
-              <a:gd name="adj" fmla="val 4103"/>
+              <a:gd name="adj" fmla="val 3721"/>
             </a:avLst>
           </a:prstGeom>
           <a:solidFill xmlns:a="http://schemas.openxmlformats.org/drawingml/2006/main">
@@ -5241,42 +5830,42 @@
           <p:cNvPr id="11" name="">
             <a:extLst xmlns:a="http://schemas.openxmlformats.org/drawingml/2006/main">
               <a:ext uri="{FF2B5EF4-FFF2-40B4-BE49-F238E27FC236}">
-                <a16:creationId xmlns:a16="http://schemas.microsoft.com/office/drawing/2014/main" id="{A9DAFC61-7355-4D61-9053-8ACF0E809B92}"/>
-              </a:ext>
-            </a:extLst>
-          </p:cNvPr>
-          <p:cNvSpPr>
-            <a:spLocks xmlns:a="http://schemas.openxmlformats.org/drawingml/2006/main" noGrp="1"/>
-          </p:cNvSpPr>
-          <p:nvPr/>
-        </p:nvSpPr>
-        <p:spPr>
-          <a:xfrm xmlns:a="http://schemas.openxmlformats.org/drawingml/2006/main">
-            <a:off x="8362950" y="2333625"/>
-            <a:ext cx="2381250" cy="323850"/>
-          </a:xfrm>
-          <a:prstGeom xmlns:a="http://schemas.openxmlformats.org/drawingml/2006/main" prst="rect">
-            <a:avLst/>
-          </a:prstGeom>
-          <a:noFill xmlns:a="http://schemas.openxmlformats.org/drawingml/2006/main"/>
-          <a:ln xmlns:a="http://schemas.openxmlformats.org/drawingml/2006/main" w="0">
-            <a:noFill/>
-            <a:prstDash val="solid"/>
-          </a:ln>
-        </p:spPr>
-        <p:txBody>
-          <a:bodyPr xmlns:a="http://schemas.openxmlformats.org/drawingml/2006/main"/>
-          <a:lstStyle xmlns:a="http://schemas.openxmlformats.org/drawingml/2006/main"/>
-          <a:p xmlns:a="http://schemas.openxmlformats.org/drawingml/2006/main">
-            <a:pPr>
-              <a:defRPr sz="2250" b="1">
+                <a16:creationId xmlns:a16="http://schemas.microsoft.com/office/drawing/2014/main" id="{F3D37E72-8354-4968-A9D2-2F083E98BB7F}"/>
+              </a:ext>
+            </a:extLst>
+          </p:cNvPr>
+          <p:cNvSpPr>
+            <a:spLocks xmlns:a="http://schemas.openxmlformats.org/drawingml/2006/main" noGrp="1"/>
+          </p:cNvSpPr>
+          <p:nvPr/>
+        </p:nvSpPr>
+        <p:spPr>
+          <a:xfrm xmlns:a="http://schemas.openxmlformats.org/drawingml/2006/main">
+            <a:off x="8724900" y="2286000"/>
+            <a:ext cx="2381250" cy="552450"/>
+          </a:xfrm>
+          <a:prstGeom xmlns:a="http://schemas.openxmlformats.org/drawingml/2006/main" prst="rect">
+            <a:avLst/>
+          </a:prstGeom>
+          <a:noFill xmlns:a="http://schemas.openxmlformats.org/drawingml/2006/main"/>
+          <a:ln xmlns:a="http://schemas.openxmlformats.org/drawingml/2006/main" w="0">
+            <a:noFill/>
+            <a:prstDash val="solid"/>
+          </a:ln>
+        </p:spPr>
+        <p:txBody>
+          <a:bodyPr xmlns:a="http://schemas.openxmlformats.org/drawingml/2006/main"/>
+          <a:lstStyle xmlns:a="http://schemas.openxmlformats.org/drawingml/2006/main"/>
+          <a:p xmlns:a="http://schemas.openxmlformats.org/drawingml/2006/main">
+            <a:pPr>
+              <a:defRPr sz="2100" b="1">
                 <a:solidFill>
                   <a:srgbClr val="F6C85F"/>
                 </a:solidFill>
               </a:defRPr>
             </a:pPr>
             <a:r>
-              <a:rPr sz="2250" b="1">
+              <a:rPr sz="2100" b="1">
                 <a:solidFill>
                   <a:srgbClr val="F6C85F"/>
                 </a:solidFill>
@@ -5291,47 +5880,64 @@
           <p:cNvPr id="12" name="">
             <a:extLst xmlns:a="http://schemas.openxmlformats.org/drawingml/2006/main">
               <a:ext uri="{FF2B5EF4-FFF2-40B4-BE49-F238E27FC236}">
-                <a16:creationId xmlns:a16="http://schemas.microsoft.com/office/drawing/2014/main" id="{52892BAE-A3A2-41DE-A1A3-0D4F5C3292FE}"/>
-              </a:ext>
-            </a:extLst>
-          </p:cNvPr>
-          <p:cNvSpPr>
-            <a:spLocks xmlns:a="http://schemas.openxmlformats.org/drawingml/2006/main" noGrp="1"/>
-          </p:cNvSpPr>
-          <p:nvPr/>
-        </p:nvSpPr>
-        <p:spPr>
-          <a:xfrm xmlns:a="http://schemas.openxmlformats.org/drawingml/2006/main">
-            <a:off x="8362950" y="2905125"/>
-            <a:ext cx="2238375" cy="666750"/>
-          </a:xfrm>
-          <a:prstGeom xmlns:a="http://schemas.openxmlformats.org/drawingml/2006/main" prst="rect">
-            <a:avLst/>
-          </a:prstGeom>
-          <a:noFill xmlns:a="http://schemas.openxmlformats.org/drawingml/2006/main"/>
-          <a:ln xmlns:a="http://schemas.openxmlformats.org/drawingml/2006/main" w="0">
-            <a:noFill/>
-            <a:prstDash val="solid"/>
-          </a:ln>
-        </p:spPr>
-        <p:txBody>
-          <a:bodyPr xmlns:a="http://schemas.openxmlformats.org/drawingml/2006/main"/>
-          <a:lstStyle xmlns:a="http://schemas.openxmlformats.org/drawingml/2006/main"/>
-          <a:p xmlns:a="http://schemas.openxmlformats.org/drawingml/2006/main">
-            <a:pPr>
-              <a:defRPr sz="1800" b="0">
-                <a:solidFill>
-                  <a:srgbClr val="F4F8FB"/>
-                </a:solidFill>
-              </a:defRPr>
-            </a:pPr>
-            <a:r>
-              <a:rPr sz="1800" b="0">
-                <a:solidFill>
-                  <a:srgbClr val="F4F8FB"/>
-                </a:solidFill>
-              </a:rPr>
-              <a:t>Governance / MCP policy-sensitive</a:t>
+                <a16:creationId xmlns:a16="http://schemas.microsoft.com/office/drawing/2014/main" id="{B2F78FDC-67DF-4EDB-A314-7DF697F7CD59}"/>
+              </a:ext>
+            </a:extLst>
+          </p:cNvPr>
+          <p:cNvSpPr>
+            <a:spLocks xmlns:a="http://schemas.openxmlformats.org/drawingml/2006/main" noGrp="1"/>
+          </p:cNvSpPr>
+          <p:nvPr/>
+        </p:nvSpPr>
+        <p:spPr>
+          <a:xfrm xmlns:a="http://schemas.openxmlformats.org/drawingml/2006/main">
+            <a:off x="8724900" y="3086100"/>
+            <a:ext cx="2286000" cy="590550"/>
+          </a:xfrm>
+          <a:prstGeom xmlns:a="http://schemas.openxmlformats.org/drawingml/2006/main" prst="rect">
+            <a:avLst/>
+          </a:prstGeom>
+          <a:noFill xmlns:a="http://schemas.openxmlformats.org/drawingml/2006/main"/>
+          <a:ln xmlns:a="http://schemas.openxmlformats.org/drawingml/2006/main" w="0">
+            <a:noFill/>
+            <a:prstDash val="solid"/>
+          </a:ln>
+        </p:spPr>
+        <p:txBody>
+          <a:bodyPr xmlns:a="http://schemas.openxmlformats.org/drawingml/2006/main"/>
+          <a:lstStyle xmlns:a="http://schemas.openxmlformats.org/drawingml/2006/main"/>
+          <a:p xmlns:a="http://schemas.openxmlformats.org/drawingml/2006/main">
+            <a:pPr>
+              <a:defRPr sz="1725" b="0">
+                <a:solidFill>
+                  <a:srgbClr val="F4F8FB"/>
+                </a:solidFill>
+              </a:defRPr>
+            </a:pPr>
+            <a:r>
+              <a:rPr sz="1725" b="0">
+                <a:solidFill>
+                  <a:srgbClr val="F4F8FB"/>
+                </a:solidFill>
+              </a:rPr>
+              <a:t>Governance / MCP</a:t>
+            </a:r>
+          </a:p>
+          <a:p xmlns:a="http://schemas.openxmlformats.org/drawingml/2006/main">
+            <a:pPr>
+              <a:defRPr sz="1725" b="0">
+                <a:solidFill>
+                  <a:srgbClr val="F4F8FB"/>
+                </a:solidFill>
+              </a:defRPr>
+            </a:pPr>
+            <a:r>
+              <a:rPr sz="1725" b="0">
+                <a:solidFill>
+                  <a:srgbClr val="F4F8FB"/>
+                </a:solidFill>
+              </a:rPr>
+              <a:t>policy-sensitive</a:t>
             </a:r>
           </a:p>
         </p:txBody>
@@ -5341,18 +5947,18 @@
           <p:cNvPr id="13" name="">
             <a:extLst xmlns:a="http://schemas.openxmlformats.org/drawingml/2006/main">
               <a:ext uri="{FF2B5EF4-FFF2-40B4-BE49-F238E27FC236}">
-                <a16:creationId xmlns:a16="http://schemas.microsoft.com/office/drawing/2014/main" id="{2D3A40D0-97D2-49A0-B0F2-7FD5B73F2085}"/>
-              </a:ext>
-            </a:extLst>
-          </p:cNvPr>
-          <p:cNvSpPr>
-            <a:spLocks xmlns:a="http://schemas.openxmlformats.org/drawingml/2006/main" noGrp="1"/>
-          </p:cNvSpPr>
-          <p:nvPr/>
-        </p:nvSpPr>
-        <p:spPr>
-          <a:xfrm xmlns:a="http://schemas.openxmlformats.org/drawingml/2006/main">
-            <a:off x="1143000" y="4524375"/>
+                <a16:creationId xmlns:a16="http://schemas.microsoft.com/office/drawing/2014/main" id="{0B004C00-452B-443D-AEA9-98A740FB870D}"/>
+              </a:ext>
+            </a:extLst>
+          </p:cNvPr>
+          <p:cNvSpPr>
+            <a:spLocks xmlns:a="http://schemas.openxmlformats.org/drawingml/2006/main" noGrp="1"/>
+          </p:cNvSpPr>
+          <p:nvPr/>
+        </p:nvSpPr>
+        <p:spPr>
+          <a:xfrm xmlns:a="http://schemas.openxmlformats.org/drawingml/2006/main">
+            <a:off x="1143000" y="4619625"/>
             <a:ext cx="2095500" cy="304800"/>
           </a:xfrm>
           <a:prstGeom xmlns:a="http://schemas.openxmlformats.org/drawingml/2006/main" prst="rect">
@@ -5391,19 +5997,19 @@
           <p:cNvPr id="14" name="">
             <a:extLst xmlns:a="http://schemas.openxmlformats.org/drawingml/2006/main">
               <a:ext uri="{FF2B5EF4-FFF2-40B4-BE49-F238E27FC236}">
-                <a16:creationId xmlns:a16="http://schemas.microsoft.com/office/drawing/2014/main" id="{3C8A2C4E-F4A6-4BEE-8A7A-759D62F71D84}"/>
-              </a:ext>
-            </a:extLst>
-          </p:cNvPr>
-          <p:cNvSpPr>
-            <a:spLocks xmlns:a="http://schemas.openxmlformats.org/drawingml/2006/main" noGrp="1"/>
-          </p:cNvSpPr>
-          <p:nvPr/>
-        </p:nvSpPr>
-        <p:spPr>
-          <a:xfrm xmlns:a="http://schemas.openxmlformats.org/drawingml/2006/main">
-            <a:off x="1143000" y="4981575"/>
-            <a:ext cx="8477250" cy="723900"/>
+                <a16:creationId xmlns:a16="http://schemas.microsoft.com/office/drawing/2014/main" id="{74F5AC47-091E-4ED2-83CA-F4BB3FBE79F5}"/>
+              </a:ext>
+            </a:extLst>
+          </p:cNvPr>
+          <p:cNvSpPr>
+            <a:spLocks xmlns:a="http://schemas.openxmlformats.org/drawingml/2006/main" noGrp="1"/>
+          </p:cNvSpPr>
+          <p:nvPr/>
+        </p:nvSpPr>
+        <p:spPr>
+          <a:xfrm xmlns:a="http://schemas.openxmlformats.org/drawingml/2006/main">
+            <a:off x="1143000" y="5095875"/>
+            <a:ext cx="8572500" cy="590550"/>
           </a:xfrm>
           <a:prstGeom xmlns:a="http://schemas.openxmlformats.org/drawingml/2006/main" prst="rect">
             <a:avLst/>
@@ -5439,7 +6045,7 @@
     </p:spTree>
     <p:extLst>
       <p:ext uri="{BB962C8B-B14F-4D97-AF65-F5344CB8AC3E}">
-        <p14:creationId xmlns:p14="http://schemas.microsoft.com/office/powerpoint/2010/main" val="1180620805"/>
+        <p14:creationId xmlns:p14="http://schemas.microsoft.com/office/powerpoint/2010/main" val="593897445"/>
       </p:ext>
     </p:extLst>
   </p:cSld>
@@ -5467,10 +6073,10 @@
       </p:grpSpPr>
       <p:sp>
         <p:nvSpPr>
-          <p:cNvPr id="15" name="slide-title">
-            <a:extLst xmlns:a="http://schemas.openxmlformats.org/drawingml/2006/main">
-              <a:ext uri="{FF2B5EF4-FFF2-40B4-BE49-F238E27FC236}">
-                <a16:creationId xmlns:a16="http://schemas.microsoft.com/office/drawing/2014/main" id="{2A101E10-F792-4016-8A5C-A137D77F6039}"/>
+          <p:cNvPr id="72" name="">
+            <a:extLst xmlns:a="http://schemas.openxmlformats.org/drawingml/2006/main">
+              <a:ext uri="{FF2B5EF4-FFF2-40B4-BE49-F238E27FC236}">
+                <a16:creationId xmlns:a16="http://schemas.microsoft.com/office/drawing/2014/main" id="{A678A5C6-70A9-43FA-AD7A-9AB752C7FC17}"/>
               </a:ext>
             </a:extLst>
           </p:cNvPr>
@@ -5482,7 +6088,7 @@
         <p:spPr>
           <a:xfrm xmlns:a="http://schemas.openxmlformats.org/drawingml/2006/main">
             <a:off x="666750" y="323850"/>
-            <a:ext cx="8763000" cy="552450"/>
+            <a:ext cx="9715500" cy="495300"/>
           </a:xfrm>
           <a:prstGeom xmlns:a="http://schemas.openxmlformats.org/drawingml/2006/main" prst="rect">
             <a:avLst/>
@@ -5517,22 +6123,22 @@
       </p:sp>
       <p:sp>
         <p:nvSpPr>
-          <p:cNvPr id="2" name="slide-subtitle">
-            <a:extLst xmlns:a="http://schemas.openxmlformats.org/drawingml/2006/main">
-              <a:ext uri="{FF2B5EF4-FFF2-40B4-BE49-F238E27FC236}">
-                <a16:creationId xmlns:a16="http://schemas.microsoft.com/office/drawing/2014/main" id="{0CC5D2F0-0101-4F4F-A8DF-C3EC7490AA52}"/>
-              </a:ext>
-            </a:extLst>
-          </p:cNvPr>
-          <p:cNvSpPr>
-            <a:spLocks xmlns:a="http://schemas.openxmlformats.org/drawingml/2006/main" noGrp="1"/>
-          </p:cNvSpPr>
-          <p:nvPr/>
-        </p:nvSpPr>
-        <p:spPr>
-          <a:xfrm xmlns:a="http://schemas.openxmlformats.org/drawingml/2006/main">
-            <a:off x="666750" y="838200"/>
-            <a:ext cx="9144000" cy="323850"/>
+          <p:cNvPr id="2" name="">
+            <a:extLst xmlns:a="http://schemas.openxmlformats.org/drawingml/2006/main">
+              <a:ext uri="{FF2B5EF4-FFF2-40B4-BE49-F238E27FC236}">
+                <a16:creationId xmlns:a16="http://schemas.microsoft.com/office/drawing/2014/main" id="{ABF331BC-01C2-4927-9AC6-BD1F6A073947}"/>
+              </a:ext>
+            </a:extLst>
+          </p:cNvPr>
+          <p:cNvSpPr>
+            <a:spLocks xmlns:a="http://schemas.openxmlformats.org/drawingml/2006/main" noGrp="1"/>
+          </p:cNvSpPr>
+          <p:nvPr/>
+        </p:nvSpPr>
+        <p:spPr>
+          <a:xfrm xmlns:a="http://schemas.openxmlformats.org/drawingml/2006/main">
+            <a:off x="666750" y="876300"/>
+            <a:ext cx="9810750" cy="285750"/>
           </a:xfrm>
           <a:prstGeom xmlns:a="http://schemas.openxmlformats.org/drawingml/2006/main" prst="rect">
             <a:avLst/>
@@ -5567,10 +6173,10 @@
       </p:sp>
       <p:sp>
         <p:nvSpPr>
-          <p:cNvPr id="3" name="slide-number">
-            <a:extLst xmlns:a="http://schemas.openxmlformats.org/drawingml/2006/main">
-              <a:ext uri="{FF2B5EF4-FFF2-40B4-BE49-F238E27FC236}">
-                <a16:creationId xmlns:a16="http://schemas.microsoft.com/office/drawing/2014/main" id="{0EDA53A4-038D-4B80-945F-BADDDC42FE6C}"/>
+          <p:cNvPr id="3" name="">
+            <a:extLst xmlns:a="http://schemas.openxmlformats.org/drawingml/2006/main">
+              <a:ext uri="{FF2B5EF4-FFF2-40B4-BE49-F238E27FC236}">
+                <a16:creationId xmlns:a16="http://schemas.microsoft.com/office/drawing/2014/main" id="{CA0F1C27-35AB-4566-AF49-AEC389CD9205}"/>
               </a:ext>
             </a:extLst>
           </p:cNvPr>
@@ -5615,22 +6221,2542 @@
           </a:p>
         </p:txBody>
       </p:sp>
+      <p:sp>
+        <p:nvSpPr>
+          <p:cNvPr id="4" name="">
+            <a:extLst xmlns:a="http://schemas.openxmlformats.org/drawingml/2006/main">
+              <a:ext uri="{FF2B5EF4-FFF2-40B4-BE49-F238E27FC236}">
+                <a16:creationId xmlns:a16="http://schemas.microsoft.com/office/drawing/2014/main" id="{234913FC-7F60-46CC-B087-7A6839A2E560}"/>
+              </a:ext>
+            </a:extLst>
+          </p:cNvPr>
+          <p:cNvSpPr>
+            <a:spLocks xmlns:a="http://schemas.openxmlformats.org/drawingml/2006/main" noGrp="1"/>
+          </p:cNvSpPr>
+          <p:nvPr/>
+        </p:nvSpPr>
+        <p:spPr>
+          <a:xfrm xmlns:a="http://schemas.openxmlformats.org/drawingml/2006/main">
+            <a:off x="742950" y="1333500"/>
+            <a:ext cx="2952750" cy="247650"/>
+          </a:xfrm>
+          <a:prstGeom xmlns:a="http://schemas.openxmlformats.org/drawingml/2006/main" prst="rect">
+            <a:avLst/>
+          </a:prstGeom>
+          <a:noFill xmlns:a="http://schemas.openxmlformats.org/drawingml/2006/main"/>
+          <a:ln xmlns:a="http://schemas.openxmlformats.org/drawingml/2006/main" w="0">
+            <a:noFill/>
+            <a:prstDash val="solid"/>
+          </a:ln>
+        </p:spPr>
+        <p:txBody>
+          <a:bodyPr xmlns:a="http://schemas.openxmlformats.org/drawingml/2006/main"/>
+          <a:lstStyle xmlns:a="http://schemas.openxmlformats.org/drawingml/2006/main"/>
+          <a:p xmlns:a="http://schemas.openxmlformats.org/drawingml/2006/main">
+            <a:pPr>
+              <a:defRPr sz="1875" b="1">
+                <a:solidFill>
+                  <a:srgbClr val="F4F8FB"/>
+                </a:solidFill>
+              </a:defRPr>
+            </a:pPr>
+            <a:r>
+              <a:rPr sz="1875" b="1">
+                <a:solidFill>
+                  <a:srgbClr val="F4F8FB"/>
+                </a:solidFill>
+              </a:rPr>
+              <a:t>Cost by tier</a:t>
+            </a:r>
+          </a:p>
+        </p:txBody>
+      </p:sp>
+      <p:sp>
+        <p:nvSpPr>
+          <p:cNvPr id="5" name="">
+            <a:extLst xmlns:a="http://schemas.openxmlformats.org/drawingml/2006/main">
+              <a:ext uri="{FF2B5EF4-FFF2-40B4-BE49-F238E27FC236}">
+                <a16:creationId xmlns:a16="http://schemas.microsoft.com/office/drawing/2014/main" id="{DABB9ED8-0356-44BC-8448-5FEE81CBAA85}"/>
+              </a:ext>
+            </a:extLst>
+          </p:cNvPr>
+          <p:cNvSpPr>
+            <a:spLocks xmlns:a="http://schemas.openxmlformats.org/drawingml/2006/main" noGrp="1"/>
+          </p:cNvSpPr>
+          <p:nvPr/>
+        </p:nvSpPr>
+        <p:spPr>
+          <a:xfrm xmlns:a="http://schemas.openxmlformats.org/drawingml/2006/main">
+            <a:off x="2505075" y="1657350"/>
+            <a:ext cx="809625" cy="171450"/>
+          </a:xfrm>
+          <a:prstGeom xmlns:a="http://schemas.openxmlformats.org/drawingml/2006/main" prst="rect">
+            <a:avLst/>
+          </a:prstGeom>
+          <a:noFill xmlns:a="http://schemas.openxmlformats.org/drawingml/2006/main"/>
+          <a:ln xmlns:a="http://schemas.openxmlformats.org/drawingml/2006/main" w="0">
+            <a:noFill/>
+            <a:prstDash val="solid"/>
+          </a:ln>
+        </p:spPr>
+        <p:txBody>
+          <a:bodyPr xmlns:a="http://schemas.openxmlformats.org/drawingml/2006/main"/>
+          <a:lstStyle xmlns:a="http://schemas.openxmlformats.org/drawingml/2006/main"/>
+          <a:p xmlns:a="http://schemas.openxmlformats.org/drawingml/2006/main">
+            <a:pPr>
+              <a:defRPr sz="900" b="1">
+                <a:solidFill>
+                  <a:srgbClr val="A9BACB"/>
+                </a:solidFill>
+              </a:defRPr>
+            </a:pPr>
+            <a:r>
+              <a:rPr sz="900" b="1">
+                <a:solidFill>
+                  <a:srgbClr val="A9BACB"/>
+                </a:solidFill>
+              </a:rPr>
+              <a:t>Pre-AURA</a:t>
+            </a:r>
+          </a:p>
+        </p:txBody>
+      </p:sp>
+      <p:sp>
+        <p:nvSpPr>
+          <p:cNvPr id="6" name="">
+            <a:extLst xmlns:a="http://schemas.openxmlformats.org/drawingml/2006/main">
+              <a:ext uri="{FF2B5EF4-FFF2-40B4-BE49-F238E27FC236}">
+                <a16:creationId xmlns:a16="http://schemas.microsoft.com/office/drawing/2014/main" id="{13BCB828-BF06-483F-AD6C-A71D6CD1B845}"/>
+              </a:ext>
+            </a:extLst>
+          </p:cNvPr>
+          <p:cNvSpPr>
+            <a:spLocks xmlns:a="http://schemas.openxmlformats.org/drawingml/2006/main" noGrp="1"/>
+          </p:cNvSpPr>
+          <p:nvPr/>
+        </p:nvSpPr>
+        <p:spPr>
+          <a:xfrm xmlns:a="http://schemas.openxmlformats.org/drawingml/2006/main">
+            <a:off x="3314700" y="1657350"/>
+            <a:ext cx="571500" cy="171450"/>
+          </a:xfrm>
+          <a:prstGeom xmlns:a="http://schemas.openxmlformats.org/drawingml/2006/main" prst="rect">
+            <a:avLst/>
+          </a:prstGeom>
+          <a:noFill xmlns:a="http://schemas.openxmlformats.org/drawingml/2006/main"/>
+          <a:ln xmlns:a="http://schemas.openxmlformats.org/drawingml/2006/main" w="0">
+            <a:noFill/>
+            <a:prstDash val="solid"/>
+          </a:ln>
+        </p:spPr>
+        <p:txBody>
+          <a:bodyPr xmlns:a="http://schemas.openxmlformats.org/drawingml/2006/main"/>
+          <a:lstStyle xmlns:a="http://schemas.openxmlformats.org/drawingml/2006/main"/>
+          <a:p xmlns:a="http://schemas.openxmlformats.org/drawingml/2006/main">
+            <a:pPr>
+              <a:defRPr sz="900" b="1">
+                <a:solidFill>
+                  <a:srgbClr val="7BD88F"/>
+                </a:solidFill>
+              </a:defRPr>
+            </a:pPr>
+            <a:r>
+              <a:rPr sz="900" b="1">
+                <a:solidFill>
+                  <a:srgbClr val="7BD88F"/>
+                </a:solidFill>
+              </a:rPr>
+              <a:t>AURA</a:t>
+            </a:r>
+          </a:p>
+        </p:txBody>
+      </p:sp>
+      <p:sp>
+        <p:nvSpPr>
+          <p:cNvPr id="7" name="">
+            <a:extLst xmlns:a="http://schemas.openxmlformats.org/drawingml/2006/main">
+              <a:ext uri="{FF2B5EF4-FFF2-40B4-BE49-F238E27FC236}">
+                <a16:creationId xmlns:a16="http://schemas.microsoft.com/office/drawing/2014/main" id="{6FF5364A-2338-4909-98A5-02E592E85DFB}"/>
+              </a:ext>
+            </a:extLst>
+          </p:cNvPr>
+          <p:cNvSpPr>
+            <a:spLocks xmlns:a="http://schemas.openxmlformats.org/drawingml/2006/main" noGrp="1"/>
+          </p:cNvSpPr>
+          <p:nvPr/>
+        </p:nvSpPr>
+        <p:spPr>
+          <a:xfrm xmlns:a="http://schemas.openxmlformats.org/drawingml/2006/main">
+            <a:off x="1009650" y="2700360"/>
+            <a:ext cx="266700" cy="785790"/>
+          </a:xfrm>
+          <a:prstGeom xmlns:a="http://schemas.openxmlformats.org/drawingml/2006/main" prst="roundRect">
+            <a:avLst>
+              <a:gd name="adj" fmla="val 7143"/>
+            </a:avLst>
+          </a:prstGeom>
+          <a:solidFill xmlns:a="http://schemas.openxmlformats.org/drawingml/2006/main">
+            <a:srgbClr val="6F8499"/>
+          </a:solidFill>
+          <a:ln xmlns:a="http://schemas.openxmlformats.org/drawingml/2006/main" w="11430">
+            <a:solidFill>
+              <a:srgbClr val="6F8499"/>
+            </a:solidFill>
+            <a:prstDash val="solid"/>
+          </a:ln>
+        </p:spPr>
+      </p:sp>
+      <p:sp>
+        <p:nvSpPr>
+          <p:cNvPr id="8" name="">
+            <a:extLst xmlns:a="http://schemas.openxmlformats.org/drawingml/2006/main">
+              <a:ext uri="{FF2B5EF4-FFF2-40B4-BE49-F238E27FC236}">
+                <a16:creationId xmlns:a16="http://schemas.microsoft.com/office/drawing/2014/main" id="{3BCBA05E-9017-4732-B211-2995B75F1004}"/>
+              </a:ext>
+            </a:extLst>
+          </p:cNvPr>
+          <p:cNvSpPr>
+            <a:spLocks xmlns:a="http://schemas.openxmlformats.org/drawingml/2006/main" noGrp="1"/>
+          </p:cNvSpPr>
+          <p:nvPr/>
+        </p:nvSpPr>
+        <p:spPr>
+          <a:xfrm xmlns:a="http://schemas.openxmlformats.org/drawingml/2006/main">
+            <a:off x="1371600" y="3048622"/>
+            <a:ext cx="266700" cy="437528"/>
+          </a:xfrm>
+          <a:prstGeom xmlns:a="http://schemas.openxmlformats.org/drawingml/2006/main" prst="roundRect">
+            <a:avLst>
+              <a:gd name="adj" fmla="val 7143"/>
+            </a:avLst>
+          </a:prstGeom>
+          <a:solidFill xmlns:a="http://schemas.openxmlformats.org/drawingml/2006/main">
+            <a:srgbClr val="7BD88F"/>
+          </a:solidFill>
+          <a:ln xmlns:a="http://schemas.openxmlformats.org/drawingml/2006/main" w="11430">
+            <a:solidFill>
+              <a:srgbClr val="7BD88F"/>
+            </a:solidFill>
+            <a:prstDash val="solid"/>
+          </a:ln>
+        </p:spPr>
+      </p:sp>
+      <p:sp>
+        <p:nvSpPr>
+          <p:cNvPr id="9" name="">
+            <a:extLst xmlns:a="http://schemas.openxmlformats.org/drawingml/2006/main">
+              <a:ext uri="{FF2B5EF4-FFF2-40B4-BE49-F238E27FC236}">
+                <a16:creationId xmlns:a16="http://schemas.microsoft.com/office/drawing/2014/main" id="{1EAD0672-EE72-4C28-860B-9C17AE8325CC}"/>
+              </a:ext>
+            </a:extLst>
+          </p:cNvPr>
+          <p:cNvSpPr>
+            <a:spLocks xmlns:a="http://schemas.openxmlformats.org/drawingml/2006/main" noGrp="1"/>
+          </p:cNvSpPr>
+          <p:nvPr/>
+        </p:nvSpPr>
+        <p:spPr>
+          <a:xfrm xmlns:a="http://schemas.openxmlformats.org/drawingml/2006/main">
+            <a:off x="990600" y="2500335"/>
+            <a:ext cx="514350" cy="171450"/>
+          </a:xfrm>
+          <a:prstGeom xmlns:a="http://schemas.openxmlformats.org/drawingml/2006/main" prst="rect">
+            <a:avLst/>
+          </a:prstGeom>
+          <a:noFill xmlns:a="http://schemas.openxmlformats.org/drawingml/2006/main"/>
+          <a:ln xmlns:a="http://schemas.openxmlformats.org/drawingml/2006/main" w="0">
+            <a:noFill/>
+            <a:prstDash val="solid"/>
+          </a:ln>
+        </p:spPr>
+        <p:txBody>
+          <a:bodyPr xmlns:a="http://schemas.openxmlformats.org/drawingml/2006/main"/>
+          <a:lstStyle xmlns:a="http://schemas.openxmlformats.org/drawingml/2006/main"/>
+          <a:p xmlns:a="http://schemas.openxmlformats.org/drawingml/2006/main">
+            <a:pPr>
+              <a:defRPr sz="900" b="1">
+                <a:solidFill>
+                  <a:srgbClr val="A9BACB"/>
+                </a:solidFill>
+              </a:defRPr>
+            </a:pPr>
+            <a:r>
+              <a:rPr sz="900" b="1">
+                <a:solidFill>
+                  <a:srgbClr val="A9BACB"/>
+                </a:solidFill>
+              </a:rPr>
+              <a:t>$0.61</a:t>
+            </a:r>
+          </a:p>
+        </p:txBody>
+      </p:sp>
+      <p:sp>
+        <p:nvSpPr>
+          <p:cNvPr id="10" name="">
+            <a:extLst xmlns:a="http://schemas.openxmlformats.org/drawingml/2006/main">
+              <a:ext uri="{FF2B5EF4-FFF2-40B4-BE49-F238E27FC236}">
+                <a16:creationId xmlns:a16="http://schemas.microsoft.com/office/drawing/2014/main" id="{6690E181-4AC9-4A6F-9E17-65256DD06EFD}"/>
+              </a:ext>
+            </a:extLst>
+          </p:cNvPr>
+          <p:cNvSpPr>
+            <a:spLocks xmlns:a="http://schemas.openxmlformats.org/drawingml/2006/main" noGrp="1"/>
+          </p:cNvSpPr>
+          <p:nvPr/>
+        </p:nvSpPr>
+        <p:spPr>
+          <a:xfrm xmlns:a="http://schemas.openxmlformats.org/drawingml/2006/main">
+            <a:off x="1314450" y="2848597"/>
+            <a:ext cx="514350" cy="171450"/>
+          </a:xfrm>
+          <a:prstGeom xmlns:a="http://schemas.openxmlformats.org/drawingml/2006/main" prst="rect">
+            <a:avLst/>
+          </a:prstGeom>
+          <a:noFill xmlns:a="http://schemas.openxmlformats.org/drawingml/2006/main"/>
+          <a:ln xmlns:a="http://schemas.openxmlformats.org/drawingml/2006/main" w="0">
+            <a:noFill/>
+            <a:prstDash val="solid"/>
+          </a:ln>
+        </p:spPr>
+        <p:txBody>
+          <a:bodyPr xmlns:a="http://schemas.openxmlformats.org/drawingml/2006/main"/>
+          <a:lstStyle xmlns:a="http://schemas.openxmlformats.org/drawingml/2006/main"/>
+          <a:p xmlns:a="http://schemas.openxmlformats.org/drawingml/2006/main">
+            <a:pPr>
+              <a:defRPr sz="900" b="1">
+                <a:solidFill>
+                  <a:srgbClr val="F4F8FB"/>
+                </a:solidFill>
+              </a:defRPr>
+            </a:pPr>
+            <a:r>
+              <a:rPr sz="900" b="1">
+                <a:solidFill>
+                  <a:srgbClr val="F4F8FB"/>
+                </a:solidFill>
+              </a:rPr>
+              <a:t>$0.34</a:t>
+            </a:r>
+          </a:p>
+        </p:txBody>
+      </p:sp>
+      <p:sp>
+        <p:nvSpPr>
+          <p:cNvPr id="11" name="">
+            <a:extLst xmlns:a="http://schemas.openxmlformats.org/drawingml/2006/main">
+              <a:ext uri="{FF2B5EF4-FFF2-40B4-BE49-F238E27FC236}">
+                <a16:creationId xmlns:a16="http://schemas.microsoft.com/office/drawing/2014/main" id="{A9A1E2EC-059A-4E43-81C9-5495E977FAF3}"/>
+              </a:ext>
+            </a:extLst>
+          </p:cNvPr>
+          <p:cNvSpPr>
+            <a:spLocks xmlns:a="http://schemas.openxmlformats.org/drawingml/2006/main" noGrp="1"/>
+          </p:cNvSpPr>
+          <p:nvPr/>
+        </p:nvSpPr>
+        <p:spPr>
+          <a:xfrm xmlns:a="http://schemas.openxmlformats.org/drawingml/2006/main">
+            <a:off x="971550" y="3619500"/>
+            <a:ext cx="762000" cy="171450"/>
+          </a:xfrm>
+          <a:prstGeom xmlns:a="http://schemas.openxmlformats.org/drawingml/2006/main" prst="rect">
+            <a:avLst/>
+          </a:prstGeom>
+          <a:noFill xmlns:a="http://schemas.openxmlformats.org/drawingml/2006/main"/>
+          <a:ln xmlns:a="http://schemas.openxmlformats.org/drawingml/2006/main" w="0">
+            <a:noFill/>
+            <a:prstDash val="solid"/>
+          </a:ln>
+        </p:spPr>
+        <p:txBody>
+          <a:bodyPr xmlns:a="http://schemas.openxmlformats.org/drawingml/2006/main"/>
+          <a:lstStyle xmlns:a="http://schemas.openxmlformats.org/drawingml/2006/main"/>
+          <a:p xmlns:a="http://schemas.openxmlformats.org/drawingml/2006/main">
+            <a:pPr>
+              <a:defRPr sz="975" b="1">
+                <a:solidFill>
+                  <a:srgbClr val="A9BACB"/>
+                </a:solidFill>
+              </a:defRPr>
+            </a:pPr>
+            <a:r>
+              <a:rPr sz="975" b="1">
+                <a:solidFill>
+                  <a:srgbClr val="A9BACB"/>
+                </a:solidFill>
+              </a:rPr>
+              <a:t>LOW</a:t>
+            </a:r>
+          </a:p>
+        </p:txBody>
+      </p:sp>
+      <p:sp>
+        <p:nvSpPr>
+          <p:cNvPr id="12" name="">
+            <a:extLst xmlns:a="http://schemas.openxmlformats.org/drawingml/2006/main">
+              <a:ext uri="{FF2B5EF4-FFF2-40B4-BE49-F238E27FC236}">
+                <a16:creationId xmlns:a16="http://schemas.microsoft.com/office/drawing/2014/main" id="{02BA0961-8B2C-44E9-9771-64370D60B2A4}"/>
+              </a:ext>
+            </a:extLst>
+          </p:cNvPr>
+          <p:cNvSpPr>
+            <a:spLocks xmlns:a="http://schemas.openxmlformats.org/drawingml/2006/main" noGrp="1"/>
+          </p:cNvSpPr>
+          <p:nvPr/>
+        </p:nvSpPr>
+        <p:spPr>
+          <a:xfrm xmlns:a="http://schemas.openxmlformats.org/drawingml/2006/main">
+            <a:off x="1885950" y="2308213"/>
+            <a:ext cx="266700" cy="1177937"/>
+          </a:xfrm>
+          <a:prstGeom xmlns:a="http://schemas.openxmlformats.org/drawingml/2006/main" prst="roundRect">
+            <a:avLst>
+              <a:gd name="adj" fmla="val 7143"/>
+            </a:avLst>
+          </a:prstGeom>
+          <a:solidFill xmlns:a="http://schemas.openxmlformats.org/drawingml/2006/main">
+            <a:srgbClr val="6F8499"/>
+          </a:solidFill>
+          <a:ln xmlns:a="http://schemas.openxmlformats.org/drawingml/2006/main" w="11430">
+            <a:solidFill>
+              <a:srgbClr val="6F8499"/>
+            </a:solidFill>
+            <a:prstDash val="solid"/>
+          </a:ln>
+        </p:spPr>
+      </p:sp>
+      <p:sp>
+        <p:nvSpPr>
+          <p:cNvPr id="13" name="">
+            <a:extLst xmlns:a="http://schemas.openxmlformats.org/drawingml/2006/main">
+              <a:ext uri="{FF2B5EF4-FFF2-40B4-BE49-F238E27FC236}">
+                <a16:creationId xmlns:a16="http://schemas.microsoft.com/office/drawing/2014/main" id="{21FEB4E3-AC33-412F-9CAD-5FA6E1AD1836}"/>
+              </a:ext>
+            </a:extLst>
+          </p:cNvPr>
+          <p:cNvSpPr>
+            <a:spLocks xmlns:a="http://schemas.openxmlformats.org/drawingml/2006/main" noGrp="1"/>
+          </p:cNvSpPr>
+          <p:nvPr/>
+        </p:nvSpPr>
+        <p:spPr>
+          <a:xfrm xmlns:a="http://schemas.openxmlformats.org/drawingml/2006/main">
+            <a:off x="2247900" y="2540402"/>
+            <a:ext cx="266700" cy="945748"/>
+          </a:xfrm>
+          <a:prstGeom xmlns:a="http://schemas.openxmlformats.org/drawingml/2006/main" prst="roundRect">
+            <a:avLst>
+              <a:gd name="adj" fmla="val 7143"/>
+            </a:avLst>
+          </a:prstGeom>
+          <a:solidFill xmlns:a="http://schemas.openxmlformats.org/drawingml/2006/main">
+            <a:srgbClr val="7BD88F"/>
+          </a:solidFill>
+          <a:ln xmlns:a="http://schemas.openxmlformats.org/drawingml/2006/main" w="11430">
+            <a:solidFill>
+              <a:srgbClr val="7BD88F"/>
+            </a:solidFill>
+            <a:prstDash val="solid"/>
+          </a:ln>
+        </p:spPr>
+      </p:sp>
+      <p:sp>
+        <p:nvSpPr>
+          <p:cNvPr id="14" name="">
+            <a:extLst xmlns:a="http://schemas.openxmlformats.org/drawingml/2006/main">
+              <a:ext uri="{FF2B5EF4-FFF2-40B4-BE49-F238E27FC236}">
+                <a16:creationId xmlns:a16="http://schemas.microsoft.com/office/drawing/2014/main" id="{D3D3640A-F208-4AB0-B7E8-8D79495F1EC2}"/>
+              </a:ext>
+            </a:extLst>
+          </p:cNvPr>
+          <p:cNvSpPr>
+            <a:spLocks xmlns:a="http://schemas.openxmlformats.org/drawingml/2006/main" noGrp="1"/>
+          </p:cNvSpPr>
+          <p:nvPr/>
+        </p:nvSpPr>
+        <p:spPr>
+          <a:xfrm xmlns:a="http://schemas.openxmlformats.org/drawingml/2006/main">
+            <a:off x="1866900" y="2108188"/>
+            <a:ext cx="514350" cy="171450"/>
+          </a:xfrm>
+          <a:prstGeom xmlns:a="http://schemas.openxmlformats.org/drawingml/2006/main" prst="rect">
+            <a:avLst/>
+          </a:prstGeom>
+          <a:noFill xmlns:a="http://schemas.openxmlformats.org/drawingml/2006/main"/>
+          <a:ln xmlns:a="http://schemas.openxmlformats.org/drawingml/2006/main" w="0">
+            <a:noFill/>
+            <a:prstDash val="solid"/>
+          </a:ln>
+        </p:spPr>
+        <p:txBody>
+          <a:bodyPr xmlns:a="http://schemas.openxmlformats.org/drawingml/2006/main"/>
+          <a:lstStyle xmlns:a="http://schemas.openxmlformats.org/drawingml/2006/main"/>
+          <a:p xmlns:a="http://schemas.openxmlformats.org/drawingml/2006/main">
+            <a:pPr>
+              <a:defRPr sz="900" b="1">
+                <a:solidFill>
+                  <a:srgbClr val="A9BACB"/>
+                </a:solidFill>
+              </a:defRPr>
+            </a:pPr>
+            <a:r>
+              <a:rPr sz="900" b="1">
+                <a:solidFill>
+                  <a:srgbClr val="A9BACB"/>
+                </a:solidFill>
+              </a:rPr>
+              <a:t>$0.91</a:t>
+            </a:r>
+          </a:p>
+        </p:txBody>
+      </p:sp>
+      <p:sp>
+        <p:nvSpPr>
+          <p:cNvPr id="15" name="">
+            <a:extLst xmlns:a="http://schemas.openxmlformats.org/drawingml/2006/main">
+              <a:ext uri="{FF2B5EF4-FFF2-40B4-BE49-F238E27FC236}">
+                <a16:creationId xmlns:a16="http://schemas.microsoft.com/office/drawing/2014/main" id="{C9250D59-5777-4C23-B0C1-B2657C3CA966}"/>
+              </a:ext>
+            </a:extLst>
+          </p:cNvPr>
+          <p:cNvSpPr>
+            <a:spLocks xmlns:a="http://schemas.openxmlformats.org/drawingml/2006/main" noGrp="1"/>
+          </p:cNvSpPr>
+          <p:nvPr/>
+        </p:nvSpPr>
+        <p:spPr>
+          <a:xfrm xmlns:a="http://schemas.openxmlformats.org/drawingml/2006/main">
+            <a:off x="2190750" y="2340377"/>
+            <a:ext cx="514350" cy="171450"/>
+          </a:xfrm>
+          <a:prstGeom xmlns:a="http://schemas.openxmlformats.org/drawingml/2006/main" prst="rect">
+            <a:avLst/>
+          </a:prstGeom>
+          <a:noFill xmlns:a="http://schemas.openxmlformats.org/drawingml/2006/main"/>
+          <a:ln xmlns:a="http://schemas.openxmlformats.org/drawingml/2006/main" w="0">
+            <a:noFill/>
+            <a:prstDash val="solid"/>
+          </a:ln>
+        </p:spPr>
+        <p:txBody>
+          <a:bodyPr xmlns:a="http://schemas.openxmlformats.org/drawingml/2006/main"/>
+          <a:lstStyle xmlns:a="http://schemas.openxmlformats.org/drawingml/2006/main"/>
+          <a:p xmlns:a="http://schemas.openxmlformats.org/drawingml/2006/main">
+            <a:pPr>
+              <a:defRPr sz="900" b="1">
+                <a:solidFill>
+                  <a:srgbClr val="F4F8FB"/>
+                </a:solidFill>
+              </a:defRPr>
+            </a:pPr>
+            <a:r>
+              <a:rPr sz="900" b="1">
+                <a:solidFill>
+                  <a:srgbClr val="F4F8FB"/>
+                </a:solidFill>
+              </a:rPr>
+              <a:t>$0.73</a:t>
+            </a:r>
+          </a:p>
+        </p:txBody>
+      </p:sp>
+      <p:sp>
+        <p:nvSpPr>
+          <p:cNvPr id="16" name="">
+            <a:extLst xmlns:a="http://schemas.openxmlformats.org/drawingml/2006/main">
+              <a:ext uri="{FF2B5EF4-FFF2-40B4-BE49-F238E27FC236}">
+                <a16:creationId xmlns:a16="http://schemas.microsoft.com/office/drawing/2014/main" id="{E914B902-C3FB-4551-953C-755114993702}"/>
+              </a:ext>
+            </a:extLst>
+          </p:cNvPr>
+          <p:cNvSpPr>
+            <a:spLocks xmlns:a="http://schemas.openxmlformats.org/drawingml/2006/main" noGrp="1"/>
+          </p:cNvSpPr>
+          <p:nvPr/>
+        </p:nvSpPr>
+        <p:spPr>
+          <a:xfrm xmlns:a="http://schemas.openxmlformats.org/drawingml/2006/main">
+            <a:off x="1847850" y="3619500"/>
+            <a:ext cx="762000" cy="171450"/>
+          </a:xfrm>
+          <a:prstGeom xmlns:a="http://schemas.openxmlformats.org/drawingml/2006/main" prst="rect">
+            <a:avLst/>
+          </a:prstGeom>
+          <a:noFill xmlns:a="http://schemas.openxmlformats.org/drawingml/2006/main"/>
+          <a:ln xmlns:a="http://schemas.openxmlformats.org/drawingml/2006/main" w="0">
+            <a:noFill/>
+            <a:prstDash val="solid"/>
+          </a:ln>
+        </p:spPr>
+        <p:txBody>
+          <a:bodyPr xmlns:a="http://schemas.openxmlformats.org/drawingml/2006/main"/>
+          <a:lstStyle xmlns:a="http://schemas.openxmlformats.org/drawingml/2006/main"/>
+          <a:p xmlns:a="http://schemas.openxmlformats.org/drawingml/2006/main">
+            <a:pPr>
+              <a:defRPr sz="975" b="1">
+                <a:solidFill>
+                  <a:srgbClr val="A9BACB"/>
+                </a:solidFill>
+              </a:defRPr>
+            </a:pPr>
+            <a:r>
+              <a:rPr sz="975" b="1">
+                <a:solidFill>
+                  <a:srgbClr val="A9BACB"/>
+                </a:solidFill>
+              </a:rPr>
+              <a:t>MED</a:t>
+            </a:r>
+          </a:p>
+        </p:txBody>
+      </p:sp>
+      <p:sp>
+        <p:nvSpPr>
+          <p:cNvPr id="17" name="">
+            <a:extLst xmlns:a="http://schemas.openxmlformats.org/drawingml/2006/main">
+              <a:ext uri="{FF2B5EF4-FFF2-40B4-BE49-F238E27FC236}">
+                <a16:creationId xmlns:a16="http://schemas.microsoft.com/office/drawing/2014/main" id="{484312E7-A163-4460-8854-E864BD205FD5}"/>
+              </a:ext>
+            </a:extLst>
+          </p:cNvPr>
+          <p:cNvSpPr>
+            <a:spLocks xmlns:a="http://schemas.openxmlformats.org/drawingml/2006/main" noGrp="1"/>
+          </p:cNvSpPr>
+          <p:nvPr/>
+        </p:nvSpPr>
+        <p:spPr>
+          <a:xfrm xmlns:a="http://schemas.openxmlformats.org/drawingml/2006/main">
+            <a:off x="2762250" y="1963635"/>
+            <a:ext cx="266700" cy="1522515"/>
+          </a:xfrm>
+          <a:prstGeom xmlns:a="http://schemas.openxmlformats.org/drawingml/2006/main" prst="roundRect">
+            <a:avLst>
+              <a:gd name="adj" fmla="val 7143"/>
+            </a:avLst>
+          </a:prstGeom>
+          <a:solidFill xmlns:a="http://schemas.openxmlformats.org/drawingml/2006/main">
+            <a:srgbClr val="6F8499"/>
+          </a:solidFill>
+          <a:ln xmlns:a="http://schemas.openxmlformats.org/drawingml/2006/main" w="11430">
+            <a:solidFill>
+              <a:srgbClr val="6F8499"/>
+            </a:solidFill>
+            <a:prstDash val="solid"/>
+          </a:ln>
+        </p:spPr>
+      </p:sp>
+      <p:sp>
+        <p:nvSpPr>
+          <p:cNvPr id="18" name="">
+            <a:extLst xmlns:a="http://schemas.openxmlformats.org/drawingml/2006/main">
+              <a:ext uri="{FF2B5EF4-FFF2-40B4-BE49-F238E27FC236}">
+                <a16:creationId xmlns:a16="http://schemas.microsoft.com/office/drawing/2014/main" id="{4577609A-F15B-4560-9E85-18596AADDF67}"/>
+              </a:ext>
+            </a:extLst>
+          </p:cNvPr>
+          <p:cNvSpPr>
+            <a:spLocks xmlns:a="http://schemas.openxmlformats.org/drawingml/2006/main" noGrp="1"/>
+          </p:cNvSpPr>
+          <p:nvPr/>
+        </p:nvSpPr>
+        <p:spPr>
+          <a:xfrm xmlns:a="http://schemas.openxmlformats.org/drawingml/2006/main">
+            <a:off x="3124200" y="2053303"/>
+            <a:ext cx="266700" cy="1432847"/>
+          </a:xfrm>
+          <a:prstGeom xmlns:a="http://schemas.openxmlformats.org/drawingml/2006/main" prst="roundRect">
+            <a:avLst>
+              <a:gd name="adj" fmla="val 7143"/>
+            </a:avLst>
+          </a:prstGeom>
+          <a:solidFill xmlns:a="http://schemas.openxmlformats.org/drawingml/2006/main">
+            <a:srgbClr val="7BD88F"/>
+          </a:solidFill>
+          <a:ln xmlns:a="http://schemas.openxmlformats.org/drawingml/2006/main" w="11430">
+            <a:solidFill>
+              <a:srgbClr val="7BD88F"/>
+            </a:solidFill>
+            <a:prstDash val="solid"/>
+          </a:ln>
+        </p:spPr>
+      </p:sp>
+      <p:sp>
+        <p:nvSpPr>
+          <p:cNvPr id="19" name="">
+            <a:extLst xmlns:a="http://schemas.openxmlformats.org/drawingml/2006/main">
+              <a:ext uri="{FF2B5EF4-FFF2-40B4-BE49-F238E27FC236}">
+                <a16:creationId xmlns:a16="http://schemas.microsoft.com/office/drawing/2014/main" id="{90E32D4D-D445-4F23-AAAF-ACFA2826E574}"/>
+              </a:ext>
+            </a:extLst>
+          </p:cNvPr>
+          <p:cNvSpPr>
+            <a:spLocks xmlns:a="http://schemas.openxmlformats.org/drawingml/2006/main" noGrp="1"/>
+          </p:cNvSpPr>
+          <p:nvPr/>
+        </p:nvSpPr>
+        <p:spPr>
+          <a:xfrm xmlns:a="http://schemas.openxmlformats.org/drawingml/2006/main">
+            <a:off x="2743200" y="1763610"/>
+            <a:ext cx="514350" cy="171450"/>
+          </a:xfrm>
+          <a:prstGeom xmlns:a="http://schemas.openxmlformats.org/drawingml/2006/main" prst="rect">
+            <a:avLst/>
+          </a:prstGeom>
+          <a:noFill xmlns:a="http://schemas.openxmlformats.org/drawingml/2006/main"/>
+          <a:ln xmlns:a="http://schemas.openxmlformats.org/drawingml/2006/main" w="0">
+            <a:noFill/>
+            <a:prstDash val="solid"/>
+          </a:ln>
+        </p:spPr>
+        <p:txBody>
+          <a:bodyPr xmlns:a="http://schemas.openxmlformats.org/drawingml/2006/main"/>
+          <a:lstStyle xmlns:a="http://schemas.openxmlformats.org/drawingml/2006/main"/>
+          <a:p xmlns:a="http://schemas.openxmlformats.org/drawingml/2006/main">
+            <a:pPr>
+              <a:defRPr sz="900" b="1">
+                <a:solidFill>
+                  <a:srgbClr val="A9BACB"/>
+                </a:solidFill>
+              </a:defRPr>
+            </a:pPr>
+            <a:r>
+              <a:rPr sz="900" b="1">
+                <a:solidFill>
+                  <a:srgbClr val="A9BACB"/>
+                </a:solidFill>
+              </a:rPr>
+              <a:t>$1.18</a:t>
+            </a:r>
+          </a:p>
+        </p:txBody>
+      </p:sp>
+      <p:sp>
+        <p:nvSpPr>
+          <p:cNvPr id="20" name="">
+            <a:extLst xmlns:a="http://schemas.openxmlformats.org/drawingml/2006/main">
+              <a:ext uri="{FF2B5EF4-FFF2-40B4-BE49-F238E27FC236}">
+                <a16:creationId xmlns:a16="http://schemas.microsoft.com/office/drawing/2014/main" id="{D4415E94-FCEC-47C5-BB66-90D72C5F7530}"/>
+              </a:ext>
+            </a:extLst>
+          </p:cNvPr>
+          <p:cNvSpPr>
+            <a:spLocks xmlns:a="http://schemas.openxmlformats.org/drawingml/2006/main" noGrp="1"/>
+          </p:cNvSpPr>
+          <p:nvPr/>
+        </p:nvSpPr>
+        <p:spPr>
+          <a:xfrm xmlns:a="http://schemas.openxmlformats.org/drawingml/2006/main">
+            <a:off x="3067050" y="1853278"/>
+            <a:ext cx="514350" cy="171450"/>
+          </a:xfrm>
+          <a:prstGeom xmlns:a="http://schemas.openxmlformats.org/drawingml/2006/main" prst="rect">
+            <a:avLst/>
+          </a:prstGeom>
+          <a:noFill xmlns:a="http://schemas.openxmlformats.org/drawingml/2006/main"/>
+          <a:ln xmlns:a="http://schemas.openxmlformats.org/drawingml/2006/main" w="0">
+            <a:noFill/>
+            <a:prstDash val="solid"/>
+          </a:ln>
+        </p:spPr>
+        <p:txBody>
+          <a:bodyPr xmlns:a="http://schemas.openxmlformats.org/drawingml/2006/main"/>
+          <a:lstStyle xmlns:a="http://schemas.openxmlformats.org/drawingml/2006/main"/>
+          <a:p xmlns:a="http://schemas.openxmlformats.org/drawingml/2006/main">
+            <a:pPr>
+              <a:defRPr sz="900" b="1">
+                <a:solidFill>
+                  <a:srgbClr val="F4F8FB"/>
+                </a:solidFill>
+              </a:defRPr>
+            </a:pPr>
+            <a:r>
+              <a:rPr sz="900" b="1">
+                <a:solidFill>
+                  <a:srgbClr val="F4F8FB"/>
+                </a:solidFill>
+              </a:rPr>
+              <a:t>$1.11</a:t>
+            </a:r>
+          </a:p>
+        </p:txBody>
+      </p:sp>
+      <p:sp>
+        <p:nvSpPr>
+          <p:cNvPr id="21" name="">
+            <a:extLst xmlns:a="http://schemas.openxmlformats.org/drawingml/2006/main">
+              <a:ext uri="{FF2B5EF4-FFF2-40B4-BE49-F238E27FC236}">
+                <a16:creationId xmlns:a16="http://schemas.microsoft.com/office/drawing/2014/main" id="{3A878F40-D8D5-4546-82A9-4291A888B807}"/>
+              </a:ext>
+            </a:extLst>
+          </p:cNvPr>
+          <p:cNvSpPr>
+            <a:spLocks xmlns:a="http://schemas.openxmlformats.org/drawingml/2006/main" noGrp="1"/>
+          </p:cNvSpPr>
+          <p:nvPr/>
+        </p:nvSpPr>
+        <p:spPr>
+          <a:xfrm xmlns:a="http://schemas.openxmlformats.org/drawingml/2006/main">
+            <a:off x="2724150" y="3619500"/>
+            <a:ext cx="762000" cy="171450"/>
+          </a:xfrm>
+          <a:prstGeom xmlns:a="http://schemas.openxmlformats.org/drawingml/2006/main" prst="rect">
+            <a:avLst/>
+          </a:prstGeom>
+          <a:noFill xmlns:a="http://schemas.openxmlformats.org/drawingml/2006/main"/>
+          <a:ln xmlns:a="http://schemas.openxmlformats.org/drawingml/2006/main" w="0">
+            <a:noFill/>
+            <a:prstDash val="solid"/>
+          </a:ln>
+        </p:spPr>
+        <p:txBody>
+          <a:bodyPr xmlns:a="http://schemas.openxmlformats.org/drawingml/2006/main"/>
+          <a:lstStyle xmlns:a="http://schemas.openxmlformats.org/drawingml/2006/main"/>
+          <a:p xmlns:a="http://schemas.openxmlformats.org/drawingml/2006/main">
+            <a:pPr>
+              <a:defRPr sz="975" b="1">
+                <a:solidFill>
+                  <a:srgbClr val="A9BACB"/>
+                </a:solidFill>
+              </a:defRPr>
+            </a:pPr>
+            <a:r>
+              <a:rPr sz="975" b="1">
+                <a:solidFill>
+                  <a:srgbClr val="A9BACB"/>
+                </a:solidFill>
+              </a:rPr>
+              <a:t>HIGH</a:t>
+            </a:r>
+          </a:p>
+        </p:txBody>
+      </p:sp>
+      <p:sp>
+        <p:nvSpPr>
+          <p:cNvPr id="22" name="">
+            <a:extLst xmlns:a="http://schemas.openxmlformats.org/drawingml/2006/main">
+              <a:ext uri="{FF2B5EF4-FFF2-40B4-BE49-F238E27FC236}">
+                <a16:creationId xmlns:a16="http://schemas.microsoft.com/office/drawing/2014/main" id="{A59539F1-FFBA-48C1-A44F-8CFD1F973407}"/>
+              </a:ext>
+            </a:extLst>
+          </p:cNvPr>
+          <p:cNvSpPr>
+            <a:spLocks xmlns:a="http://schemas.openxmlformats.org/drawingml/2006/main" noGrp="1"/>
+          </p:cNvSpPr>
+          <p:nvPr/>
+        </p:nvSpPr>
+        <p:spPr>
+          <a:xfrm xmlns:a="http://schemas.openxmlformats.org/drawingml/2006/main">
+            <a:off x="914400" y="3486150"/>
+            <a:ext cx="2724150" cy="0"/>
+          </a:xfrm>
+          <a:prstGeom xmlns:a="http://schemas.openxmlformats.org/drawingml/2006/main" prst="line">
+            <a:avLst/>
+          </a:prstGeom>
+          <a:ln xmlns:a="http://schemas.openxmlformats.org/drawingml/2006/main" w="14288">
+            <a:solidFill>
+              <a:srgbClr val="2A4663"/>
+            </a:solidFill>
+            <a:prstDash val="solid"/>
+          </a:ln>
+        </p:spPr>
+      </p:sp>
+      <p:sp>
+        <p:nvSpPr>
+          <p:cNvPr id="23" name="">
+            <a:extLst xmlns:a="http://schemas.openxmlformats.org/drawingml/2006/main">
+              <a:ext uri="{FF2B5EF4-FFF2-40B4-BE49-F238E27FC236}">
+                <a16:creationId xmlns:a16="http://schemas.microsoft.com/office/drawing/2014/main" id="{13CE8B4E-AAB8-4C2F-B134-46B11020DF43}"/>
+              </a:ext>
+            </a:extLst>
+          </p:cNvPr>
+          <p:cNvSpPr>
+            <a:spLocks xmlns:a="http://schemas.openxmlformats.org/drawingml/2006/main" noGrp="1"/>
+          </p:cNvSpPr>
+          <p:nvPr/>
+        </p:nvSpPr>
+        <p:spPr>
+          <a:xfrm xmlns:a="http://schemas.openxmlformats.org/drawingml/2006/main">
+            <a:off x="4400550" y="1333500"/>
+            <a:ext cx="2952750" cy="247650"/>
+          </a:xfrm>
+          <a:prstGeom xmlns:a="http://schemas.openxmlformats.org/drawingml/2006/main" prst="rect">
+            <a:avLst/>
+          </a:prstGeom>
+          <a:noFill xmlns:a="http://schemas.openxmlformats.org/drawingml/2006/main"/>
+          <a:ln xmlns:a="http://schemas.openxmlformats.org/drawingml/2006/main" w="0">
+            <a:noFill/>
+            <a:prstDash val="solid"/>
+          </a:ln>
+        </p:spPr>
+        <p:txBody>
+          <a:bodyPr xmlns:a="http://schemas.openxmlformats.org/drawingml/2006/main"/>
+          <a:lstStyle xmlns:a="http://schemas.openxmlformats.org/drawingml/2006/main"/>
+          <a:p xmlns:a="http://schemas.openxmlformats.org/drawingml/2006/main">
+            <a:pPr>
+              <a:defRPr sz="1875" b="1">
+                <a:solidFill>
+                  <a:srgbClr val="F4F8FB"/>
+                </a:solidFill>
+              </a:defRPr>
+            </a:pPr>
+            <a:r>
+              <a:rPr sz="1875" b="1">
+                <a:solidFill>
+                  <a:srgbClr val="F4F8FB"/>
+                </a:solidFill>
+              </a:rPr>
+              <a:t>Model roles</a:t>
+            </a:r>
+          </a:p>
+        </p:txBody>
+      </p:sp>
+      <p:sp>
+        <p:nvSpPr>
+          <p:cNvPr id="24" name="">
+            <a:extLst xmlns:a="http://schemas.openxmlformats.org/drawingml/2006/main">
+              <a:ext uri="{FF2B5EF4-FFF2-40B4-BE49-F238E27FC236}">
+                <a16:creationId xmlns:a16="http://schemas.microsoft.com/office/drawing/2014/main" id="{D598E1B4-ECAE-47D7-8427-B879084C5BED}"/>
+              </a:ext>
+            </a:extLst>
+          </p:cNvPr>
+          <p:cNvSpPr>
+            <a:spLocks xmlns:a="http://schemas.openxmlformats.org/drawingml/2006/main" noGrp="1"/>
+          </p:cNvSpPr>
+          <p:nvPr/>
+        </p:nvSpPr>
+        <p:spPr>
+          <a:xfrm xmlns:a="http://schemas.openxmlformats.org/drawingml/2006/main">
+            <a:off x="6162675" y="1657350"/>
+            <a:ext cx="809625" cy="171450"/>
+          </a:xfrm>
+          <a:prstGeom xmlns:a="http://schemas.openxmlformats.org/drawingml/2006/main" prst="rect">
+            <a:avLst/>
+          </a:prstGeom>
+          <a:noFill xmlns:a="http://schemas.openxmlformats.org/drawingml/2006/main"/>
+          <a:ln xmlns:a="http://schemas.openxmlformats.org/drawingml/2006/main" w="0">
+            <a:noFill/>
+            <a:prstDash val="solid"/>
+          </a:ln>
+        </p:spPr>
+        <p:txBody>
+          <a:bodyPr xmlns:a="http://schemas.openxmlformats.org/drawingml/2006/main"/>
+          <a:lstStyle xmlns:a="http://schemas.openxmlformats.org/drawingml/2006/main"/>
+          <a:p xmlns:a="http://schemas.openxmlformats.org/drawingml/2006/main">
+            <a:pPr>
+              <a:defRPr sz="900" b="1">
+                <a:solidFill>
+                  <a:srgbClr val="A9BACB"/>
+                </a:solidFill>
+              </a:defRPr>
+            </a:pPr>
+            <a:r>
+              <a:rPr sz="900" b="1">
+                <a:solidFill>
+                  <a:srgbClr val="A9BACB"/>
+                </a:solidFill>
+              </a:rPr>
+              <a:t>Pre-AURA</a:t>
+            </a:r>
+          </a:p>
+        </p:txBody>
+      </p:sp>
+      <p:sp>
+        <p:nvSpPr>
+          <p:cNvPr id="25" name="">
+            <a:extLst xmlns:a="http://schemas.openxmlformats.org/drawingml/2006/main">
+              <a:ext uri="{FF2B5EF4-FFF2-40B4-BE49-F238E27FC236}">
+                <a16:creationId xmlns:a16="http://schemas.microsoft.com/office/drawing/2014/main" id="{39B0FDD0-8252-4867-A701-A6EEEAE79725}"/>
+              </a:ext>
+            </a:extLst>
+          </p:cNvPr>
+          <p:cNvSpPr>
+            <a:spLocks xmlns:a="http://schemas.openxmlformats.org/drawingml/2006/main" noGrp="1"/>
+          </p:cNvSpPr>
+          <p:nvPr/>
+        </p:nvSpPr>
+        <p:spPr>
+          <a:xfrm xmlns:a="http://schemas.openxmlformats.org/drawingml/2006/main">
+            <a:off x="6972300" y="1657350"/>
+            <a:ext cx="571500" cy="171450"/>
+          </a:xfrm>
+          <a:prstGeom xmlns:a="http://schemas.openxmlformats.org/drawingml/2006/main" prst="rect">
+            <a:avLst/>
+          </a:prstGeom>
+          <a:noFill xmlns:a="http://schemas.openxmlformats.org/drawingml/2006/main"/>
+          <a:ln xmlns:a="http://schemas.openxmlformats.org/drawingml/2006/main" w="0">
+            <a:noFill/>
+            <a:prstDash val="solid"/>
+          </a:ln>
+        </p:spPr>
+        <p:txBody>
+          <a:bodyPr xmlns:a="http://schemas.openxmlformats.org/drawingml/2006/main"/>
+          <a:lstStyle xmlns:a="http://schemas.openxmlformats.org/drawingml/2006/main"/>
+          <a:p xmlns:a="http://schemas.openxmlformats.org/drawingml/2006/main">
+            <a:pPr>
+              <a:defRPr sz="900" b="1">
+                <a:solidFill>
+                  <a:srgbClr val="4CC9F0"/>
+                </a:solidFill>
+              </a:defRPr>
+            </a:pPr>
+            <a:r>
+              <a:rPr sz="900" b="1">
+                <a:solidFill>
+                  <a:srgbClr val="4CC9F0"/>
+                </a:solidFill>
+              </a:rPr>
+              <a:t>AURA</a:t>
+            </a:r>
+          </a:p>
+        </p:txBody>
+      </p:sp>
+      <p:sp>
+        <p:nvSpPr>
+          <p:cNvPr id="26" name="">
+            <a:extLst xmlns:a="http://schemas.openxmlformats.org/drawingml/2006/main">
+              <a:ext uri="{FF2B5EF4-FFF2-40B4-BE49-F238E27FC236}">
+                <a16:creationId xmlns:a16="http://schemas.microsoft.com/office/drawing/2014/main" id="{EE4AB42D-2A53-42F5-9D51-C115FAC7A98B}"/>
+              </a:ext>
+            </a:extLst>
+          </p:cNvPr>
+          <p:cNvSpPr>
+            <a:spLocks xmlns:a="http://schemas.openxmlformats.org/drawingml/2006/main" noGrp="1"/>
+          </p:cNvSpPr>
+          <p:nvPr/>
+        </p:nvSpPr>
+        <p:spPr>
+          <a:xfrm xmlns:a="http://schemas.openxmlformats.org/drawingml/2006/main">
+            <a:off x="4667250" y="2014105"/>
+            <a:ext cx="266700" cy="1472045"/>
+          </a:xfrm>
+          <a:prstGeom xmlns:a="http://schemas.openxmlformats.org/drawingml/2006/main" prst="roundRect">
+            <a:avLst>
+              <a:gd name="adj" fmla="val 7143"/>
+            </a:avLst>
+          </a:prstGeom>
+          <a:solidFill xmlns:a="http://schemas.openxmlformats.org/drawingml/2006/main">
+            <a:srgbClr val="6F8499"/>
+          </a:solidFill>
+          <a:ln xmlns:a="http://schemas.openxmlformats.org/drawingml/2006/main" w="11430">
+            <a:solidFill>
+              <a:srgbClr val="6F8499"/>
+            </a:solidFill>
+            <a:prstDash val="solid"/>
+          </a:ln>
+        </p:spPr>
+      </p:sp>
+      <p:sp>
+        <p:nvSpPr>
+          <p:cNvPr id="27" name="">
+            <a:extLst xmlns:a="http://schemas.openxmlformats.org/drawingml/2006/main">
+              <a:ext uri="{FF2B5EF4-FFF2-40B4-BE49-F238E27FC236}">
+                <a16:creationId xmlns:a16="http://schemas.microsoft.com/office/drawing/2014/main" id="{2C18BE20-0558-4AB8-8B6F-F6564075145E}"/>
+              </a:ext>
+            </a:extLst>
+          </p:cNvPr>
+          <p:cNvSpPr>
+            <a:spLocks xmlns:a="http://schemas.openxmlformats.org/drawingml/2006/main" noGrp="1"/>
+          </p:cNvSpPr>
+          <p:nvPr/>
+        </p:nvSpPr>
+        <p:spPr>
+          <a:xfrm xmlns:a="http://schemas.openxmlformats.org/drawingml/2006/main">
+            <a:off x="5029200" y="2897332"/>
+            <a:ext cx="266700" cy="588818"/>
+          </a:xfrm>
+          <a:prstGeom xmlns:a="http://schemas.openxmlformats.org/drawingml/2006/main" prst="roundRect">
+            <a:avLst>
+              <a:gd name="adj" fmla="val 7143"/>
+            </a:avLst>
+          </a:prstGeom>
+          <a:solidFill xmlns:a="http://schemas.openxmlformats.org/drawingml/2006/main">
+            <a:srgbClr val="4CC9F0"/>
+          </a:solidFill>
+          <a:ln xmlns:a="http://schemas.openxmlformats.org/drawingml/2006/main" w="11430">
+            <a:solidFill>
+              <a:srgbClr val="4CC9F0"/>
+            </a:solidFill>
+            <a:prstDash val="solid"/>
+          </a:ln>
+        </p:spPr>
+      </p:sp>
+      <p:sp>
+        <p:nvSpPr>
+          <p:cNvPr id="28" name="">
+            <a:extLst xmlns:a="http://schemas.openxmlformats.org/drawingml/2006/main">
+              <a:ext uri="{FF2B5EF4-FFF2-40B4-BE49-F238E27FC236}">
+                <a16:creationId xmlns:a16="http://schemas.microsoft.com/office/drawing/2014/main" id="{481E0DB4-0EC4-4935-9C9B-D37C8EBD301D}"/>
+              </a:ext>
+            </a:extLst>
+          </p:cNvPr>
+          <p:cNvSpPr>
+            <a:spLocks xmlns:a="http://schemas.openxmlformats.org/drawingml/2006/main" noGrp="1"/>
+          </p:cNvSpPr>
+          <p:nvPr/>
+        </p:nvSpPr>
+        <p:spPr>
+          <a:xfrm xmlns:a="http://schemas.openxmlformats.org/drawingml/2006/main">
+            <a:off x="4648200" y="1814080"/>
+            <a:ext cx="514350" cy="171450"/>
+          </a:xfrm>
+          <a:prstGeom xmlns:a="http://schemas.openxmlformats.org/drawingml/2006/main" prst="rect">
+            <a:avLst/>
+          </a:prstGeom>
+          <a:noFill xmlns:a="http://schemas.openxmlformats.org/drawingml/2006/main"/>
+          <a:ln xmlns:a="http://schemas.openxmlformats.org/drawingml/2006/main" w="0">
+            <a:noFill/>
+            <a:prstDash val="solid"/>
+          </a:ln>
+        </p:spPr>
+        <p:txBody>
+          <a:bodyPr xmlns:a="http://schemas.openxmlformats.org/drawingml/2006/main"/>
+          <a:lstStyle xmlns:a="http://schemas.openxmlformats.org/drawingml/2006/main"/>
+          <a:p xmlns:a="http://schemas.openxmlformats.org/drawingml/2006/main">
+            <a:pPr>
+              <a:defRPr sz="900" b="1">
+                <a:solidFill>
+                  <a:srgbClr val="A9BACB"/>
+                </a:solidFill>
+              </a:defRPr>
+            </a:pPr>
+            <a:r>
+              <a:rPr sz="900" b="1">
+                <a:solidFill>
+                  <a:srgbClr val="A9BACB"/>
+                </a:solidFill>
+              </a:rPr>
+              <a:t>5</a:t>
+            </a:r>
+          </a:p>
+        </p:txBody>
+      </p:sp>
+      <p:sp>
+        <p:nvSpPr>
+          <p:cNvPr id="29" name="">
+            <a:extLst xmlns:a="http://schemas.openxmlformats.org/drawingml/2006/main">
+              <a:ext uri="{FF2B5EF4-FFF2-40B4-BE49-F238E27FC236}">
+                <a16:creationId xmlns:a16="http://schemas.microsoft.com/office/drawing/2014/main" id="{48F5315A-FDC4-4B08-B4BA-1992F02060DB}"/>
+              </a:ext>
+            </a:extLst>
+          </p:cNvPr>
+          <p:cNvSpPr>
+            <a:spLocks xmlns:a="http://schemas.openxmlformats.org/drawingml/2006/main" noGrp="1"/>
+          </p:cNvSpPr>
+          <p:nvPr/>
+        </p:nvSpPr>
+        <p:spPr>
+          <a:xfrm xmlns:a="http://schemas.openxmlformats.org/drawingml/2006/main">
+            <a:off x="4972050" y="2697307"/>
+            <a:ext cx="514350" cy="171450"/>
+          </a:xfrm>
+          <a:prstGeom xmlns:a="http://schemas.openxmlformats.org/drawingml/2006/main" prst="rect">
+            <a:avLst/>
+          </a:prstGeom>
+          <a:noFill xmlns:a="http://schemas.openxmlformats.org/drawingml/2006/main"/>
+          <a:ln xmlns:a="http://schemas.openxmlformats.org/drawingml/2006/main" w="0">
+            <a:noFill/>
+            <a:prstDash val="solid"/>
+          </a:ln>
+        </p:spPr>
+        <p:txBody>
+          <a:bodyPr xmlns:a="http://schemas.openxmlformats.org/drawingml/2006/main"/>
+          <a:lstStyle xmlns:a="http://schemas.openxmlformats.org/drawingml/2006/main"/>
+          <a:p xmlns:a="http://schemas.openxmlformats.org/drawingml/2006/main">
+            <a:pPr>
+              <a:defRPr sz="900" b="1">
+                <a:solidFill>
+                  <a:srgbClr val="F4F8FB"/>
+                </a:solidFill>
+              </a:defRPr>
+            </a:pPr>
+            <a:r>
+              <a:rPr sz="900" b="1">
+                <a:solidFill>
+                  <a:srgbClr val="F4F8FB"/>
+                </a:solidFill>
+              </a:rPr>
+              <a:t>2</a:t>
+            </a:r>
+          </a:p>
+        </p:txBody>
+      </p:sp>
+      <p:sp>
+        <p:nvSpPr>
+          <p:cNvPr id="30" name="">
+            <a:extLst xmlns:a="http://schemas.openxmlformats.org/drawingml/2006/main">
+              <a:ext uri="{FF2B5EF4-FFF2-40B4-BE49-F238E27FC236}">
+                <a16:creationId xmlns:a16="http://schemas.microsoft.com/office/drawing/2014/main" id="{EEF3FF72-5181-4A29-A7EE-3191D630943A}"/>
+              </a:ext>
+            </a:extLst>
+          </p:cNvPr>
+          <p:cNvSpPr>
+            <a:spLocks xmlns:a="http://schemas.openxmlformats.org/drawingml/2006/main" noGrp="1"/>
+          </p:cNvSpPr>
+          <p:nvPr/>
+        </p:nvSpPr>
+        <p:spPr>
+          <a:xfrm xmlns:a="http://schemas.openxmlformats.org/drawingml/2006/main">
+            <a:off x="4629150" y="3619500"/>
+            <a:ext cx="762000" cy="171450"/>
+          </a:xfrm>
+          <a:prstGeom xmlns:a="http://schemas.openxmlformats.org/drawingml/2006/main" prst="rect">
+            <a:avLst/>
+          </a:prstGeom>
+          <a:noFill xmlns:a="http://schemas.openxmlformats.org/drawingml/2006/main"/>
+          <a:ln xmlns:a="http://schemas.openxmlformats.org/drawingml/2006/main" w="0">
+            <a:noFill/>
+            <a:prstDash val="solid"/>
+          </a:ln>
+        </p:spPr>
+        <p:txBody>
+          <a:bodyPr xmlns:a="http://schemas.openxmlformats.org/drawingml/2006/main"/>
+          <a:lstStyle xmlns:a="http://schemas.openxmlformats.org/drawingml/2006/main"/>
+          <a:p xmlns:a="http://schemas.openxmlformats.org/drawingml/2006/main">
+            <a:pPr>
+              <a:defRPr sz="975" b="1">
+                <a:solidFill>
+                  <a:srgbClr val="A9BACB"/>
+                </a:solidFill>
+              </a:defRPr>
+            </a:pPr>
+            <a:r>
+              <a:rPr sz="975" b="1">
+                <a:solidFill>
+                  <a:srgbClr val="A9BACB"/>
+                </a:solidFill>
+              </a:rPr>
+              <a:t>LOW</a:t>
+            </a:r>
+          </a:p>
+        </p:txBody>
+      </p:sp>
+      <p:sp>
+        <p:nvSpPr>
+          <p:cNvPr id="31" name="">
+            <a:extLst xmlns:a="http://schemas.openxmlformats.org/drawingml/2006/main">
+              <a:ext uri="{FF2B5EF4-FFF2-40B4-BE49-F238E27FC236}">
+                <a16:creationId xmlns:a16="http://schemas.microsoft.com/office/drawing/2014/main" id="{605D2C7D-9280-4822-9226-F46E38ADEAEF}"/>
+              </a:ext>
+            </a:extLst>
+          </p:cNvPr>
+          <p:cNvSpPr>
+            <a:spLocks xmlns:a="http://schemas.openxmlformats.org/drawingml/2006/main" noGrp="1"/>
+          </p:cNvSpPr>
+          <p:nvPr/>
+        </p:nvSpPr>
+        <p:spPr>
+          <a:xfrm xmlns:a="http://schemas.openxmlformats.org/drawingml/2006/main">
+            <a:off x="5543550" y="2014105"/>
+            <a:ext cx="266700" cy="1472045"/>
+          </a:xfrm>
+          <a:prstGeom xmlns:a="http://schemas.openxmlformats.org/drawingml/2006/main" prst="roundRect">
+            <a:avLst>
+              <a:gd name="adj" fmla="val 7143"/>
+            </a:avLst>
+          </a:prstGeom>
+          <a:solidFill xmlns:a="http://schemas.openxmlformats.org/drawingml/2006/main">
+            <a:srgbClr val="6F8499"/>
+          </a:solidFill>
+          <a:ln xmlns:a="http://schemas.openxmlformats.org/drawingml/2006/main" w="11430">
+            <a:solidFill>
+              <a:srgbClr val="6F8499"/>
+            </a:solidFill>
+            <a:prstDash val="solid"/>
+          </a:ln>
+        </p:spPr>
+      </p:sp>
+      <p:sp>
+        <p:nvSpPr>
+          <p:cNvPr id="32" name="">
+            <a:extLst xmlns:a="http://schemas.openxmlformats.org/drawingml/2006/main">
+              <a:ext uri="{FF2B5EF4-FFF2-40B4-BE49-F238E27FC236}">
+                <a16:creationId xmlns:a16="http://schemas.microsoft.com/office/drawing/2014/main" id="{89668880-CEF2-4EF0-8327-1524BDEE89E7}"/>
+              </a:ext>
+            </a:extLst>
+          </p:cNvPr>
+          <p:cNvSpPr>
+            <a:spLocks xmlns:a="http://schemas.openxmlformats.org/drawingml/2006/main" noGrp="1"/>
+          </p:cNvSpPr>
+          <p:nvPr/>
+        </p:nvSpPr>
+        <p:spPr>
+          <a:xfrm xmlns:a="http://schemas.openxmlformats.org/drawingml/2006/main">
+            <a:off x="5905500" y="2602923"/>
+            <a:ext cx="266700" cy="883227"/>
+          </a:xfrm>
+          <a:prstGeom xmlns:a="http://schemas.openxmlformats.org/drawingml/2006/main" prst="roundRect">
+            <a:avLst>
+              <a:gd name="adj" fmla="val 7143"/>
+            </a:avLst>
+          </a:prstGeom>
+          <a:solidFill xmlns:a="http://schemas.openxmlformats.org/drawingml/2006/main">
+            <a:srgbClr val="4CC9F0"/>
+          </a:solidFill>
+          <a:ln xmlns:a="http://schemas.openxmlformats.org/drawingml/2006/main" w="11430">
+            <a:solidFill>
+              <a:srgbClr val="4CC9F0"/>
+            </a:solidFill>
+            <a:prstDash val="solid"/>
+          </a:ln>
+        </p:spPr>
+      </p:sp>
+      <p:sp>
+        <p:nvSpPr>
+          <p:cNvPr id="33" name="">
+            <a:extLst xmlns:a="http://schemas.openxmlformats.org/drawingml/2006/main">
+              <a:ext uri="{FF2B5EF4-FFF2-40B4-BE49-F238E27FC236}">
+                <a16:creationId xmlns:a16="http://schemas.microsoft.com/office/drawing/2014/main" id="{B05E2942-4584-4CE0-93F8-F87AA599FA80}"/>
+              </a:ext>
+            </a:extLst>
+          </p:cNvPr>
+          <p:cNvSpPr>
+            <a:spLocks xmlns:a="http://schemas.openxmlformats.org/drawingml/2006/main" noGrp="1"/>
+          </p:cNvSpPr>
+          <p:nvPr/>
+        </p:nvSpPr>
+        <p:spPr>
+          <a:xfrm xmlns:a="http://schemas.openxmlformats.org/drawingml/2006/main">
+            <a:off x="5524500" y="1814080"/>
+            <a:ext cx="514350" cy="171450"/>
+          </a:xfrm>
+          <a:prstGeom xmlns:a="http://schemas.openxmlformats.org/drawingml/2006/main" prst="rect">
+            <a:avLst/>
+          </a:prstGeom>
+          <a:noFill xmlns:a="http://schemas.openxmlformats.org/drawingml/2006/main"/>
+          <a:ln xmlns:a="http://schemas.openxmlformats.org/drawingml/2006/main" w="0">
+            <a:noFill/>
+            <a:prstDash val="solid"/>
+          </a:ln>
+        </p:spPr>
+        <p:txBody>
+          <a:bodyPr xmlns:a="http://schemas.openxmlformats.org/drawingml/2006/main"/>
+          <a:lstStyle xmlns:a="http://schemas.openxmlformats.org/drawingml/2006/main"/>
+          <a:p xmlns:a="http://schemas.openxmlformats.org/drawingml/2006/main">
+            <a:pPr>
+              <a:defRPr sz="900" b="1">
+                <a:solidFill>
+                  <a:srgbClr val="A9BACB"/>
+                </a:solidFill>
+              </a:defRPr>
+            </a:pPr>
+            <a:r>
+              <a:rPr sz="900" b="1">
+                <a:solidFill>
+                  <a:srgbClr val="A9BACB"/>
+                </a:solidFill>
+              </a:rPr>
+              <a:t>5</a:t>
+            </a:r>
+          </a:p>
+        </p:txBody>
+      </p:sp>
+      <p:sp>
+        <p:nvSpPr>
+          <p:cNvPr id="34" name="">
+            <a:extLst xmlns:a="http://schemas.openxmlformats.org/drawingml/2006/main">
+              <a:ext uri="{FF2B5EF4-FFF2-40B4-BE49-F238E27FC236}">
+                <a16:creationId xmlns:a16="http://schemas.microsoft.com/office/drawing/2014/main" id="{1374FBED-BC0D-40FA-A4F3-21CDFDB2C6C6}"/>
+              </a:ext>
+            </a:extLst>
+          </p:cNvPr>
+          <p:cNvSpPr>
+            <a:spLocks xmlns:a="http://schemas.openxmlformats.org/drawingml/2006/main" noGrp="1"/>
+          </p:cNvSpPr>
+          <p:nvPr/>
+        </p:nvSpPr>
+        <p:spPr>
+          <a:xfrm xmlns:a="http://schemas.openxmlformats.org/drawingml/2006/main">
+            <a:off x="5848350" y="2402898"/>
+            <a:ext cx="514350" cy="171450"/>
+          </a:xfrm>
+          <a:prstGeom xmlns:a="http://schemas.openxmlformats.org/drawingml/2006/main" prst="rect">
+            <a:avLst/>
+          </a:prstGeom>
+          <a:noFill xmlns:a="http://schemas.openxmlformats.org/drawingml/2006/main"/>
+          <a:ln xmlns:a="http://schemas.openxmlformats.org/drawingml/2006/main" w="0">
+            <a:noFill/>
+            <a:prstDash val="solid"/>
+          </a:ln>
+        </p:spPr>
+        <p:txBody>
+          <a:bodyPr xmlns:a="http://schemas.openxmlformats.org/drawingml/2006/main"/>
+          <a:lstStyle xmlns:a="http://schemas.openxmlformats.org/drawingml/2006/main"/>
+          <a:p xmlns:a="http://schemas.openxmlformats.org/drawingml/2006/main">
+            <a:pPr>
+              <a:defRPr sz="900" b="1">
+                <a:solidFill>
+                  <a:srgbClr val="F4F8FB"/>
+                </a:solidFill>
+              </a:defRPr>
+            </a:pPr>
+            <a:r>
+              <a:rPr sz="900" b="1">
+                <a:solidFill>
+                  <a:srgbClr val="F4F8FB"/>
+                </a:solidFill>
+              </a:rPr>
+              <a:t>3</a:t>
+            </a:r>
+          </a:p>
+        </p:txBody>
+      </p:sp>
+      <p:sp>
+        <p:nvSpPr>
+          <p:cNvPr id="35" name="">
+            <a:extLst xmlns:a="http://schemas.openxmlformats.org/drawingml/2006/main">
+              <a:ext uri="{FF2B5EF4-FFF2-40B4-BE49-F238E27FC236}">
+                <a16:creationId xmlns:a16="http://schemas.microsoft.com/office/drawing/2014/main" id="{F0C8DB93-E3A3-4AE8-8B2B-C20A0BD19F08}"/>
+              </a:ext>
+            </a:extLst>
+          </p:cNvPr>
+          <p:cNvSpPr>
+            <a:spLocks xmlns:a="http://schemas.openxmlformats.org/drawingml/2006/main" noGrp="1"/>
+          </p:cNvSpPr>
+          <p:nvPr/>
+        </p:nvSpPr>
+        <p:spPr>
+          <a:xfrm xmlns:a="http://schemas.openxmlformats.org/drawingml/2006/main">
+            <a:off x="5505450" y="3619500"/>
+            <a:ext cx="762000" cy="171450"/>
+          </a:xfrm>
+          <a:prstGeom xmlns:a="http://schemas.openxmlformats.org/drawingml/2006/main" prst="rect">
+            <a:avLst/>
+          </a:prstGeom>
+          <a:noFill xmlns:a="http://schemas.openxmlformats.org/drawingml/2006/main"/>
+          <a:ln xmlns:a="http://schemas.openxmlformats.org/drawingml/2006/main" w="0">
+            <a:noFill/>
+            <a:prstDash val="solid"/>
+          </a:ln>
+        </p:spPr>
+        <p:txBody>
+          <a:bodyPr xmlns:a="http://schemas.openxmlformats.org/drawingml/2006/main"/>
+          <a:lstStyle xmlns:a="http://schemas.openxmlformats.org/drawingml/2006/main"/>
+          <a:p xmlns:a="http://schemas.openxmlformats.org/drawingml/2006/main">
+            <a:pPr>
+              <a:defRPr sz="975" b="1">
+                <a:solidFill>
+                  <a:srgbClr val="A9BACB"/>
+                </a:solidFill>
+              </a:defRPr>
+            </a:pPr>
+            <a:r>
+              <a:rPr sz="975" b="1">
+                <a:solidFill>
+                  <a:srgbClr val="A9BACB"/>
+                </a:solidFill>
+              </a:rPr>
+              <a:t>MED</a:t>
+            </a:r>
+          </a:p>
+        </p:txBody>
+      </p:sp>
+      <p:sp>
+        <p:nvSpPr>
+          <p:cNvPr id="36" name="">
+            <a:extLst xmlns:a="http://schemas.openxmlformats.org/drawingml/2006/main">
+              <a:ext uri="{FF2B5EF4-FFF2-40B4-BE49-F238E27FC236}">
+                <a16:creationId xmlns:a16="http://schemas.microsoft.com/office/drawing/2014/main" id="{C9115E4B-DB01-417D-9BEB-8EF347B6B15D}"/>
+              </a:ext>
+            </a:extLst>
+          </p:cNvPr>
+          <p:cNvSpPr>
+            <a:spLocks xmlns:a="http://schemas.openxmlformats.org/drawingml/2006/main" noGrp="1"/>
+          </p:cNvSpPr>
+          <p:nvPr/>
+        </p:nvSpPr>
+        <p:spPr>
+          <a:xfrm xmlns:a="http://schemas.openxmlformats.org/drawingml/2006/main">
+            <a:off x="6419850" y="2014105"/>
+            <a:ext cx="266700" cy="1472045"/>
+          </a:xfrm>
+          <a:prstGeom xmlns:a="http://schemas.openxmlformats.org/drawingml/2006/main" prst="roundRect">
+            <a:avLst>
+              <a:gd name="adj" fmla="val 7143"/>
+            </a:avLst>
+          </a:prstGeom>
+          <a:solidFill xmlns:a="http://schemas.openxmlformats.org/drawingml/2006/main">
+            <a:srgbClr val="6F8499"/>
+          </a:solidFill>
+          <a:ln xmlns:a="http://schemas.openxmlformats.org/drawingml/2006/main" w="11430">
+            <a:solidFill>
+              <a:srgbClr val="6F8499"/>
+            </a:solidFill>
+            <a:prstDash val="solid"/>
+          </a:ln>
+        </p:spPr>
+      </p:sp>
+      <p:sp>
+        <p:nvSpPr>
+          <p:cNvPr id="37" name="">
+            <a:extLst xmlns:a="http://schemas.openxmlformats.org/drawingml/2006/main">
+              <a:ext uri="{FF2B5EF4-FFF2-40B4-BE49-F238E27FC236}">
+                <a16:creationId xmlns:a16="http://schemas.microsoft.com/office/drawing/2014/main" id="{368AC10C-AE81-4768-ADD9-5AADAA13D3E2}"/>
+              </a:ext>
+            </a:extLst>
+          </p:cNvPr>
+          <p:cNvSpPr>
+            <a:spLocks xmlns:a="http://schemas.openxmlformats.org/drawingml/2006/main" noGrp="1"/>
+          </p:cNvSpPr>
+          <p:nvPr/>
+        </p:nvSpPr>
+        <p:spPr>
+          <a:xfrm xmlns:a="http://schemas.openxmlformats.org/drawingml/2006/main">
+            <a:off x="6781800" y="2014105"/>
+            <a:ext cx="266700" cy="1472045"/>
+          </a:xfrm>
+          <a:prstGeom xmlns:a="http://schemas.openxmlformats.org/drawingml/2006/main" prst="roundRect">
+            <a:avLst>
+              <a:gd name="adj" fmla="val 7143"/>
+            </a:avLst>
+          </a:prstGeom>
+          <a:solidFill xmlns:a="http://schemas.openxmlformats.org/drawingml/2006/main">
+            <a:srgbClr val="4CC9F0"/>
+          </a:solidFill>
+          <a:ln xmlns:a="http://schemas.openxmlformats.org/drawingml/2006/main" w="11430">
+            <a:solidFill>
+              <a:srgbClr val="4CC9F0"/>
+            </a:solidFill>
+            <a:prstDash val="solid"/>
+          </a:ln>
+        </p:spPr>
+      </p:sp>
+      <p:sp>
+        <p:nvSpPr>
+          <p:cNvPr id="38" name="">
+            <a:extLst xmlns:a="http://schemas.openxmlformats.org/drawingml/2006/main">
+              <a:ext uri="{FF2B5EF4-FFF2-40B4-BE49-F238E27FC236}">
+                <a16:creationId xmlns:a16="http://schemas.microsoft.com/office/drawing/2014/main" id="{DA79B6D6-E3E5-419E-B924-559162DDF160}"/>
+              </a:ext>
+            </a:extLst>
+          </p:cNvPr>
+          <p:cNvSpPr>
+            <a:spLocks xmlns:a="http://schemas.openxmlformats.org/drawingml/2006/main" noGrp="1"/>
+          </p:cNvSpPr>
+          <p:nvPr/>
+        </p:nvSpPr>
+        <p:spPr>
+          <a:xfrm xmlns:a="http://schemas.openxmlformats.org/drawingml/2006/main">
+            <a:off x="6400800" y="1814080"/>
+            <a:ext cx="514350" cy="171450"/>
+          </a:xfrm>
+          <a:prstGeom xmlns:a="http://schemas.openxmlformats.org/drawingml/2006/main" prst="rect">
+            <a:avLst/>
+          </a:prstGeom>
+          <a:noFill xmlns:a="http://schemas.openxmlformats.org/drawingml/2006/main"/>
+          <a:ln xmlns:a="http://schemas.openxmlformats.org/drawingml/2006/main" w="0">
+            <a:noFill/>
+            <a:prstDash val="solid"/>
+          </a:ln>
+        </p:spPr>
+        <p:txBody>
+          <a:bodyPr xmlns:a="http://schemas.openxmlformats.org/drawingml/2006/main"/>
+          <a:lstStyle xmlns:a="http://schemas.openxmlformats.org/drawingml/2006/main"/>
+          <a:p xmlns:a="http://schemas.openxmlformats.org/drawingml/2006/main">
+            <a:pPr>
+              <a:defRPr sz="900" b="1">
+                <a:solidFill>
+                  <a:srgbClr val="A9BACB"/>
+                </a:solidFill>
+              </a:defRPr>
+            </a:pPr>
+            <a:r>
+              <a:rPr sz="900" b="1">
+                <a:solidFill>
+                  <a:srgbClr val="A9BACB"/>
+                </a:solidFill>
+              </a:rPr>
+              <a:t>5</a:t>
+            </a:r>
+          </a:p>
+        </p:txBody>
+      </p:sp>
+      <p:sp>
+        <p:nvSpPr>
+          <p:cNvPr id="39" name="">
+            <a:extLst xmlns:a="http://schemas.openxmlformats.org/drawingml/2006/main">
+              <a:ext uri="{FF2B5EF4-FFF2-40B4-BE49-F238E27FC236}">
+                <a16:creationId xmlns:a16="http://schemas.microsoft.com/office/drawing/2014/main" id="{BE21B1F4-24B8-4027-8EC5-9FC268E56D35}"/>
+              </a:ext>
+            </a:extLst>
+          </p:cNvPr>
+          <p:cNvSpPr>
+            <a:spLocks xmlns:a="http://schemas.openxmlformats.org/drawingml/2006/main" noGrp="1"/>
+          </p:cNvSpPr>
+          <p:nvPr/>
+        </p:nvSpPr>
+        <p:spPr>
+          <a:xfrm xmlns:a="http://schemas.openxmlformats.org/drawingml/2006/main">
+            <a:off x="6724650" y="1814080"/>
+            <a:ext cx="514350" cy="171450"/>
+          </a:xfrm>
+          <a:prstGeom xmlns:a="http://schemas.openxmlformats.org/drawingml/2006/main" prst="rect">
+            <a:avLst/>
+          </a:prstGeom>
+          <a:noFill xmlns:a="http://schemas.openxmlformats.org/drawingml/2006/main"/>
+          <a:ln xmlns:a="http://schemas.openxmlformats.org/drawingml/2006/main" w="0">
+            <a:noFill/>
+            <a:prstDash val="solid"/>
+          </a:ln>
+        </p:spPr>
+        <p:txBody>
+          <a:bodyPr xmlns:a="http://schemas.openxmlformats.org/drawingml/2006/main"/>
+          <a:lstStyle xmlns:a="http://schemas.openxmlformats.org/drawingml/2006/main"/>
+          <a:p xmlns:a="http://schemas.openxmlformats.org/drawingml/2006/main">
+            <a:pPr>
+              <a:defRPr sz="900" b="1">
+                <a:solidFill>
+                  <a:srgbClr val="F4F8FB"/>
+                </a:solidFill>
+              </a:defRPr>
+            </a:pPr>
+            <a:r>
+              <a:rPr sz="900" b="1">
+                <a:solidFill>
+                  <a:srgbClr val="F4F8FB"/>
+                </a:solidFill>
+              </a:rPr>
+              <a:t>5</a:t>
+            </a:r>
+          </a:p>
+        </p:txBody>
+      </p:sp>
+      <p:sp>
+        <p:nvSpPr>
+          <p:cNvPr id="40" name="">
+            <a:extLst xmlns:a="http://schemas.openxmlformats.org/drawingml/2006/main">
+              <a:ext uri="{FF2B5EF4-FFF2-40B4-BE49-F238E27FC236}">
+                <a16:creationId xmlns:a16="http://schemas.microsoft.com/office/drawing/2014/main" id="{C83F5662-D5CE-44FB-8CED-83824044DCBD}"/>
+              </a:ext>
+            </a:extLst>
+          </p:cNvPr>
+          <p:cNvSpPr>
+            <a:spLocks xmlns:a="http://schemas.openxmlformats.org/drawingml/2006/main" noGrp="1"/>
+          </p:cNvSpPr>
+          <p:nvPr/>
+        </p:nvSpPr>
+        <p:spPr>
+          <a:xfrm xmlns:a="http://schemas.openxmlformats.org/drawingml/2006/main">
+            <a:off x="6381750" y="3619500"/>
+            <a:ext cx="762000" cy="171450"/>
+          </a:xfrm>
+          <a:prstGeom xmlns:a="http://schemas.openxmlformats.org/drawingml/2006/main" prst="rect">
+            <a:avLst/>
+          </a:prstGeom>
+          <a:noFill xmlns:a="http://schemas.openxmlformats.org/drawingml/2006/main"/>
+          <a:ln xmlns:a="http://schemas.openxmlformats.org/drawingml/2006/main" w="0">
+            <a:noFill/>
+            <a:prstDash val="solid"/>
+          </a:ln>
+        </p:spPr>
+        <p:txBody>
+          <a:bodyPr xmlns:a="http://schemas.openxmlformats.org/drawingml/2006/main"/>
+          <a:lstStyle xmlns:a="http://schemas.openxmlformats.org/drawingml/2006/main"/>
+          <a:p xmlns:a="http://schemas.openxmlformats.org/drawingml/2006/main">
+            <a:pPr>
+              <a:defRPr sz="975" b="1">
+                <a:solidFill>
+                  <a:srgbClr val="A9BACB"/>
+                </a:solidFill>
+              </a:defRPr>
+            </a:pPr>
+            <a:r>
+              <a:rPr sz="975" b="1">
+                <a:solidFill>
+                  <a:srgbClr val="A9BACB"/>
+                </a:solidFill>
+              </a:rPr>
+              <a:t>HIGH</a:t>
+            </a:r>
+          </a:p>
+        </p:txBody>
+      </p:sp>
+      <p:sp>
+        <p:nvSpPr>
+          <p:cNvPr id="41" name="">
+            <a:extLst xmlns:a="http://schemas.openxmlformats.org/drawingml/2006/main">
+              <a:ext uri="{FF2B5EF4-FFF2-40B4-BE49-F238E27FC236}">
+                <a16:creationId xmlns:a16="http://schemas.microsoft.com/office/drawing/2014/main" id="{CCD9BDE7-8280-461B-A71D-F71FAEF8A5E8}"/>
+              </a:ext>
+            </a:extLst>
+          </p:cNvPr>
+          <p:cNvSpPr>
+            <a:spLocks xmlns:a="http://schemas.openxmlformats.org/drawingml/2006/main" noGrp="1"/>
+          </p:cNvSpPr>
+          <p:nvPr/>
+        </p:nvSpPr>
+        <p:spPr>
+          <a:xfrm xmlns:a="http://schemas.openxmlformats.org/drawingml/2006/main">
+            <a:off x="4572000" y="3486150"/>
+            <a:ext cx="2724150" cy="0"/>
+          </a:xfrm>
+          <a:prstGeom xmlns:a="http://schemas.openxmlformats.org/drawingml/2006/main" prst="line">
+            <a:avLst/>
+          </a:prstGeom>
+          <a:ln xmlns:a="http://schemas.openxmlformats.org/drawingml/2006/main" w="14288">
+            <a:solidFill>
+              <a:srgbClr val="2A4663"/>
+            </a:solidFill>
+            <a:prstDash val="solid"/>
+          </a:ln>
+        </p:spPr>
+      </p:sp>
+      <p:sp>
+        <p:nvSpPr>
+          <p:cNvPr id="42" name="">
+            <a:extLst xmlns:a="http://schemas.openxmlformats.org/drawingml/2006/main">
+              <a:ext uri="{FF2B5EF4-FFF2-40B4-BE49-F238E27FC236}">
+                <a16:creationId xmlns:a16="http://schemas.microsoft.com/office/drawing/2014/main" id="{BFDEFCA9-A910-48B2-A38A-6D4107677551}"/>
+              </a:ext>
+            </a:extLst>
+          </p:cNvPr>
+          <p:cNvSpPr>
+            <a:spLocks xmlns:a="http://schemas.openxmlformats.org/drawingml/2006/main" noGrp="1"/>
+          </p:cNvSpPr>
+          <p:nvPr/>
+        </p:nvSpPr>
+        <p:spPr>
+          <a:xfrm xmlns:a="http://schemas.openxmlformats.org/drawingml/2006/main">
+            <a:off x="8058150" y="1333500"/>
+            <a:ext cx="2952750" cy="247650"/>
+          </a:xfrm>
+          <a:prstGeom xmlns:a="http://schemas.openxmlformats.org/drawingml/2006/main" prst="rect">
+            <a:avLst/>
+          </a:prstGeom>
+          <a:noFill xmlns:a="http://schemas.openxmlformats.org/drawingml/2006/main"/>
+          <a:ln xmlns:a="http://schemas.openxmlformats.org/drawingml/2006/main" w="0">
+            <a:noFill/>
+            <a:prstDash val="solid"/>
+          </a:ln>
+        </p:spPr>
+        <p:txBody>
+          <a:bodyPr xmlns:a="http://schemas.openxmlformats.org/drawingml/2006/main"/>
+          <a:lstStyle xmlns:a="http://schemas.openxmlformats.org/drawingml/2006/main"/>
+          <a:p xmlns:a="http://schemas.openxmlformats.org/drawingml/2006/main">
+            <a:pPr>
+              <a:defRPr sz="1875" b="1">
+                <a:solidFill>
+                  <a:srgbClr val="F4F8FB"/>
+                </a:solidFill>
+              </a:defRPr>
+            </a:pPr>
+            <a:r>
+              <a:rPr sz="1875" b="1">
+                <a:solidFill>
+                  <a:srgbClr val="F4F8FB"/>
+                </a:solidFill>
+              </a:rPr>
+              <a:t>Human checkpoints</a:t>
+            </a:r>
+          </a:p>
+        </p:txBody>
+      </p:sp>
+      <p:sp>
+        <p:nvSpPr>
+          <p:cNvPr id="43" name="">
+            <a:extLst xmlns:a="http://schemas.openxmlformats.org/drawingml/2006/main">
+              <a:ext uri="{FF2B5EF4-FFF2-40B4-BE49-F238E27FC236}">
+                <a16:creationId xmlns:a16="http://schemas.microsoft.com/office/drawing/2014/main" id="{0528EEAD-C588-49F2-B725-A2EA8AA4A9A9}"/>
+              </a:ext>
+            </a:extLst>
+          </p:cNvPr>
+          <p:cNvSpPr>
+            <a:spLocks xmlns:a="http://schemas.openxmlformats.org/drawingml/2006/main" noGrp="1"/>
+          </p:cNvSpPr>
+          <p:nvPr/>
+        </p:nvSpPr>
+        <p:spPr>
+          <a:xfrm xmlns:a="http://schemas.openxmlformats.org/drawingml/2006/main">
+            <a:off x="9820275" y="1657350"/>
+            <a:ext cx="809625" cy="171450"/>
+          </a:xfrm>
+          <a:prstGeom xmlns:a="http://schemas.openxmlformats.org/drawingml/2006/main" prst="rect">
+            <a:avLst/>
+          </a:prstGeom>
+          <a:noFill xmlns:a="http://schemas.openxmlformats.org/drawingml/2006/main"/>
+          <a:ln xmlns:a="http://schemas.openxmlformats.org/drawingml/2006/main" w="0">
+            <a:noFill/>
+            <a:prstDash val="solid"/>
+          </a:ln>
+        </p:spPr>
+        <p:txBody>
+          <a:bodyPr xmlns:a="http://schemas.openxmlformats.org/drawingml/2006/main"/>
+          <a:lstStyle xmlns:a="http://schemas.openxmlformats.org/drawingml/2006/main"/>
+          <a:p xmlns:a="http://schemas.openxmlformats.org/drawingml/2006/main">
+            <a:pPr>
+              <a:defRPr sz="900" b="1">
+                <a:solidFill>
+                  <a:srgbClr val="A9BACB"/>
+                </a:solidFill>
+              </a:defRPr>
+            </a:pPr>
+            <a:r>
+              <a:rPr sz="900" b="1">
+                <a:solidFill>
+                  <a:srgbClr val="A9BACB"/>
+                </a:solidFill>
+              </a:rPr>
+              <a:t>Pre-AURA</a:t>
+            </a:r>
+          </a:p>
+        </p:txBody>
+      </p:sp>
+      <p:sp>
+        <p:nvSpPr>
+          <p:cNvPr id="44" name="">
+            <a:extLst xmlns:a="http://schemas.openxmlformats.org/drawingml/2006/main">
+              <a:ext uri="{FF2B5EF4-FFF2-40B4-BE49-F238E27FC236}">
+                <a16:creationId xmlns:a16="http://schemas.microsoft.com/office/drawing/2014/main" id="{B125E19E-FD8E-451E-B466-6469F6B705DB}"/>
+              </a:ext>
+            </a:extLst>
+          </p:cNvPr>
+          <p:cNvSpPr>
+            <a:spLocks xmlns:a="http://schemas.openxmlformats.org/drawingml/2006/main" noGrp="1"/>
+          </p:cNvSpPr>
+          <p:nvPr/>
+        </p:nvSpPr>
+        <p:spPr>
+          <a:xfrm xmlns:a="http://schemas.openxmlformats.org/drawingml/2006/main">
+            <a:off x="10629900" y="1657350"/>
+            <a:ext cx="571500" cy="171450"/>
+          </a:xfrm>
+          <a:prstGeom xmlns:a="http://schemas.openxmlformats.org/drawingml/2006/main" prst="rect">
+            <a:avLst/>
+          </a:prstGeom>
+          <a:noFill xmlns:a="http://schemas.openxmlformats.org/drawingml/2006/main"/>
+          <a:ln xmlns:a="http://schemas.openxmlformats.org/drawingml/2006/main" w="0">
+            <a:noFill/>
+            <a:prstDash val="solid"/>
+          </a:ln>
+        </p:spPr>
+        <p:txBody>
+          <a:bodyPr xmlns:a="http://schemas.openxmlformats.org/drawingml/2006/main"/>
+          <a:lstStyle xmlns:a="http://schemas.openxmlformats.org/drawingml/2006/main"/>
+          <a:p xmlns:a="http://schemas.openxmlformats.org/drawingml/2006/main">
+            <a:pPr>
+              <a:defRPr sz="900" b="1">
+                <a:solidFill>
+                  <a:srgbClr val="F6C85F"/>
+                </a:solidFill>
+              </a:defRPr>
+            </a:pPr>
+            <a:r>
+              <a:rPr sz="900" b="1">
+                <a:solidFill>
+                  <a:srgbClr val="F6C85F"/>
+                </a:solidFill>
+              </a:rPr>
+              <a:t>AURA</a:t>
+            </a:r>
+          </a:p>
+        </p:txBody>
+      </p:sp>
+      <p:sp>
+        <p:nvSpPr>
+          <p:cNvPr id="45" name="">
+            <a:extLst xmlns:a="http://schemas.openxmlformats.org/drawingml/2006/main">
+              <a:ext uri="{FF2B5EF4-FFF2-40B4-BE49-F238E27FC236}">
+                <a16:creationId xmlns:a16="http://schemas.microsoft.com/office/drawing/2014/main" id="{D38E30E4-82AE-4EA5-BCA5-79A1311A2AFE}"/>
+              </a:ext>
+            </a:extLst>
+          </p:cNvPr>
+          <p:cNvSpPr>
+            <a:spLocks xmlns:a="http://schemas.openxmlformats.org/drawingml/2006/main" noGrp="1"/>
+          </p:cNvSpPr>
+          <p:nvPr/>
+        </p:nvSpPr>
+        <p:spPr>
+          <a:xfrm xmlns:a="http://schemas.openxmlformats.org/drawingml/2006/main">
+            <a:off x="8324850" y="2136775"/>
+            <a:ext cx="266700" cy="1349375"/>
+          </a:xfrm>
+          <a:prstGeom xmlns:a="http://schemas.openxmlformats.org/drawingml/2006/main" prst="roundRect">
+            <a:avLst>
+              <a:gd name="adj" fmla="val 7143"/>
+            </a:avLst>
+          </a:prstGeom>
+          <a:solidFill xmlns:a="http://schemas.openxmlformats.org/drawingml/2006/main">
+            <a:srgbClr val="6F8499"/>
+          </a:solidFill>
+          <a:ln xmlns:a="http://schemas.openxmlformats.org/drawingml/2006/main" w="11430">
+            <a:solidFill>
+              <a:srgbClr val="6F8499"/>
+            </a:solidFill>
+            <a:prstDash val="solid"/>
+          </a:ln>
+        </p:spPr>
+      </p:sp>
+      <p:sp>
+        <p:nvSpPr>
+          <p:cNvPr id="46" name="">
+            <a:extLst xmlns:a="http://schemas.openxmlformats.org/drawingml/2006/main">
+              <a:ext uri="{FF2B5EF4-FFF2-40B4-BE49-F238E27FC236}">
+                <a16:creationId xmlns:a16="http://schemas.microsoft.com/office/drawing/2014/main" id="{16E116BC-A87D-43C5-B5A8-DD705F668D7F}"/>
+              </a:ext>
+            </a:extLst>
+          </p:cNvPr>
+          <p:cNvSpPr>
+            <a:spLocks xmlns:a="http://schemas.openxmlformats.org/drawingml/2006/main" noGrp="1"/>
+          </p:cNvSpPr>
+          <p:nvPr/>
+        </p:nvSpPr>
+        <p:spPr>
+          <a:xfrm xmlns:a="http://schemas.openxmlformats.org/drawingml/2006/main">
+            <a:off x="8686800" y="3448050"/>
+            <a:ext cx="266700" cy="38100"/>
+          </a:xfrm>
+          <a:prstGeom xmlns:a="http://schemas.openxmlformats.org/drawingml/2006/main" prst="roundRect">
+            <a:avLst>
+              <a:gd name="adj" fmla="val 50000"/>
+            </a:avLst>
+          </a:prstGeom>
+          <a:solidFill xmlns:a="http://schemas.openxmlformats.org/drawingml/2006/main">
+            <a:srgbClr val="F6C85F"/>
+          </a:solidFill>
+          <a:ln xmlns:a="http://schemas.openxmlformats.org/drawingml/2006/main" w="11430">
+            <a:solidFill>
+              <a:srgbClr val="F6C85F"/>
+            </a:solidFill>
+            <a:prstDash val="solid"/>
+          </a:ln>
+        </p:spPr>
+      </p:sp>
+      <p:sp>
+        <p:nvSpPr>
+          <p:cNvPr id="47" name="">
+            <a:extLst xmlns:a="http://schemas.openxmlformats.org/drawingml/2006/main">
+              <a:ext uri="{FF2B5EF4-FFF2-40B4-BE49-F238E27FC236}">
+                <a16:creationId xmlns:a16="http://schemas.microsoft.com/office/drawing/2014/main" id="{BDB168A1-9DBE-4AE9-AFC5-7B86771C7EBD}"/>
+              </a:ext>
+            </a:extLst>
+          </p:cNvPr>
+          <p:cNvSpPr>
+            <a:spLocks xmlns:a="http://schemas.openxmlformats.org/drawingml/2006/main" noGrp="1"/>
+          </p:cNvSpPr>
+          <p:nvPr/>
+        </p:nvSpPr>
+        <p:spPr>
+          <a:xfrm xmlns:a="http://schemas.openxmlformats.org/drawingml/2006/main">
+            <a:off x="8305800" y="1936750"/>
+            <a:ext cx="514350" cy="171450"/>
+          </a:xfrm>
+          <a:prstGeom xmlns:a="http://schemas.openxmlformats.org/drawingml/2006/main" prst="rect">
+            <a:avLst/>
+          </a:prstGeom>
+          <a:noFill xmlns:a="http://schemas.openxmlformats.org/drawingml/2006/main"/>
+          <a:ln xmlns:a="http://schemas.openxmlformats.org/drawingml/2006/main" w="0">
+            <a:noFill/>
+            <a:prstDash val="solid"/>
+          </a:ln>
+        </p:spPr>
+        <p:txBody>
+          <a:bodyPr xmlns:a="http://schemas.openxmlformats.org/drawingml/2006/main"/>
+          <a:lstStyle xmlns:a="http://schemas.openxmlformats.org/drawingml/2006/main"/>
+          <a:p xmlns:a="http://schemas.openxmlformats.org/drawingml/2006/main">
+            <a:pPr>
+              <a:defRPr sz="900" b="1">
+                <a:solidFill>
+                  <a:srgbClr val="A9BACB"/>
+                </a:solidFill>
+              </a:defRPr>
+            </a:pPr>
+            <a:r>
+              <a:rPr sz="900" b="1">
+                <a:solidFill>
+                  <a:srgbClr val="A9BACB"/>
+                </a:solidFill>
+              </a:rPr>
+              <a:t>2</a:t>
+            </a:r>
+          </a:p>
+        </p:txBody>
+      </p:sp>
+      <p:sp>
+        <p:nvSpPr>
+          <p:cNvPr id="48" name="">
+            <a:extLst xmlns:a="http://schemas.openxmlformats.org/drawingml/2006/main">
+              <a:ext uri="{FF2B5EF4-FFF2-40B4-BE49-F238E27FC236}">
+                <a16:creationId xmlns:a16="http://schemas.microsoft.com/office/drawing/2014/main" id="{EF8D59C5-EDEF-49C9-A7E9-21A937C92CB3}"/>
+              </a:ext>
+            </a:extLst>
+          </p:cNvPr>
+          <p:cNvSpPr>
+            <a:spLocks xmlns:a="http://schemas.openxmlformats.org/drawingml/2006/main" noGrp="1"/>
+          </p:cNvSpPr>
+          <p:nvPr/>
+        </p:nvSpPr>
+        <p:spPr>
+          <a:xfrm xmlns:a="http://schemas.openxmlformats.org/drawingml/2006/main">
+            <a:off x="8629650" y="3248025"/>
+            <a:ext cx="514350" cy="171450"/>
+          </a:xfrm>
+          <a:prstGeom xmlns:a="http://schemas.openxmlformats.org/drawingml/2006/main" prst="rect">
+            <a:avLst/>
+          </a:prstGeom>
+          <a:noFill xmlns:a="http://schemas.openxmlformats.org/drawingml/2006/main"/>
+          <a:ln xmlns:a="http://schemas.openxmlformats.org/drawingml/2006/main" w="0">
+            <a:noFill/>
+            <a:prstDash val="solid"/>
+          </a:ln>
+        </p:spPr>
+        <p:txBody>
+          <a:bodyPr xmlns:a="http://schemas.openxmlformats.org/drawingml/2006/main"/>
+          <a:lstStyle xmlns:a="http://schemas.openxmlformats.org/drawingml/2006/main"/>
+          <a:p xmlns:a="http://schemas.openxmlformats.org/drawingml/2006/main">
+            <a:pPr>
+              <a:defRPr sz="900" b="1">
+                <a:solidFill>
+                  <a:srgbClr val="F4F8FB"/>
+                </a:solidFill>
+              </a:defRPr>
+            </a:pPr>
+            <a:r>
+              <a:rPr sz="900" b="1">
+                <a:solidFill>
+                  <a:srgbClr val="F4F8FB"/>
+                </a:solidFill>
+              </a:rPr>
+              <a:t>0</a:t>
+            </a:r>
+          </a:p>
+        </p:txBody>
+      </p:sp>
+      <p:sp>
+        <p:nvSpPr>
+          <p:cNvPr id="49" name="">
+            <a:extLst xmlns:a="http://schemas.openxmlformats.org/drawingml/2006/main">
+              <a:ext uri="{FF2B5EF4-FFF2-40B4-BE49-F238E27FC236}">
+                <a16:creationId xmlns:a16="http://schemas.microsoft.com/office/drawing/2014/main" id="{F658D9C6-EFCD-4198-9DBC-C085DE492B11}"/>
+              </a:ext>
+            </a:extLst>
+          </p:cNvPr>
+          <p:cNvSpPr>
+            <a:spLocks xmlns:a="http://schemas.openxmlformats.org/drawingml/2006/main" noGrp="1"/>
+          </p:cNvSpPr>
+          <p:nvPr/>
+        </p:nvSpPr>
+        <p:spPr>
+          <a:xfrm xmlns:a="http://schemas.openxmlformats.org/drawingml/2006/main">
+            <a:off x="8286750" y="3619500"/>
+            <a:ext cx="762000" cy="171450"/>
+          </a:xfrm>
+          <a:prstGeom xmlns:a="http://schemas.openxmlformats.org/drawingml/2006/main" prst="rect">
+            <a:avLst/>
+          </a:prstGeom>
+          <a:noFill xmlns:a="http://schemas.openxmlformats.org/drawingml/2006/main"/>
+          <a:ln xmlns:a="http://schemas.openxmlformats.org/drawingml/2006/main" w="0">
+            <a:noFill/>
+            <a:prstDash val="solid"/>
+          </a:ln>
+        </p:spPr>
+        <p:txBody>
+          <a:bodyPr xmlns:a="http://schemas.openxmlformats.org/drawingml/2006/main"/>
+          <a:lstStyle xmlns:a="http://schemas.openxmlformats.org/drawingml/2006/main"/>
+          <a:p xmlns:a="http://schemas.openxmlformats.org/drawingml/2006/main">
+            <a:pPr>
+              <a:defRPr sz="975" b="1">
+                <a:solidFill>
+                  <a:srgbClr val="A9BACB"/>
+                </a:solidFill>
+              </a:defRPr>
+            </a:pPr>
+            <a:r>
+              <a:rPr sz="975" b="1">
+                <a:solidFill>
+                  <a:srgbClr val="A9BACB"/>
+                </a:solidFill>
+              </a:rPr>
+              <a:t>LOW</a:t>
+            </a:r>
+          </a:p>
+        </p:txBody>
+      </p:sp>
+      <p:sp>
+        <p:nvSpPr>
+          <p:cNvPr id="50" name="">
+            <a:extLst xmlns:a="http://schemas.openxmlformats.org/drawingml/2006/main">
+              <a:ext uri="{FF2B5EF4-FFF2-40B4-BE49-F238E27FC236}">
+                <a16:creationId xmlns:a16="http://schemas.microsoft.com/office/drawing/2014/main" id="{6BDC47ED-5AC9-4260-AB3A-362D8BA80F24}"/>
+              </a:ext>
+            </a:extLst>
+          </p:cNvPr>
+          <p:cNvSpPr>
+            <a:spLocks xmlns:a="http://schemas.openxmlformats.org/drawingml/2006/main" noGrp="1"/>
+          </p:cNvSpPr>
+          <p:nvPr/>
+        </p:nvSpPr>
+        <p:spPr>
+          <a:xfrm xmlns:a="http://schemas.openxmlformats.org/drawingml/2006/main">
+            <a:off x="9201150" y="2136775"/>
+            <a:ext cx="266700" cy="1349375"/>
+          </a:xfrm>
+          <a:prstGeom xmlns:a="http://schemas.openxmlformats.org/drawingml/2006/main" prst="roundRect">
+            <a:avLst>
+              <a:gd name="adj" fmla="val 7143"/>
+            </a:avLst>
+          </a:prstGeom>
+          <a:solidFill xmlns:a="http://schemas.openxmlformats.org/drawingml/2006/main">
+            <a:srgbClr val="6F8499"/>
+          </a:solidFill>
+          <a:ln xmlns:a="http://schemas.openxmlformats.org/drawingml/2006/main" w="11430">
+            <a:solidFill>
+              <a:srgbClr val="6F8499"/>
+            </a:solidFill>
+            <a:prstDash val="solid"/>
+          </a:ln>
+        </p:spPr>
+      </p:sp>
+      <p:sp>
+        <p:nvSpPr>
+          <p:cNvPr id="51" name="">
+            <a:extLst xmlns:a="http://schemas.openxmlformats.org/drawingml/2006/main">
+              <a:ext uri="{FF2B5EF4-FFF2-40B4-BE49-F238E27FC236}">
+                <a16:creationId xmlns:a16="http://schemas.microsoft.com/office/drawing/2014/main" id="{478465EC-D277-4824-A2C5-E66650AFDCAE}"/>
+              </a:ext>
+            </a:extLst>
+          </p:cNvPr>
+          <p:cNvSpPr>
+            <a:spLocks xmlns:a="http://schemas.openxmlformats.org/drawingml/2006/main" noGrp="1"/>
+          </p:cNvSpPr>
+          <p:nvPr/>
+        </p:nvSpPr>
+        <p:spPr>
+          <a:xfrm xmlns:a="http://schemas.openxmlformats.org/drawingml/2006/main">
+            <a:off x="9563100" y="2811462"/>
+            <a:ext cx="266700" cy="674688"/>
+          </a:xfrm>
+          <a:prstGeom xmlns:a="http://schemas.openxmlformats.org/drawingml/2006/main" prst="roundRect">
+            <a:avLst>
+              <a:gd name="adj" fmla="val 7143"/>
+            </a:avLst>
+          </a:prstGeom>
+          <a:solidFill xmlns:a="http://schemas.openxmlformats.org/drawingml/2006/main">
+            <a:srgbClr val="F6C85F"/>
+          </a:solidFill>
+          <a:ln xmlns:a="http://schemas.openxmlformats.org/drawingml/2006/main" w="11430">
+            <a:solidFill>
+              <a:srgbClr val="F6C85F"/>
+            </a:solidFill>
+            <a:prstDash val="solid"/>
+          </a:ln>
+        </p:spPr>
+      </p:sp>
+      <p:sp>
+        <p:nvSpPr>
+          <p:cNvPr id="52" name="">
+            <a:extLst xmlns:a="http://schemas.openxmlformats.org/drawingml/2006/main">
+              <a:ext uri="{FF2B5EF4-FFF2-40B4-BE49-F238E27FC236}">
+                <a16:creationId xmlns:a16="http://schemas.microsoft.com/office/drawing/2014/main" id="{BC43D332-0B88-4AC9-A5FC-59855E64E64F}"/>
+              </a:ext>
+            </a:extLst>
+          </p:cNvPr>
+          <p:cNvSpPr>
+            <a:spLocks xmlns:a="http://schemas.openxmlformats.org/drawingml/2006/main" noGrp="1"/>
+          </p:cNvSpPr>
+          <p:nvPr/>
+        </p:nvSpPr>
+        <p:spPr>
+          <a:xfrm xmlns:a="http://schemas.openxmlformats.org/drawingml/2006/main">
+            <a:off x="9182100" y="1936750"/>
+            <a:ext cx="514350" cy="171450"/>
+          </a:xfrm>
+          <a:prstGeom xmlns:a="http://schemas.openxmlformats.org/drawingml/2006/main" prst="rect">
+            <a:avLst/>
+          </a:prstGeom>
+          <a:noFill xmlns:a="http://schemas.openxmlformats.org/drawingml/2006/main"/>
+          <a:ln xmlns:a="http://schemas.openxmlformats.org/drawingml/2006/main" w="0">
+            <a:noFill/>
+            <a:prstDash val="solid"/>
+          </a:ln>
+        </p:spPr>
+        <p:txBody>
+          <a:bodyPr xmlns:a="http://schemas.openxmlformats.org/drawingml/2006/main"/>
+          <a:lstStyle xmlns:a="http://schemas.openxmlformats.org/drawingml/2006/main"/>
+          <a:p xmlns:a="http://schemas.openxmlformats.org/drawingml/2006/main">
+            <a:pPr>
+              <a:defRPr sz="900" b="1">
+                <a:solidFill>
+                  <a:srgbClr val="A9BACB"/>
+                </a:solidFill>
+              </a:defRPr>
+            </a:pPr>
+            <a:r>
+              <a:rPr sz="900" b="1">
+                <a:solidFill>
+                  <a:srgbClr val="A9BACB"/>
+                </a:solidFill>
+              </a:rPr>
+              <a:t>2</a:t>
+            </a:r>
+          </a:p>
+        </p:txBody>
+      </p:sp>
+      <p:sp>
+        <p:nvSpPr>
+          <p:cNvPr id="53" name="">
+            <a:extLst xmlns:a="http://schemas.openxmlformats.org/drawingml/2006/main">
+              <a:ext uri="{FF2B5EF4-FFF2-40B4-BE49-F238E27FC236}">
+                <a16:creationId xmlns:a16="http://schemas.microsoft.com/office/drawing/2014/main" id="{568633BF-77D4-4C6E-8DF7-B510FB76A1CF}"/>
+              </a:ext>
+            </a:extLst>
+          </p:cNvPr>
+          <p:cNvSpPr>
+            <a:spLocks xmlns:a="http://schemas.openxmlformats.org/drawingml/2006/main" noGrp="1"/>
+          </p:cNvSpPr>
+          <p:nvPr/>
+        </p:nvSpPr>
+        <p:spPr>
+          <a:xfrm xmlns:a="http://schemas.openxmlformats.org/drawingml/2006/main">
+            <a:off x="9505950" y="2611437"/>
+            <a:ext cx="514350" cy="171450"/>
+          </a:xfrm>
+          <a:prstGeom xmlns:a="http://schemas.openxmlformats.org/drawingml/2006/main" prst="rect">
+            <a:avLst/>
+          </a:prstGeom>
+          <a:noFill xmlns:a="http://schemas.openxmlformats.org/drawingml/2006/main"/>
+          <a:ln xmlns:a="http://schemas.openxmlformats.org/drawingml/2006/main" w="0">
+            <a:noFill/>
+            <a:prstDash val="solid"/>
+          </a:ln>
+        </p:spPr>
+        <p:txBody>
+          <a:bodyPr xmlns:a="http://schemas.openxmlformats.org/drawingml/2006/main"/>
+          <a:lstStyle xmlns:a="http://schemas.openxmlformats.org/drawingml/2006/main"/>
+          <a:p xmlns:a="http://schemas.openxmlformats.org/drawingml/2006/main">
+            <a:pPr>
+              <a:defRPr sz="900" b="1">
+                <a:solidFill>
+                  <a:srgbClr val="F4F8FB"/>
+                </a:solidFill>
+              </a:defRPr>
+            </a:pPr>
+            <a:r>
+              <a:rPr sz="900" b="1">
+                <a:solidFill>
+                  <a:srgbClr val="F4F8FB"/>
+                </a:solidFill>
+              </a:rPr>
+              <a:t>1</a:t>
+            </a:r>
+          </a:p>
+        </p:txBody>
+      </p:sp>
+      <p:sp>
+        <p:nvSpPr>
+          <p:cNvPr id="54" name="">
+            <a:extLst xmlns:a="http://schemas.openxmlformats.org/drawingml/2006/main">
+              <a:ext uri="{FF2B5EF4-FFF2-40B4-BE49-F238E27FC236}">
+                <a16:creationId xmlns:a16="http://schemas.microsoft.com/office/drawing/2014/main" id="{FAA58ABF-857A-4938-90FA-3CA4E69F4D4D}"/>
+              </a:ext>
+            </a:extLst>
+          </p:cNvPr>
+          <p:cNvSpPr>
+            <a:spLocks xmlns:a="http://schemas.openxmlformats.org/drawingml/2006/main" noGrp="1"/>
+          </p:cNvSpPr>
+          <p:nvPr/>
+        </p:nvSpPr>
+        <p:spPr>
+          <a:xfrm xmlns:a="http://schemas.openxmlformats.org/drawingml/2006/main">
+            <a:off x="9163050" y="3619500"/>
+            <a:ext cx="762000" cy="171450"/>
+          </a:xfrm>
+          <a:prstGeom xmlns:a="http://schemas.openxmlformats.org/drawingml/2006/main" prst="rect">
+            <a:avLst/>
+          </a:prstGeom>
+          <a:noFill xmlns:a="http://schemas.openxmlformats.org/drawingml/2006/main"/>
+          <a:ln xmlns:a="http://schemas.openxmlformats.org/drawingml/2006/main" w="0">
+            <a:noFill/>
+            <a:prstDash val="solid"/>
+          </a:ln>
+        </p:spPr>
+        <p:txBody>
+          <a:bodyPr xmlns:a="http://schemas.openxmlformats.org/drawingml/2006/main"/>
+          <a:lstStyle xmlns:a="http://schemas.openxmlformats.org/drawingml/2006/main"/>
+          <a:p xmlns:a="http://schemas.openxmlformats.org/drawingml/2006/main">
+            <a:pPr>
+              <a:defRPr sz="975" b="1">
+                <a:solidFill>
+                  <a:srgbClr val="A9BACB"/>
+                </a:solidFill>
+              </a:defRPr>
+            </a:pPr>
+            <a:r>
+              <a:rPr sz="975" b="1">
+                <a:solidFill>
+                  <a:srgbClr val="A9BACB"/>
+                </a:solidFill>
+              </a:rPr>
+              <a:t>MED</a:t>
+            </a:r>
+          </a:p>
+        </p:txBody>
+      </p:sp>
+      <p:sp>
+        <p:nvSpPr>
+          <p:cNvPr id="55" name="">
+            <a:extLst xmlns:a="http://schemas.openxmlformats.org/drawingml/2006/main">
+              <a:ext uri="{FF2B5EF4-FFF2-40B4-BE49-F238E27FC236}">
+                <a16:creationId xmlns:a16="http://schemas.microsoft.com/office/drawing/2014/main" id="{24967A74-14A4-4F69-983C-69003E412CF1}"/>
+              </a:ext>
+            </a:extLst>
+          </p:cNvPr>
+          <p:cNvSpPr>
+            <a:spLocks xmlns:a="http://schemas.openxmlformats.org/drawingml/2006/main" noGrp="1"/>
+          </p:cNvSpPr>
+          <p:nvPr/>
+        </p:nvSpPr>
+        <p:spPr>
+          <a:xfrm xmlns:a="http://schemas.openxmlformats.org/drawingml/2006/main">
+            <a:off x="10077450" y="2136775"/>
+            <a:ext cx="266700" cy="1349375"/>
+          </a:xfrm>
+          <a:prstGeom xmlns:a="http://schemas.openxmlformats.org/drawingml/2006/main" prst="roundRect">
+            <a:avLst>
+              <a:gd name="adj" fmla="val 7143"/>
+            </a:avLst>
+          </a:prstGeom>
+          <a:solidFill xmlns:a="http://schemas.openxmlformats.org/drawingml/2006/main">
+            <a:srgbClr val="6F8499"/>
+          </a:solidFill>
+          <a:ln xmlns:a="http://schemas.openxmlformats.org/drawingml/2006/main" w="11430">
+            <a:solidFill>
+              <a:srgbClr val="6F8499"/>
+            </a:solidFill>
+            <a:prstDash val="solid"/>
+          </a:ln>
+        </p:spPr>
+      </p:sp>
+      <p:sp>
+        <p:nvSpPr>
+          <p:cNvPr id="56" name="">
+            <a:extLst xmlns:a="http://schemas.openxmlformats.org/drawingml/2006/main">
+              <a:ext uri="{FF2B5EF4-FFF2-40B4-BE49-F238E27FC236}">
+                <a16:creationId xmlns:a16="http://schemas.microsoft.com/office/drawing/2014/main" id="{F71318F0-FA94-4747-A17F-CA11F04E53DD}"/>
+              </a:ext>
+            </a:extLst>
+          </p:cNvPr>
+          <p:cNvSpPr>
+            <a:spLocks xmlns:a="http://schemas.openxmlformats.org/drawingml/2006/main" noGrp="1"/>
+          </p:cNvSpPr>
+          <p:nvPr/>
+        </p:nvSpPr>
+        <p:spPr>
+          <a:xfrm xmlns:a="http://schemas.openxmlformats.org/drawingml/2006/main">
+            <a:off x="10439400" y="2136775"/>
+            <a:ext cx="266700" cy="1349375"/>
+          </a:xfrm>
+          <a:prstGeom xmlns:a="http://schemas.openxmlformats.org/drawingml/2006/main" prst="roundRect">
+            <a:avLst>
+              <a:gd name="adj" fmla="val 7143"/>
+            </a:avLst>
+          </a:prstGeom>
+          <a:solidFill xmlns:a="http://schemas.openxmlformats.org/drawingml/2006/main">
+            <a:srgbClr val="F6C85F"/>
+          </a:solidFill>
+          <a:ln xmlns:a="http://schemas.openxmlformats.org/drawingml/2006/main" w="11430">
+            <a:solidFill>
+              <a:srgbClr val="F6C85F"/>
+            </a:solidFill>
+            <a:prstDash val="solid"/>
+          </a:ln>
+        </p:spPr>
+      </p:sp>
+      <p:sp>
+        <p:nvSpPr>
+          <p:cNvPr id="57" name="">
+            <a:extLst xmlns:a="http://schemas.openxmlformats.org/drawingml/2006/main">
+              <a:ext uri="{FF2B5EF4-FFF2-40B4-BE49-F238E27FC236}">
+                <a16:creationId xmlns:a16="http://schemas.microsoft.com/office/drawing/2014/main" id="{FCF4F4AA-1EC7-480E-98C8-53D21DED9BB7}"/>
+              </a:ext>
+            </a:extLst>
+          </p:cNvPr>
+          <p:cNvSpPr>
+            <a:spLocks xmlns:a="http://schemas.openxmlformats.org/drawingml/2006/main" noGrp="1"/>
+          </p:cNvSpPr>
+          <p:nvPr/>
+        </p:nvSpPr>
+        <p:spPr>
+          <a:xfrm xmlns:a="http://schemas.openxmlformats.org/drawingml/2006/main">
+            <a:off x="10058400" y="1936750"/>
+            <a:ext cx="514350" cy="171450"/>
+          </a:xfrm>
+          <a:prstGeom xmlns:a="http://schemas.openxmlformats.org/drawingml/2006/main" prst="rect">
+            <a:avLst/>
+          </a:prstGeom>
+          <a:noFill xmlns:a="http://schemas.openxmlformats.org/drawingml/2006/main"/>
+          <a:ln xmlns:a="http://schemas.openxmlformats.org/drawingml/2006/main" w="0">
+            <a:noFill/>
+            <a:prstDash val="solid"/>
+          </a:ln>
+        </p:spPr>
+        <p:txBody>
+          <a:bodyPr xmlns:a="http://schemas.openxmlformats.org/drawingml/2006/main"/>
+          <a:lstStyle xmlns:a="http://schemas.openxmlformats.org/drawingml/2006/main"/>
+          <a:p xmlns:a="http://schemas.openxmlformats.org/drawingml/2006/main">
+            <a:pPr>
+              <a:defRPr sz="900" b="1">
+                <a:solidFill>
+                  <a:srgbClr val="A9BACB"/>
+                </a:solidFill>
+              </a:defRPr>
+            </a:pPr>
+            <a:r>
+              <a:rPr sz="900" b="1">
+                <a:solidFill>
+                  <a:srgbClr val="A9BACB"/>
+                </a:solidFill>
+              </a:rPr>
+              <a:t>2</a:t>
+            </a:r>
+          </a:p>
+        </p:txBody>
+      </p:sp>
+      <p:sp>
+        <p:nvSpPr>
+          <p:cNvPr id="58" name="">
+            <a:extLst xmlns:a="http://schemas.openxmlformats.org/drawingml/2006/main">
+              <a:ext uri="{FF2B5EF4-FFF2-40B4-BE49-F238E27FC236}">
+                <a16:creationId xmlns:a16="http://schemas.microsoft.com/office/drawing/2014/main" id="{F9103F89-2032-4305-9004-766362D5C54F}"/>
+              </a:ext>
+            </a:extLst>
+          </p:cNvPr>
+          <p:cNvSpPr>
+            <a:spLocks xmlns:a="http://schemas.openxmlformats.org/drawingml/2006/main" noGrp="1"/>
+          </p:cNvSpPr>
+          <p:nvPr/>
+        </p:nvSpPr>
+        <p:spPr>
+          <a:xfrm xmlns:a="http://schemas.openxmlformats.org/drawingml/2006/main">
+            <a:off x="10382250" y="1936750"/>
+            <a:ext cx="514350" cy="171450"/>
+          </a:xfrm>
+          <a:prstGeom xmlns:a="http://schemas.openxmlformats.org/drawingml/2006/main" prst="rect">
+            <a:avLst/>
+          </a:prstGeom>
+          <a:noFill xmlns:a="http://schemas.openxmlformats.org/drawingml/2006/main"/>
+          <a:ln xmlns:a="http://schemas.openxmlformats.org/drawingml/2006/main" w="0">
+            <a:noFill/>
+            <a:prstDash val="solid"/>
+          </a:ln>
+        </p:spPr>
+        <p:txBody>
+          <a:bodyPr xmlns:a="http://schemas.openxmlformats.org/drawingml/2006/main"/>
+          <a:lstStyle xmlns:a="http://schemas.openxmlformats.org/drawingml/2006/main"/>
+          <a:p xmlns:a="http://schemas.openxmlformats.org/drawingml/2006/main">
+            <a:pPr>
+              <a:defRPr sz="900" b="1">
+                <a:solidFill>
+                  <a:srgbClr val="F4F8FB"/>
+                </a:solidFill>
+              </a:defRPr>
+            </a:pPr>
+            <a:r>
+              <a:rPr sz="900" b="1">
+                <a:solidFill>
+                  <a:srgbClr val="F4F8FB"/>
+                </a:solidFill>
+              </a:rPr>
+              <a:t>2</a:t>
+            </a:r>
+          </a:p>
+        </p:txBody>
+      </p:sp>
+      <p:sp>
+        <p:nvSpPr>
+          <p:cNvPr id="59" name="">
+            <a:extLst xmlns:a="http://schemas.openxmlformats.org/drawingml/2006/main">
+              <a:ext uri="{FF2B5EF4-FFF2-40B4-BE49-F238E27FC236}">
+                <a16:creationId xmlns:a16="http://schemas.microsoft.com/office/drawing/2014/main" id="{94690817-63A9-4077-ACF1-16690DC91B2E}"/>
+              </a:ext>
+            </a:extLst>
+          </p:cNvPr>
+          <p:cNvSpPr>
+            <a:spLocks xmlns:a="http://schemas.openxmlformats.org/drawingml/2006/main" noGrp="1"/>
+          </p:cNvSpPr>
+          <p:nvPr/>
+        </p:nvSpPr>
+        <p:spPr>
+          <a:xfrm xmlns:a="http://schemas.openxmlformats.org/drawingml/2006/main">
+            <a:off x="10039350" y="3619500"/>
+            <a:ext cx="762000" cy="171450"/>
+          </a:xfrm>
+          <a:prstGeom xmlns:a="http://schemas.openxmlformats.org/drawingml/2006/main" prst="rect">
+            <a:avLst/>
+          </a:prstGeom>
+          <a:noFill xmlns:a="http://schemas.openxmlformats.org/drawingml/2006/main"/>
+          <a:ln xmlns:a="http://schemas.openxmlformats.org/drawingml/2006/main" w="0">
+            <a:noFill/>
+            <a:prstDash val="solid"/>
+          </a:ln>
+        </p:spPr>
+        <p:txBody>
+          <a:bodyPr xmlns:a="http://schemas.openxmlformats.org/drawingml/2006/main"/>
+          <a:lstStyle xmlns:a="http://schemas.openxmlformats.org/drawingml/2006/main"/>
+          <a:p xmlns:a="http://schemas.openxmlformats.org/drawingml/2006/main">
+            <a:pPr>
+              <a:defRPr sz="975" b="1">
+                <a:solidFill>
+                  <a:srgbClr val="A9BACB"/>
+                </a:solidFill>
+              </a:defRPr>
+            </a:pPr>
+            <a:r>
+              <a:rPr sz="975" b="1">
+                <a:solidFill>
+                  <a:srgbClr val="A9BACB"/>
+                </a:solidFill>
+              </a:rPr>
+              <a:t>HIGH</a:t>
+            </a:r>
+          </a:p>
+        </p:txBody>
+      </p:sp>
+      <p:sp>
+        <p:nvSpPr>
+          <p:cNvPr id="60" name="">
+            <a:extLst xmlns:a="http://schemas.openxmlformats.org/drawingml/2006/main">
+              <a:ext uri="{FF2B5EF4-FFF2-40B4-BE49-F238E27FC236}">
+                <a16:creationId xmlns:a16="http://schemas.microsoft.com/office/drawing/2014/main" id="{79E49C3E-58C3-4B22-B8E2-A594C51C4CC1}"/>
+              </a:ext>
+            </a:extLst>
+          </p:cNvPr>
+          <p:cNvSpPr>
+            <a:spLocks xmlns:a="http://schemas.openxmlformats.org/drawingml/2006/main" noGrp="1"/>
+          </p:cNvSpPr>
+          <p:nvPr/>
+        </p:nvSpPr>
+        <p:spPr>
+          <a:xfrm xmlns:a="http://schemas.openxmlformats.org/drawingml/2006/main">
+            <a:off x="8229600" y="3486150"/>
+            <a:ext cx="2724150" cy="0"/>
+          </a:xfrm>
+          <a:prstGeom xmlns:a="http://schemas.openxmlformats.org/drawingml/2006/main" prst="line">
+            <a:avLst/>
+          </a:prstGeom>
+          <a:ln xmlns:a="http://schemas.openxmlformats.org/drawingml/2006/main" w="14288">
+            <a:solidFill>
+              <a:srgbClr val="2A4663"/>
+            </a:solidFill>
+            <a:prstDash val="solid"/>
+          </a:ln>
+        </p:spPr>
+      </p:sp>
       <p:pic>
         <p:nvPicPr>
-          <p:cNvPr id="18" name=""/>
+          <p:cNvPr id="132" name=""/>
           <p:cNvPicPr>
             <a:picLocks xmlns:a="http://schemas.openxmlformats.org/drawingml/2006/main" noChangeAspect="1"/>
           </p:cNvPicPr>
           <p:nvPr/>
         </p:nvPicPr>
         <p:blipFill>
-          <a:blip xmlns:r="http://schemas.openxmlformats.org/officeDocument/2006/relationships" xmlns:a="http://schemas.openxmlformats.org/drawingml/2006/main" r:embed="Rf4d168ea479a4f2f"/>
+          <a:blip xmlns:r="http://schemas.openxmlformats.org/officeDocument/2006/relationships" xmlns:a="http://schemas.openxmlformats.org/drawingml/2006/main" r:embed="R467624fcef0e4eee"/>
           <a:stretch xmlns:a="http://schemas.openxmlformats.org/drawingml/2006/main"/>
         </p:blipFill>
         <p:spPr>
           <a:xfrm xmlns:a="http://schemas.openxmlformats.org/drawingml/2006/main">
-            <a:off x="666750" y="1407319"/>
-            <a:ext cx="3429000" cy="1928813"/>
+            <a:off x="12201525" y="6869609"/>
+            <a:ext cx="9525" cy="5358"/>
           </a:xfrm>
           <a:prstGeom xmlns:a="http://schemas.openxmlformats.org/drawingml/2006/main" prst="rect">
             <a:avLst/>
@@ -5639,20 +8765,20 @@
       </p:pic>
       <p:pic>
         <p:nvPicPr>
-          <p:cNvPr id="19" name=""/>
+          <p:cNvPr id="133" name=""/>
           <p:cNvPicPr>
             <a:picLocks xmlns:a="http://schemas.openxmlformats.org/drawingml/2006/main" noChangeAspect="1"/>
           </p:cNvPicPr>
           <p:nvPr/>
         </p:nvPicPr>
         <p:blipFill>
-          <a:blip xmlns:r="http://schemas.openxmlformats.org/officeDocument/2006/relationships" xmlns:a="http://schemas.openxmlformats.org/drawingml/2006/main" r:embed="R9118f3b2f20542d9"/>
+          <a:blip xmlns:r="http://schemas.openxmlformats.org/officeDocument/2006/relationships" xmlns:a="http://schemas.openxmlformats.org/drawingml/2006/main" r:embed="R74cdafc8b9ff4a56"/>
           <a:stretch xmlns:a="http://schemas.openxmlformats.org/drawingml/2006/main"/>
         </p:blipFill>
         <p:spPr>
           <a:xfrm xmlns:a="http://schemas.openxmlformats.org/drawingml/2006/main">
-            <a:off x="4381500" y="1407319"/>
-            <a:ext cx="3429000" cy="1928813"/>
+            <a:off x="12201525" y="6869609"/>
+            <a:ext cx="9525" cy="5358"/>
           </a:xfrm>
           <a:prstGeom xmlns:a="http://schemas.openxmlformats.org/drawingml/2006/main" prst="rect">
             <a:avLst/>
@@ -5661,20 +8787,20 @@
       </p:pic>
       <p:pic>
         <p:nvPicPr>
-          <p:cNvPr id="20" name=""/>
+          <p:cNvPr id="134" name=""/>
           <p:cNvPicPr>
             <a:picLocks xmlns:a="http://schemas.openxmlformats.org/drawingml/2006/main" noChangeAspect="1"/>
           </p:cNvPicPr>
           <p:nvPr/>
         </p:nvPicPr>
         <p:blipFill>
-          <a:blip xmlns:r="http://schemas.openxmlformats.org/officeDocument/2006/relationships" xmlns:a="http://schemas.openxmlformats.org/drawingml/2006/main" r:embed="Rda58d2802712436d"/>
+          <a:blip xmlns:r="http://schemas.openxmlformats.org/officeDocument/2006/relationships" xmlns:a="http://schemas.openxmlformats.org/drawingml/2006/main" r:embed="Ra223037f9b23416c"/>
           <a:stretch xmlns:a="http://schemas.openxmlformats.org/drawingml/2006/main"/>
         </p:blipFill>
         <p:spPr>
           <a:xfrm xmlns:a="http://schemas.openxmlformats.org/drawingml/2006/main">
-            <a:off x="8096250" y="1407319"/>
-            <a:ext cx="3429000" cy="1928813"/>
+            <a:off x="12201525" y="6869609"/>
+            <a:ext cx="9525" cy="5358"/>
           </a:xfrm>
           <a:prstGeom xmlns:a="http://schemas.openxmlformats.org/drawingml/2006/main" prst="rect">
             <a:avLst/>
@@ -5683,22 +8809,22 @@
       </p:pic>
       <p:sp>
         <p:nvSpPr>
-          <p:cNvPr id="7" name="">
-            <a:extLst xmlns:a="http://schemas.openxmlformats.org/drawingml/2006/main">
-              <a:ext uri="{FF2B5EF4-FFF2-40B4-BE49-F238E27FC236}">
-                <a16:creationId xmlns:a16="http://schemas.microsoft.com/office/drawing/2014/main" id="{4CCE5AD7-0E93-4AB2-A0F3-6A929373DB36}"/>
-              </a:ext>
-            </a:extLst>
-          </p:cNvPr>
-          <p:cNvSpPr>
-            <a:spLocks xmlns:a="http://schemas.openxmlformats.org/drawingml/2006/main" noGrp="1"/>
-          </p:cNvSpPr>
-          <p:nvPr/>
-        </p:nvSpPr>
-        <p:spPr>
-          <a:xfrm xmlns:a="http://schemas.openxmlformats.org/drawingml/2006/main">
-            <a:off x="1095375" y="4762500"/>
-            <a:ext cx="2095500" cy="333375"/>
+          <p:cNvPr id="64" name="">
+            <a:extLst xmlns:a="http://schemas.openxmlformats.org/drawingml/2006/main">
+              <a:ext uri="{FF2B5EF4-FFF2-40B4-BE49-F238E27FC236}">
+                <a16:creationId xmlns:a16="http://schemas.microsoft.com/office/drawing/2014/main" id="{6D02E9F0-6059-4384-94E2-E51CDA56F3F8}"/>
+              </a:ext>
+            </a:extLst>
+          </p:cNvPr>
+          <p:cNvSpPr>
+            <a:spLocks xmlns:a="http://schemas.openxmlformats.org/drawingml/2006/main" noGrp="1"/>
+          </p:cNvSpPr>
+          <p:nvPr/>
+        </p:nvSpPr>
+        <p:spPr>
+          <a:xfrm xmlns:a="http://schemas.openxmlformats.org/drawingml/2006/main">
+            <a:off x="1095375" y="4953000"/>
+            <a:ext cx="2190750" cy="333375"/>
           </a:xfrm>
           <a:prstGeom xmlns:a="http://schemas.openxmlformats.org/drawingml/2006/main" prst="rect">
             <a:avLst/>
@@ -5733,21 +8859,21 @@
       </p:sp>
       <p:sp>
         <p:nvSpPr>
-          <p:cNvPr id="8" name="">
-            <a:extLst xmlns:a="http://schemas.openxmlformats.org/drawingml/2006/main">
-              <a:ext uri="{FF2B5EF4-FFF2-40B4-BE49-F238E27FC236}">
-                <a16:creationId xmlns:a16="http://schemas.microsoft.com/office/drawing/2014/main" id="{ADC32304-4927-4321-9B53-C1565ABB8643}"/>
-              </a:ext>
-            </a:extLst>
-          </p:cNvPr>
-          <p:cNvSpPr>
-            <a:spLocks xmlns:a="http://schemas.openxmlformats.org/drawingml/2006/main" noGrp="1"/>
-          </p:cNvSpPr>
-          <p:nvPr/>
-        </p:nvSpPr>
-        <p:spPr>
-          <a:xfrm xmlns:a="http://schemas.openxmlformats.org/drawingml/2006/main">
-            <a:off x="1095375" y="5162550"/>
+          <p:cNvPr id="65" name="">
+            <a:extLst xmlns:a="http://schemas.openxmlformats.org/drawingml/2006/main">
+              <a:ext uri="{FF2B5EF4-FFF2-40B4-BE49-F238E27FC236}">
+                <a16:creationId xmlns:a16="http://schemas.microsoft.com/office/drawing/2014/main" id="{0AD1206E-5732-422F-B8FB-C7CF0CB12C18}"/>
+              </a:ext>
+            </a:extLst>
+          </p:cNvPr>
+          <p:cNvSpPr>
+            <a:spLocks xmlns:a="http://schemas.openxmlformats.org/drawingml/2006/main" noGrp="1"/>
+          </p:cNvSpPr>
+          <p:nvPr/>
+        </p:nvSpPr>
+        <p:spPr>
+          <a:xfrm xmlns:a="http://schemas.openxmlformats.org/drawingml/2006/main">
+            <a:off x="1095375" y="5353050"/>
             <a:ext cx="2190750" cy="266700"/>
           </a:xfrm>
           <a:prstGeom xmlns:a="http://schemas.openxmlformats.org/drawingml/2006/main" prst="rect">
@@ -5783,22 +8909,22 @@
       </p:sp>
       <p:sp>
         <p:nvSpPr>
-          <p:cNvPr id="9" name="">
-            <a:extLst xmlns:a="http://schemas.openxmlformats.org/drawingml/2006/main">
-              <a:ext uri="{FF2B5EF4-FFF2-40B4-BE49-F238E27FC236}">
-                <a16:creationId xmlns:a16="http://schemas.microsoft.com/office/drawing/2014/main" id="{519EC1F6-86D6-409F-90CF-C6E4E8873EFA}"/>
-              </a:ext>
-            </a:extLst>
-          </p:cNvPr>
-          <p:cNvSpPr>
-            <a:spLocks xmlns:a="http://schemas.openxmlformats.org/drawingml/2006/main" noGrp="1"/>
-          </p:cNvSpPr>
-          <p:nvPr/>
-        </p:nvSpPr>
-        <p:spPr>
-          <a:xfrm xmlns:a="http://schemas.openxmlformats.org/drawingml/2006/main">
-            <a:off x="3762375" y="4762500"/>
-            <a:ext cx="2095500" cy="333375"/>
+          <p:cNvPr id="66" name="">
+            <a:extLst xmlns:a="http://schemas.openxmlformats.org/drawingml/2006/main">
+              <a:ext uri="{FF2B5EF4-FFF2-40B4-BE49-F238E27FC236}">
+                <a16:creationId xmlns:a16="http://schemas.microsoft.com/office/drawing/2014/main" id="{4C0DB9CE-7383-4971-99E8-53A699809064}"/>
+              </a:ext>
+            </a:extLst>
+          </p:cNvPr>
+          <p:cNvSpPr>
+            <a:spLocks xmlns:a="http://schemas.openxmlformats.org/drawingml/2006/main" noGrp="1"/>
+          </p:cNvSpPr>
+          <p:nvPr/>
+        </p:nvSpPr>
+        <p:spPr>
+          <a:xfrm xmlns:a="http://schemas.openxmlformats.org/drawingml/2006/main">
+            <a:off x="3762375" y="4953000"/>
+            <a:ext cx="2190750" cy="333375"/>
           </a:xfrm>
           <a:prstGeom xmlns:a="http://schemas.openxmlformats.org/drawingml/2006/main" prst="rect">
             <a:avLst/>
@@ -5833,21 +8959,21 @@
       </p:sp>
       <p:sp>
         <p:nvSpPr>
-          <p:cNvPr id="10" name="">
-            <a:extLst xmlns:a="http://schemas.openxmlformats.org/drawingml/2006/main">
-              <a:ext uri="{FF2B5EF4-FFF2-40B4-BE49-F238E27FC236}">
-                <a16:creationId xmlns:a16="http://schemas.microsoft.com/office/drawing/2014/main" id="{8D62921A-9BD8-4649-8E3B-D97DEDB6A1E4}"/>
-              </a:ext>
-            </a:extLst>
-          </p:cNvPr>
-          <p:cNvSpPr>
-            <a:spLocks xmlns:a="http://schemas.openxmlformats.org/drawingml/2006/main" noGrp="1"/>
-          </p:cNvSpPr>
-          <p:nvPr/>
-        </p:nvSpPr>
-        <p:spPr>
-          <a:xfrm xmlns:a="http://schemas.openxmlformats.org/drawingml/2006/main">
-            <a:off x="3762375" y="5162550"/>
+          <p:cNvPr id="67" name="">
+            <a:extLst xmlns:a="http://schemas.openxmlformats.org/drawingml/2006/main">
+              <a:ext uri="{FF2B5EF4-FFF2-40B4-BE49-F238E27FC236}">
+                <a16:creationId xmlns:a16="http://schemas.microsoft.com/office/drawing/2014/main" id="{ED3E4B39-CBCE-48C8-A661-05E3637CBA8A}"/>
+              </a:ext>
+            </a:extLst>
+          </p:cNvPr>
+          <p:cNvSpPr>
+            <a:spLocks xmlns:a="http://schemas.openxmlformats.org/drawingml/2006/main" noGrp="1"/>
+          </p:cNvSpPr>
+          <p:nvPr/>
+        </p:nvSpPr>
+        <p:spPr>
+          <a:xfrm xmlns:a="http://schemas.openxmlformats.org/drawingml/2006/main">
+            <a:off x="3762375" y="5353050"/>
             <a:ext cx="2190750" cy="266700"/>
           </a:xfrm>
           <a:prstGeom xmlns:a="http://schemas.openxmlformats.org/drawingml/2006/main" prst="rect">
@@ -5883,22 +9009,22 @@
       </p:sp>
       <p:sp>
         <p:nvSpPr>
-          <p:cNvPr id="11" name="">
-            <a:extLst xmlns:a="http://schemas.openxmlformats.org/drawingml/2006/main">
-              <a:ext uri="{FF2B5EF4-FFF2-40B4-BE49-F238E27FC236}">
-                <a16:creationId xmlns:a16="http://schemas.microsoft.com/office/drawing/2014/main" id="{B1FEDF9F-FBD6-4318-98C4-E5139498A37F}"/>
-              </a:ext>
-            </a:extLst>
-          </p:cNvPr>
-          <p:cNvSpPr>
-            <a:spLocks xmlns:a="http://schemas.openxmlformats.org/drawingml/2006/main" noGrp="1"/>
-          </p:cNvSpPr>
-          <p:nvPr/>
-        </p:nvSpPr>
-        <p:spPr>
-          <a:xfrm xmlns:a="http://schemas.openxmlformats.org/drawingml/2006/main">
-            <a:off x="6429375" y="4762500"/>
-            <a:ext cx="2095500" cy="333375"/>
+          <p:cNvPr id="68" name="">
+            <a:extLst xmlns:a="http://schemas.openxmlformats.org/drawingml/2006/main">
+              <a:ext uri="{FF2B5EF4-FFF2-40B4-BE49-F238E27FC236}">
+                <a16:creationId xmlns:a16="http://schemas.microsoft.com/office/drawing/2014/main" id="{5C2E8B82-C3E9-470F-9FFA-BB4A4D05BD2A}"/>
+              </a:ext>
+            </a:extLst>
+          </p:cNvPr>
+          <p:cNvSpPr>
+            <a:spLocks xmlns:a="http://schemas.openxmlformats.org/drawingml/2006/main" noGrp="1"/>
+          </p:cNvSpPr>
+          <p:nvPr/>
+        </p:nvSpPr>
+        <p:spPr>
+          <a:xfrm xmlns:a="http://schemas.openxmlformats.org/drawingml/2006/main">
+            <a:off x="6429375" y="4953000"/>
+            <a:ext cx="2190750" cy="333375"/>
           </a:xfrm>
           <a:prstGeom xmlns:a="http://schemas.openxmlformats.org/drawingml/2006/main" prst="rect">
             <a:avLst/>
@@ -5933,21 +9059,21 @@
       </p:sp>
       <p:sp>
         <p:nvSpPr>
-          <p:cNvPr id="12" name="">
-            <a:extLst xmlns:a="http://schemas.openxmlformats.org/drawingml/2006/main">
-              <a:ext uri="{FF2B5EF4-FFF2-40B4-BE49-F238E27FC236}">
-                <a16:creationId xmlns:a16="http://schemas.microsoft.com/office/drawing/2014/main" id="{7715111C-8A7D-47E8-81E1-0A9C384F4830}"/>
-              </a:ext>
-            </a:extLst>
-          </p:cNvPr>
-          <p:cNvSpPr>
-            <a:spLocks xmlns:a="http://schemas.openxmlformats.org/drawingml/2006/main" noGrp="1"/>
-          </p:cNvSpPr>
-          <p:nvPr/>
-        </p:nvSpPr>
-        <p:spPr>
-          <a:xfrm xmlns:a="http://schemas.openxmlformats.org/drawingml/2006/main">
-            <a:off x="6429375" y="5162550"/>
+          <p:cNvPr id="69" name="">
+            <a:extLst xmlns:a="http://schemas.openxmlformats.org/drawingml/2006/main">
+              <a:ext uri="{FF2B5EF4-FFF2-40B4-BE49-F238E27FC236}">
+                <a16:creationId xmlns:a16="http://schemas.microsoft.com/office/drawing/2014/main" id="{BFC8F6AC-4B95-407A-B66C-1CF95B28EEC9}"/>
+              </a:ext>
+            </a:extLst>
+          </p:cNvPr>
+          <p:cNvSpPr>
+            <a:spLocks xmlns:a="http://schemas.openxmlformats.org/drawingml/2006/main" noGrp="1"/>
+          </p:cNvSpPr>
+          <p:nvPr/>
+        </p:nvSpPr>
+        <p:spPr>
+          <a:xfrm xmlns:a="http://schemas.openxmlformats.org/drawingml/2006/main">
+            <a:off x="6429375" y="5353050"/>
             <a:ext cx="2190750" cy="266700"/>
           </a:xfrm>
           <a:prstGeom xmlns:a="http://schemas.openxmlformats.org/drawingml/2006/main" prst="rect">
@@ -5983,22 +9109,22 @@
       </p:sp>
       <p:sp>
         <p:nvSpPr>
-          <p:cNvPr id="13" name="">
-            <a:extLst xmlns:a="http://schemas.openxmlformats.org/drawingml/2006/main">
-              <a:ext uri="{FF2B5EF4-FFF2-40B4-BE49-F238E27FC236}">
-                <a16:creationId xmlns:a16="http://schemas.microsoft.com/office/drawing/2014/main" id="{4A7D2210-90F2-4575-987D-620D29CD4CF3}"/>
-              </a:ext>
-            </a:extLst>
-          </p:cNvPr>
-          <p:cNvSpPr>
-            <a:spLocks xmlns:a="http://schemas.openxmlformats.org/drawingml/2006/main" noGrp="1"/>
-          </p:cNvSpPr>
-          <p:nvPr/>
-        </p:nvSpPr>
-        <p:spPr>
-          <a:xfrm xmlns:a="http://schemas.openxmlformats.org/drawingml/2006/main">
-            <a:off x="9096375" y="4762500"/>
-            <a:ext cx="2095500" cy="333375"/>
+          <p:cNvPr id="70" name="">
+            <a:extLst xmlns:a="http://schemas.openxmlformats.org/drawingml/2006/main">
+              <a:ext uri="{FF2B5EF4-FFF2-40B4-BE49-F238E27FC236}">
+                <a16:creationId xmlns:a16="http://schemas.microsoft.com/office/drawing/2014/main" id="{1E6D73CC-0B4C-4A66-AEDD-3F5B76FB5B35}"/>
+              </a:ext>
+            </a:extLst>
+          </p:cNvPr>
+          <p:cNvSpPr>
+            <a:spLocks xmlns:a="http://schemas.openxmlformats.org/drawingml/2006/main" noGrp="1"/>
+          </p:cNvSpPr>
+          <p:nvPr/>
+        </p:nvSpPr>
+        <p:spPr>
+          <a:xfrm xmlns:a="http://schemas.openxmlformats.org/drawingml/2006/main">
+            <a:off x="9096375" y="4953000"/>
+            <a:ext cx="2190750" cy="333375"/>
           </a:xfrm>
           <a:prstGeom xmlns:a="http://schemas.openxmlformats.org/drawingml/2006/main" prst="rect">
             <a:avLst/>
@@ -6033,21 +9159,21 @@
       </p:sp>
       <p:sp>
         <p:nvSpPr>
-          <p:cNvPr id="14" name="">
-            <a:extLst xmlns:a="http://schemas.openxmlformats.org/drawingml/2006/main">
-              <a:ext uri="{FF2B5EF4-FFF2-40B4-BE49-F238E27FC236}">
-                <a16:creationId xmlns:a16="http://schemas.microsoft.com/office/drawing/2014/main" id="{342B431F-AB74-42D8-96D1-7854CF1FABBA}"/>
-              </a:ext>
-            </a:extLst>
-          </p:cNvPr>
-          <p:cNvSpPr>
-            <a:spLocks xmlns:a="http://schemas.openxmlformats.org/drawingml/2006/main" noGrp="1"/>
-          </p:cNvSpPr>
-          <p:nvPr/>
-        </p:nvSpPr>
-        <p:spPr>
-          <a:xfrm xmlns:a="http://schemas.openxmlformats.org/drawingml/2006/main">
-            <a:off x="9096375" y="5162550"/>
+          <p:cNvPr id="71" name="">
+            <a:extLst xmlns:a="http://schemas.openxmlformats.org/drawingml/2006/main">
+              <a:ext uri="{FF2B5EF4-FFF2-40B4-BE49-F238E27FC236}">
+                <a16:creationId xmlns:a16="http://schemas.microsoft.com/office/drawing/2014/main" id="{67B119FE-AAE6-47B9-BE39-9E9251773189}"/>
+              </a:ext>
+            </a:extLst>
+          </p:cNvPr>
+          <p:cNvSpPr>
+            <a:spLocks xmlns:a="http://schemas.openxmlformats.org/drawingml/2006/main" noGrp="1"/>
+          </p:cNvSpPr>
+          <p:nvPr/>
+        </p:nvSpPr>
+        <p:spPr>
+          <a:xfrm xmlns:a="http://schemas.openxmlformats.org/drawingml/2006/main">
+            <a:off x="9096375" y="5353050"/>
             <a:ext cx="2190750" cy="266700"/>
           </a:xfrm>
           <a:prstGeom xmlns:a="http://schemas.openxmlformats.org/drawingml/2006/main" prst="rect">
@@ -6084,7 +9210,7 @@
     </p:spTree>
     <p:extLst>
       <p:ext uri="{BB962C8B-B14F-4D97-AF65-F5344CB8AC3E}">
-        <p14:creationId xmlns:p14="http://schemas.microsoft.com/office/powerpoint/2010/main" val="1043976208"/>
+        <p14:creationId xmlns:p14="http://schemas.microsoft.com/office/powerpoint/2010/main" val="349358355"/>
       </p:ext>
     </p:extLst>
   </p:cSld>
@@ -6112,10 +9238,10 @@
       </p:grpSpPr>
       <p:sp>
         <p:nvSpPr>
-          <p:cNvPr id="8" name="slide-title">
-            <a:extLst xmlns:a="http://schemas.openxmlformats.org/drawingml/2006/main">
-              <a:ext uri="{FF2B5EF4-FFF2-40B4-BE49-F238E27FC236}">
-                <a16:creationId xmlns:a16="http://schemas.microsoft.com/office/drawing/2014/main" id="{83DD3937-E9E3-4CAE-9502-4A12C9E29A3F}"/>
+          <p:cNvPr id="8" name="">
+            <a:extLst xmlns:a="http://schemas.openxmlformats.org/drawingml/2006/main">
+              <a:ext uri="{FF2B5EF4-FFF2-40B4-BE49-F238E27FC236}">
+                <a16:creationId xmlns:a16="http://schemas.microsoft.com/office/drawing/2014/main" id="{1CDD6ABC-975E-4721-BC4C-8559D0394CA2}"/>
               </a:ext>
             </a:extLst>
           </p:cNvPr>
@@ -6127,7 +9253,7 @@
         <p:spPr>
           <a:xfrm xmlns:a="http://schemas.openxmlformats.org/drawingml/2006/main">
             <a:off x="666750" y="323850"/>
-            <a:ext cx="8763000" cy="552450"/>
+            <a:ext cx="9715500" cy="495300"/>
           </a:xfrm>
           <a:prstGeom xmlns:a="http://schemas.openxmlformats.org/drawingml/2006/main" prst="rect">
             <a:avLst/>
@@ -6162,22 +9288,22 @@
       </p:sp>
       <p:sp>
         <p:nvSpPr>
-          <p:cNvPr id="2" name="slide-subtitle">
-            <a:extLst xmlns:a="http://schemas.openxmlformats.org/drawingml/2006/main">
-              <a:ext uri="{FF2B5EF4-FFF2-40B4-BE49-F238E27FC236}">
-                <a16:creationId xmlns:a16="http://schemas.microsoft.com/office/drawing/2014/main" id="{1CD34619-D035-4DF5-B30B-F433419FC6D7}"/>
-              </a:ext>
-            </a:extLst>
-          </p:cNvPr>
-          <p:cNvSpPr>
-            <a:spLocks xmlns:a="http://schemas.openxmlformats.org/drawingml/2006/main" noGrp="1"/>
-          </p:cNvSpPr>
-          <p:nvPr/>
-        </p:nvSpPr>
-        <p:spPr>
-          <a:xfrm xmlns:a="http://schemas.openxmlformats.org/drawingml/2006/main">
-            <a:off x="666750" y="838200"/>
-            <a:ext cx="9144000" cy="323850"/>
+          <p:cNvPr id="2" name="">
+            <a:extLst xmlns:a="http://schemas.openxmlformats.org/drawingml/2006/main">
+              <a:ext uri="{FF2B5EF4-FFF2-40B4-BE49-F238E27FC236}">
+                <a16:creationId xmlns:a16="http://schemas.microsoft.com/office/drawing/2014/main" id="{37E7D5B4-B11C-427E-AF39-44D881D77016}"/>
+              </a:ext>
+            </a:extLst>
+          </p:cNvPr>
+          <p:cNvSpPr>
+            <a:spLocks xmlns:a="http://schemas.openxmlformats.org/drawingml/2006/main" noGrp="1"/>
+          </p:cNvSpPr>
+          <p:nvPr/>
+        </p:nvSpPr>
+        <p:spPr>
+          <a:xfrm xmlns:a="http://schemas.openxmlformats.org/drawingml/2006/main">
+            <a:off x="666750" y="876300"/>
+            <a:ext cx="9810750" cy="285750"/>
           </a:xfrm>
           <a:prstGeom xmlns:a="http://schemas.openxmlformats.org/drawingml/2006/main" prst="rect">
             <a:avLst/>
@@ -6212,10 +9338,10 @@
       </p:sp>
       <p:sp>
         <p:nvSpPr>
-          <p:cNvPr id="3" name="slide-number">
-            <a:extLst xmlns:a="http://schemas.openxmlformats.org/drawingml/2006/main">
-              <a:ext uri="{FF2B5EF4-FFF2-40B4-BE49-F238E27FC236}">
-                <a16:creationId xmlns:a16="http://schemas.microsoft.com/office/drawing/2014/main" id="{7723402C-13AB-4D24-B0F9-9324EB6D890C}"/>
+          <p:cNvPr id="3" name="">
+            <a:extLst xmlns:a="http://schemas.openxmlformats.org/drawingml/2006/main">
+              <a:ext uri="{FF2B5EF4-FFF2-40B4-BE49-F238E27FC236}">
+                <a16:creationId xmlns:a16="http://schemas.microsoft.com/office/drawing/2014/main" id="{67F4FB5F-D0AD-47D1-B794-F51E2851F8FC}"/>
               </a:ext>
             </a:extLst>
           </p:cNvPr>
@@ -6269,7 +9395,7 @@
           <p:nvPr/>
         </p:nvPicPr>
         <p:blipFill>
-          <a:blip xmlns:r="http://schemas.openxmlformats.org/officeDocument/2006/relationships" xmlns:a="http://schemas.openxmlformats.org/drawingml/2006/main" r:embed="Rb91243cbdc8a4267"/>
+          <a:blip xmlns:r="http://schemas.openxmlformats.org/officeDocument/2006/relationships" xmlns:a="http://schemas.openxmlformats.org/drawingml/2006/main" r:embed="Ra8c04cf299ad4e44"/>
           <a:stretch xmlns:a="http://schemas.openxmlformats.org/drawingml/2006/main"/>
         </p:blipFill>
         <p:spPr>
@@ -6287,7 +9413,7 @@
           <p:cNvPr id="5" name="">
             <a:extLst xmlns:a="http://schemas.openxmlformats.org/drawingml/2006/main">
               <a:ext uri="{FF2B5EF4-FFF2-40B4-BE49-F238E27FC236}">
-                <a16:creationId xmlns:a16="http://schemas.microsoft.com/office/drawing/2014/main" id="{8D387B04-02DB-4B5A-A113-4D09C7C2DA34}"/>
+                <a16:creationId xmlns:a16="http://schemas.microsoft.com/office/drawing/2014/main" id="{C36EA771-6069-4ACE-A9CC-0CCB1987FBF9}"/>
               </a:ext>
             </a:extLst>
           </p:cNvPr>
@@ -6337,7 +9463,7 @@
           <p:cNvPr id="6" name="">
             <a:extLst xmlns:a="http://schemas.openxmlformats.org/drawingml/2006/main">
               <a:ext uri="{FF2B5EF4-FFF2-40B4-BE49-F238E27FC236}">
-                <a16:creationId xmlns:a16="http://schemas.microsoft.com/office/drawing/2014/main" id="{661E8A7B-FC1F-417C-8F45-85DFCA54884A}"/>
+                <a16:creationId xmlns:a16="http://schemas.microsoft.com/office/drawing/2014/main" id="{397757E2-6974-477A-8A25-24166347F61E}"/>
               </a:ext>
             </a:extLst>
           </p:cNvPr>
@@ -6387,7 +9513,7 @@
           <p:cNvPr id="7" name="">
             <a:extLst xmlns:a="http://schemas.openxmlformats.org/drawingml/2006/main">
               <a:ext uri="{FF2B5EF4-FFF2-40B4-BE49-F238E27FC236}">
-                <a16:creationId xmlns:a16="http://schemas.microsoft.com/office/drawing/2014/main" id="{B6481718-B7C9-4A6F-93D2-02135F0A3D07}"/>
+                <a16:creationId xmlns:a16="http://schemas.microsoft.com/office/drawing/2014/main" id="{C5936023-80AF-4F6F-9A71-50C43FC6DA5E}"/>
               </a:ext>
             </a:extLst>
           </p:cNvPr>
@@ -6435,7 +9561,7 @@
     </p:spTree>
     <p:extLst>
       <p:ext uri="{BB962C8B-B14F-4D97-AF65-F5344CB8AC3E}">
-        <p14:creationId xmlns:p14="http://schemas.microsoft.com/office/powerpoint/2010/main" val="295806931"/>
+        <p14:creationId xmlns:p14="http://schemas.microsoft.com/office/powerpoint/2010/main" val="1068661775"/>
       </p:ext>
     </p:extLst>
   </p:cSld>
@@ -6463,10 +9589,10 @@
       </p:grpSpPr>
       <p:sp>
         <p:nvSpPr>
-          <p:cNvPr id="8" name="slide-title">
-            <a:extLst xmlns:a="http://schemas.openxmlformats.org/drawingml/2006/main">
-              <a:ext uri="{FF2B5EF4-FFF2-40B4-BE49-F238E27FC236}">
-                <a16:creationId xmlns:a16="http://schemas.microsoft.com/office/drawing/2014/main" id="{616B3FCE-C0A9-4808-9D28-F390AC5793E0}"/>
+          <p:cNvPr id="8" name="">
+            <a:extLst xmlns:a="http://schemas.openxmlformats.org/drawingml/2006/main">
+              <a:ext uri="{FF2B5EF4-FFF2-40B4-BE49-F238E27FC236}">
+                <a16:creationId xmlns:a16="http://schemas.microsoft.com/office/drawing/2014/main" id="{D7DE2BD8-7222-41E2-B728-72852C0E45BA}"/>
               </a:ext>
             </a:extLst>
           </p:cNvPr>
@@ -6478,7 +9604,7 @@
         <p:spPr>
           <a:xfrm xmlns:a="http://schemas.openxmlformats.org/drawingml/2006/main">
             <a:off x="666750" y="323850"/>
-            <a:ext cx="8763000" cy="552450"/>
+            <a:ext cx="9715500" cy="495300"/>
           </a:xfrm>
           <a:prstGeom xmlns:a="http://schemas.openxmlformats.org/drawingml/2006/main" prst="rect">
             <a:avLst/>
@@ -6513,22 +9639,22 @@
       </p:sp>
       <p:sp>
         <p:nvSpPr>
-          <p:cNvPr id="2" name="slide-subtitle">
-            <a:extLst xmlns:a="http://schemas.openxmlformats.org/drawingml/2006/main">
-              <a:ext uri="{FF2B5EF4-FFF2-40B4-BE49-F238E27FC236}">
-                <a16:creationId xmlns:a16="http://schemas.microsoft.com/office/drawing/2014/main" id="{C68FD5DF-77E7-4884-9949-8C68DF14E762}"/>
-              </a:ext>
-            </a:extLst>
-          </p:cNvPr>
-          <p:cNvSpPr>
-            <a:spLocks xmlns:a="http://schemas.openxmlformats.org/drawingml/2006/main" noGrp="1"/>
-          </p:cNvSpPr>
-          <p:nvPr/>
-        </p:nvSpPr>
-        <p:spPr>
-          <a:xfrm xmlns:a="http://schemas.openxmlformats.org/drawingml/2006/main">
-            <a:off x="666750" y="838200"/>
-            <a:ext cx="9144000" cy="323850"/>
+          <p:cNvPr id="2" name="">
+            <a:extLst xmlns:a="http://schemas.openxmlformats.org/drawingml/2006/main">
+              <a:ext uri="{FF2B5EF4-FFF2-40B4-BE49-F238E27FC236}">
+                <a16:creationId xmlns:a16="http://schemas.microsoft.com/office/drawing/2014/main" id="{5CC8A4E4-6479-4C7C-A6A3-58243DF3E8DA}"/>
+              </a:ext>
+            </a:extLst>
+          </p:cNvPr>
+          <p:cNvSpPr>
+            <a:spLocks xmlns:a="http://schemas.openxmlformats.org/drawingml/2006/main" noGrp="1"/>
+          </p:cNvSpPr>
+          <p:nvPr/>
+        </p:nvSpPr>
+        <p:spPr>
+          <a:xfrm xmlns:a="http://schemas.openxmlformats.org/drawingml/2006/main">
+            <a:off x="666750" y="876300"/>
+            <a:ext cx="9810750" cy="285750"/>
           </a:xfrm>
           <a:prstGeom xmlns:a="http://schemas.openxmlformats.org/drawingml/2006/main" prst="rect">
             <a:avLst/>
@@ -6556,17 +9682,17 @@
                   <a:srgbClr val="A9BACB"/>
                 </a:solidFill>
               </a:rPr>
-              <a:t>The final branch passed the permanent governance workflow.</a:t>
-            </a:r>
-          </a:p>
-        </p:txBody>
-      </p:sp>
-      <p:sp>
-        <p:nvSpPr>
-          <p:cNvPr id="3" name="slide-number">
-            <a:extLst xmlns:a="http://schemas.openxmlformats.org/drawingml/2006/main">
-              <a:ext uri="{FF2B5EF4-FFF2-40B4-BE49-F238E27FC236}">
-                <a16:creationId xmlns:a16="http://schemas.microsoft.com/office/drawing/2014/main" id="{979554AA-EF99-4DA3-8119-07180D06B456}"/>
+              <a:t>A verified green CI run captured the submission-package evidence.</a:t>
+            </a:r>
+          </a:p>
+        </p:txBody>
+      </p:sp>
+      <p:sp>
+        <p:nvSpPr>
+          <p:cNvPr id="3" name="">
+            <a:extLst xmlns:a="http://schemas.openxmlformats.org/drawingml/2006/main">
+              <a:ext uri="{FF2B5EF4-FFF2-40B4-BE49-F238E27FC236}">
+                <a16:creationId xmlns:a16="http://schemas.microsoft.com/office/drawing/2014/main" id="{A4C9E60A-7F46-4547-BDA6-F2484854E74C}"/>
               </a:ext>
             </a:extLst>
           </p:cNvPr>
@@ -6620,7 +9746,7 @@
           <p:nvPr/>
         </p:nvPicPr>
         <p:blipFill>
-          <a:blip xmlns:r="http://schemas.openxmlformats.org/officeDocument/2006/relationships" xmlns:a="http://schemas.openxmlformats.org/drawingml/2006/main" r:embed="R33514bd77e654a68"/>
+          <a:blip xmlns:r="http://schemas.openxmlformats.org/officeDocument/2006/relationships" xmlns:a="http://schemas.openxmlformats.org/drawingml/2006/main" r:embed="R175421cf467f4003"/>
           <a:stretch xmlns:a="http://schemas.openxmlformats.org/drawingml/2006/main"/>
         </p:blipFill>
         <p:spPr>
@@ -6638,7 +9764,7 @@
           <p:cNvPr id="5" name="">
             <a:extLst xmlns:a="http://schemas.openxmlformats.org/drawingml/2006/main">
               <a:ext uri="{FF2B5EF4-FFF2-40B4-BE49-F238E27FC236}">
-                <a16:creationId xmlns:a16="http://schemas.microsoft.com/office/drawing/2014/main" id="{E6915D36-CADF-415E-A9CD-7D3B885F7B5E}"/>
+                <a16:creationId xmlns:a16="http://schemas.microsoft.com/office/drawing/2014/main" id="{D2C2DDA1-9ABA-4A4C-93A2-58D3181030CB}"/>
               </a:ext>
             </a:extLst>
           </p:cNvPr>
@@ -6688,7 +9814,7 @@
           <p:cNvPr id="6" name="">
             <a:extLst xmlns:a="http://schemas.openxmlformats.org/drawingml/2006/main">
               <a:ext uri="{FF2B5EF4-FFF2-40B4-BE49-F238E27FC236}">
-                <a16:creationId xmlns:a16="http://schemas.microsoft.com/office/drawing/2014/main" id="{6735E823-0E4B-48EA-BCC9-FD45E3C313A8}"/>
+                <a16:creationId xmlns:a16="http://schemas.microsoft.com/office/drawing/2014/main" id="{91D47B44-7848-4097-978E-C295FF6826BC}"/>
               </a:ext>
             </a:extLst>
           </p:cNvPr>
@@ -6700,7 +9826,7 @@
         <p:spPr>
           <a:xfrm xmlns:a="http://schemas.openxmlformats.org/drawingml/2006/main">
             <a:off x="8001000" y="2095500"/>
-            <a:ext cx="3143250" cy="762000"/>
+            <a:ext cx="3143250" cy="990600"/>
           </a:xfrm>
           <a:prstGeom xmlns:a="http://schemas.openxmlformats.org/drawingml/2006/main" prst="rect">
             <a:avLst/>
@@ -6728,7 +9854,41 @@
                   <a:srgbClr val="F4F8FB"/>
                 </a:solidFill>
               </a:rPr>
-              <a:t>first failed CI -&gt; diagnosis -&gt; repair -&gt; green CI</a:t>
+              <a:t>first failed CI -&gt;</a:t>
+            </a:r>
+          </a:p>
+          <a:p xmlns:a="http://schemas.openxmlformats.org/drawingml/2006/main">
+            <a:pPr>
+              <a:defRPr sz="1950" b="1">
+                <a:solidFill>
+                  <a:srgbClr val="F4F8FB"/>
+                </a:solidFill>
+              </a:defRPr>
+            </a:pPr>
+            <a:r>
+              <a:rPr sz="1950" b="1">
+                <a:solidFill>
+                  <a:srgbClr val="F4F8FB"/>
+                </a:solidFill>
+              </a:rPr>
+              <a:t>diagnosis -&gt; repair -&gt;</a:t>
+            </a:r>
+          </a:p>
+          <a:p xmlns:a="http://schemas.openxmlformats.org/drawingml/2006/main">
+            <a:pPr>
+              <a:defRPr sz="1950" b="1">
+                <a:solidFill>
+                  <a:srgbClr val="F4F8FB"/>
+                </a:solidFill>
+              </a:defRPr>
+            </a:pPr>
+            <a:r>
+              <a:rPr sz="1950" b="1">
+                <a:solidFill>
+                  <a:srgbClr val="F4F8FB"/>
+                </a:solidFill>
+              </a:rPr>
+              <a:t>green CI</a:t>
             </a:r>
           </a:p>
         </p:txBody>
@@ -6738,18 +9898,18 @@
           <p:cNvPr id="7" name="">
             <a:extLst xmlns:a="http://schemas.openxmlformats.org/drawingml/2006/main">
               <a:ext uri="{FF2B5EF4-FFF2-40B4-BE49-F238E27FC236}">
-                <a16:creationId xmlns:a16="http://schemas.microsoft.com/office/drawing/2014/main" id="{A2F6BDA7-4A8E-4338-AEFE-ADEE579046E3}"/>
-              </a:ext>
-            </a:extLst>
-          </p:cNvPr>
-          <p:cNvSpPr>
-            <a:spLocks xmlns:a="http://schemas.openxmlformats.org/drawingml/2006/main" noGrp="1"/>
-          </p:cNvSpPr>
-          <p:nvPr/>
-        </p:nvSpPr>
-        <p:spPr>
-          <a:xfrm xmlns:a="http://schemas.openxmlformats.org/drawingml/2006/main">
-            <a:off x="8001000" y="3219450"/>
+                <a16:creationId xmlns:a16="http://schemas.microsoft.com/office/drawing/2014/main" id="{C41E9F00-D4F5-41BC-8E9E-A92B88649D0D}"/>
+              </a:ext>
+            </a:extLst>
+          </p:cNvPr>
+          <p:cNvSpPr>
+            <a:spLocks xmlns:a="http://schemas.openxmlformats.org/drawingml/2006/main" noGrp="1"/>
+          </p:cNvSpPr>
+          <p:nvPr/>
+        </p:nvSpPr>
+        <p:spPr>
+          <a:xfrm xmlns:a="http://schemas.openxmlformats.org/drawingml/2006/main">
+            <a:off x="8001000" y="3409950"/>
             <a:ext cx="3238500" cy="1238250"/>
           </a:xfrm>
           <a:prstGeom xmlns:a="http://schemas.openxmlformats.org/drawingml/2006/main" prst="rect">
@@ -6778,7 +9938,7 @@
                   <a:srgbClr val="A9BACB"/>
                 </a:solidFill>
               </a:rPr>
-              <a:t>Final run 31517900793 passed change classification, policy tests, evaluation, pipeline integrity, audit trail, and advisory graceful skip.</a:t>
+              <a:t>Verified submission-package CI run 31520499134 passed change classification, policy tests, evaluation, pipeline integrity, audit trail, and advisory graceful skip.</a:t>
             </a:r>
           </a:p>
         </p:txBody>
@@ -6786,7 +9946,7 @@
     </p:spTree>
     <p:extLst>
       <p:ext uri="{BB962C8B-B14F-4D97-AF65-F5344CB8AC3E}">
-        <p14:creationId xmlns:p14="http://schemas.microsoft.com/office/powerpoint/2010/main" val="258011969"/>
+        <p14:creationId xmlns:p14="http://schemas.microsoft.com/office/powerpoint/2010/main" val="866202161"/>
       </p:ext>
     </p:extLst>
   </p:cSld>
@@ -6814,10 +9974,10 @@
       </p:grpSpPr>
       <p:sp>
         <p:nvSpPr>
-          <p:cNvPr id="7" name="slide-title">
-            <a:extLst xmlns:a="http://schemas.openxmlformats.org/drawingml/2006/main">
-              <a:ext uri="{FF2B5EF4-FFF2-40B4-BE49-F238E27FC236}">
-                <a16:creationId xmlns:a16="http://schemas.microsoft.com/office/drawing/2014/main" id="{A74347A2-671C-423B-B3E4-03DC1A2BB049}"/>
+          <p:cNvPr id="7" name="">
+            <a:extLst xmlns:a="http://schemas.openxmlformats.org/drawingml/2006/main">
+              <a:ext uri="{FF2B5EF4-FFF2-40B4-BE49-F238E27FC236}">
+                <a16:creationId xmlns:a16="http://schemas.microsoft.com/office/drawing/2014/main" id="{5F26E0C9-8948-4B3D-BC30-8F3C460A1F50}"/>
               </a:ext>
             </a:extLst>
           </p:cNvPr>
@@ -6829,7 +9989,7 @@
         <p:spPr>
           <a:xfrm xmlns:a="http://schemas.openxmlformats.org/drawingml/2006/main">
             <a:off x="666750" y="323850"/>
-            <a:ext cx="8763000" cy="552450"/>
+            <a:ext cx="9715500" cy="495300"/>
           </a:xfrm>
           <a:prstGeom xmlns:a="http://schemas.openxmlformats.org/drawingml/2006/main" prst="rect">
             <a:avLst/>
@@ -6864,22 +10024,22 @@
       </p:sp>
       <p:sp>
         <p:nvSpPr>
-          <p:cNvPr id="2" name="slide-subtitle">
-            <a:extLst xmlns:a="http://schemas.openxmlformats.org/drawingml/2006/main">
-              <a:ext uri="{FF2B5EF4-FFF2-40B4-BE49-F238E27FC236}">
-                <a16:creationId xmlns:a16="http://schemas.microsoft.com/office/drawing/2014/main" id="{B719761B-7418-4D98-B327-672598BB9C51}"/>
-              </a:ext>
-            </a:extLst>
-          </p:cNvPr>
-          <p:cNvSpPr>
-            <a:spLocks xmlns:a="http://schemas.openxmlformats.org/drawingml/2006/main" noGrp="1"/>
-          </p:cNvSpPr>
-          <p:nvPr/>
-        </p:nvSpPr>
-        <p:spPr>
-          <a:xfrm xmlns:a="http://schemas.openxmlformats.org/drawingml/2006/main">
-            <a:off x="666750" y="838200"/>
-            <a:ext cx="9144000" cy="323850"/>
+          <p:cNvPr id="2" name="">
+            <a:extLst xmlns:a="http://schemas.openxmlformats.org/drawingml/2006/main">
+              <a:ext uri="{FF2B5EF4-FFF2-40B4-BE49-F238E27FC236}">
+                <a16:creationId xmlns:a16="http://schemas.microsoft.com/office/drawing/2014/main" id="{06BEF1E2-3EE0-481B-9B5F-701A4EA163F5}"/>
+              </a:ext>
+            </a:extLst>
+          </p:cNvPr>
+          <p:cNvSpPr>
+            <a:spLocks xmlns:a="http://schemas.openxmlformats.org/drawingml/2006/main" noGrp="1"/>
+          </p:cNvSpPr>
+          <p:nvPr/>
+        </p:nvSpPr>
+        <p:spPr>
+          <a:xfrm xmlns:a="http://schemas.openxmlformats.org/drawingml/2006/main">
+            <a:off x="666750" y="876300"/>
+            <a:ext cx="9810750" cy="285750"/>
           </a:xfrm>
           <a:prstGeom xmlns:a="http://schemas.openxmlformats.org/drawingml/2006/main" prst="rect">
             <a:avLst/>
@@ -6914,10 +10074,10 @@
       </p:sp>
       <p:sp>
         <p:nvSpPr>
-          <p:cNvPr id="3" name="slide-number">
-            <a:extLst xmlns:a="http://schemas.openxmlformats.org/drawingml/2006/main">
-              <a:ext uri="{FF2B5EF4-FFF2-40B4-BE49-F238E27FC236}">
-                <a16:creationId xmlns:a16="http://schemas.microsoft.com/office/drawing/2014/main" id="{51DF9D3C-D23B-4B00-A662-89C5A8BB09A1}"/>
+          <p:cNvPr id="3" name="">
+            <a:extLst xmlns:a="http://schemas.openxmlformats.org/drawingml/2006/main">
+              <a:ext uri="{FF2B5EF4-FFF2-40B4-BE49-F238E27FC236}">
+                <a16:creationId xmlns:a16="http://schemas.microsoft.com/office/drawing/2014/main" id="{B3A86B0C-4633-49EF-93A4-B8E58980944E}"/>
               </a:ext>
             </a:extLst>
           </p:cNvPr>
@@ -6971,7 +10131,7 @@
           <p:nvPr/>
         </p:nvPicPr>
         <p:blipFill>
-          <a:blip xmlns:r="http://schemas.openxmlformats.org/officeDocument/2006/relationships" xmlns:a="http://schemas.openxmlformats.org/drawingml/2006/main" r:embed="R9bdc2e2d240946d8"/>
+          <a:blip xmlns:r="http://schemas.openxmlformats.org/officeDocument/2006/relationships" xmlns:a="http://schemas.openxmlformats.org/drawingml/2006/main" r:embed="R27bccb3410dd4141"/>
           <a:stretch xmlns:a="http://schemas.openxmlformats.org/drawingml/2006/main"/>
         </p:blipFill>
         <p:spPr>
@@ -6993,7 +10153,7 @@
           <p:nvPr/>
         </p:nvPicPr>
         <p:blipFill>
-          <a:blip xmlns:r="http://schemas.openxmlformats.org/officeDocument/2006/relationships" xmlns:a="http://schemas.openxmlformats.org/drawingml/2006/main" r:embed="R4cfa23d434224dc6"/>
+          <a:blip xmlns:r="http://schemas.openxmlformats.org/officeDocument/2006/relationships" xmlns:a="http://schemas.openxmlformats.org/drawingml/2006/main" r:embed="R4a9b55a71b6b4e14"/>
           <a:stretch xmlns:a="http://schemas.openxmlformats.org/drawingml/2006/main"/>
         </p:blipFill>
         <p:spPr>
@@ -7011,7 +10171,7 @@
           <p:cNvPr id="6" name="">
             <a:extLst xmlns:a="http://schemas.openxmlformats.org/drawingml/2006/main">
               <a:ext uri="{FF2B5EF4-FFF2-40B4-BE49-F238E27FC236}">
-                <a16:creationId xmlns:a16="http://schemas.microsoft.com/office/drawing/2014/main" id="{C6C8D5C1-B374-44A2-AFC9-231B391F3844}"/>
+                <a16:creationId xmlns:a16="http://schemas.microsoft.com/office/drawing/2014/main" id="{529D6A86-496B-423A-848B-DED24125F9EB}"/>
               </a:ext>
             </a:extLst>
           </p:cNvPr>
@@ -7059,7 +10219,7 @@
     </p:spTree>
     <p:extLst>
       <p:ext uri="{BB962C8B-B14F-4D97-AF65-F5344CB8AC3E}">
-        <p14:creationId xmlns:p14="http://schemas.microsoft.com/office/powerpoint/2010/main" val="716347752"/>
+        <p14:creationId xmlns:p14="http://schemas.microsoft.com/office/powerpoint/2010/main" val="2136284389"/>
       </p:ext>
     </p:extLst>
   </p:cSld>
